--- a/Cacau_Raro_Percepcao_Consumidor.pptx
+++ b/Cacau_Raro_Percepcao_Consumidor.pptx
@@ -1551,7 +1551,7 @@
         </p:nvSpPr>
         <p:spPr>
           <a:xfrm>
-            <a:off x="777240" y="1965960"/>
+            <a:off x="777240" y="2103120"/>
             <a:ext cx="5760720" cy="365760"/>
           </a:xfrm>
           <a:prstGeom prst="rect">
@@ -1590,7 +1590,7 @@
         </p:nvSpPr>
         <p:spPr>
           <a:xfrm>
-            <a:off x="731520" y="2377440"/>
+            <a:off x="731520" y="2514600"/>
             <a:ext cx="6035040" cy="1371600"/>
           </a:xfrm>
           <a:prstGeom prst="rect">
@@ -1629,7 +1629,7 @@
         </p:nvSpPr>
         <p:spPr>
           <a:xfrm>
-            <a:off x="777240" y="3520440"/>
+            <a:off x="777240" y="3657600"/>
             <a:ext cx="5760720" cy="502920"/>
           </a:xfrm>
           <a:prstGeom prst="rect">
@@ -1662,37 +1662,14 @@
       </p:sp>
       <p:sp>
         <p:nvSpPr>
-          <p:cNvPr id="7" name="Shape 4"/>
-          <p:cNvSpPr/>
-          <p:nvPr/>
-        </p:nvSpPr>
-        <p:spPr>
-          <a:xfrm>
-            <a:off x="795528" y="4160520"/>
-            <a:ext cx="1005840" cy="0"/>
-          </a:xfrm>
-          <a:prstGeom prst="line">
-            <a:avLst/>
-          </a:prstGeom>
-          <a:noFill/>
-          <a:ln w="15875">
-            <a:solidFill>
-              <a:srgbClr val="9C7C3F"/>
-            </a:solidFill>
-            <a:prstDash val="solid"/>
-          </a:ln>
-        </p:spPr>
-      </p:sp>
-      <p:sp>
-        <p:nvSpPr>
-          <p:cNvPr id="8" name="Text 5"/>
+          <p:cNvPr id="7" name="Text 4"/>
           <p:cNvSpPr txBox="1"/>
           <p:nvPr/>
         </p:nvSpPr>
         <p:spPr>
           <a:xfrm>
             <a:off x="777240" y="4343400"/>
-            <a:ext cx="5669280" cy="822960"/>
+            <a:ext cx="5669280" cy="685800"/>
           </a:xfrm>
           <a:prstGeom prst="rect">
             <a:avLst/>
@@ -1719,7 +1696,7 @@
                 <a:ea typeface="Calibri" pitchFamily="34" charset="-122"/>
                 <a:cs typeface="Calibri" pitchFamily="34" charset="-120"/>
               </a:rPr>
-              <a:t>Proposta de embalagem premium para maximizar a percepção</a:t>
+              <a:t>Proposta de embalagem premium</a:t>
             </a:r>
             <a:endParaRPr lang="en-US" sz="1400" dirty="0"/>
           </a:p>
@@ -1739,48 +1716,9 @@
                 <a:ea typeface="Calibri" pitchFamily="34" charset="-122"/>
                 <a:cs typeface="Calibri" pitchFamily="34" charset="-120"/>
               </a:rPr>
-              <a:t>de valor de uma nova marca de chocolate artesanal brasileiro.</a:t>
+              <a:t>para chocolate artesanal brasileiro</a:t>
             </a:r>
             <a:endParaRPr lang="en-US" sz="1400" dirty="0"/>
-          </a:p>
-        </p:txBody>
-      </p:sp>
-      <p:sp>
-        <p:nvSpPr>
-          <p:cNvPr id="9" name="Text 6"/>
-          <p:cNvSpPr txBox="1"/>
-          <p:nvPr/>
-        </p:nvSpPr>
-        <p:spPr>
-          <a:xfrm>
-            <a:off x="777240" y="6172200"/>
-            <a:ext cx="5486400" cy="320040"/>
-          </a:xfrm>
-          <a:prstGeom prst="rect">
-            <a:avLst/>
-          </a:prstGeom>
-          <a:noFill/>
-          <a:ln/>
-        </p:spPr>
-        <p:txBody>
-          <a:bodyPr wrap="square" lIns="0" tIns="0" rIns="0" bIns="0" rtlCol="0" anchor="ctr"/>
-          <a:lstStyle/>
-          <a:p>
-            <a:pPr indent="0" marL="0">
-              <a:buNone/>
-            </a:pPr>
-            <a:r>
-              <a:rPr lang="en-US" sz="1050" spc="200" kern="0" dirty="0">
-                <a:solidFill>
-                  <a:srgbClr val="9C7C3F"/>
-                </a:solidFill>
-                <a:latin typeface="Calibri" pitchFamily="34" charset="0"/>
-                <a:ea typeface="Calibri" pitchFamily="34" charset="-122"/>
-                <a:cs typeface="Calibri" pitchFamily="34" charset="-120"/>
-              </a:rPr>
-              <a:t>Chocolate Artesanal Brasileiro</a:t>
-            </a:r>
-            <a:endParaRPr lang="en-US" sz="1050" dirty="0"/>
           </a:p>
         </p:txBody>
       </p:sp>
@@ -1888,7 +1826,7 @@
                 <a:ea typeface="Cambria" pitchFamily="34" charset="-122"/>
                 <a:cs typeface="Cambria" pitchFamily="34" charset="-120"/>
               </a:rPr>
-              <a:t>Descrição geral da embalagem</a:t>
+              <a:t>Descrição da embalagem</a:t>
             </a:r>
             <a:endParaRPr lang="en-US" sz="3400" dirty="0"/>
           </a:p>
@@ -1896,30 +1834,89 @@
       </p:sp>
       <p:sp>
         <p:nvSpPr>
-          <p:cNvPr id="4" name="Text 2"/>
-          <p:cNvSpPr txBox="1"/>
-          <p:nvPr/>
-        </p:nvSpPr>
-        <p:spPr>
-          <a:xfrm>
-            <a:off x="640080" y="1508760"/>
-            <a:ext cx="7680960" cy="502920"/>
-          </a:xfrm>
-          <a:prstGeom prst="rect">
-            <a:avLst/>
-          </a:prstGeom>
-          <a:noFill/>
-          <a:ln/>
-        </p:spPr>
-        <p:txBody>
-          <a:bodyPr wrap="square" lIns="0" tIns="0" rIns="0" bIns="0" rtlCol="0" anchor="ctr"/>
-          <a:lstStyle/>
-          <a:p>
-            <a:pPr indent="0" marL="0">
-              <a:buNone/>
-            </a:pPr>
-            <a:r>
-              <a:rPr lang="en-US" sz="1350" i="1" dirty="0">
+          <p:cNvPr id="4" name="Shape 2"/>
+          <p:cNvSpPr/>
+          <p:nvPr/>
+        </p:nvSpPr>
+        <p:spPr>
+          <a:xfrm>
+            <a:off x="640080" y="2103120"/>
+            <a:ext cx="118872" cy="118872"/>
+          </a:xfrm>
+          <a:prstGeom prst="rect">
+            <a:avLst/>
+          </a:prstGeom>
+          <a:solidFill>
+            <a:srgbClr val="C6A15B"/>
+          </a:solidFill>
+          <a:ln/>
+        </p:spPr>
+      </p:sp>
+      <p:sp>
+        <p:nvSpPr>
+          <p:cNvPr id="5" name="Text 3"/>
+          <p:cNvSpPr txBox="1"/>
+          <p:nvPr/>
+        </p:nvSpPr>
+        <p:spPr>
+          <a:xfrm>
+            <a:off x="960120" y="1938528"/>
+            <a:ext cx="4800600" cy="365760"/>
+          </a:xfrm>
+          <a:prstGeom prst="rect">
+            <a:avLst/>
+          </a:prstGeom>
+          <a:noFill/>
+          <a:ln/>
+        </p:spPr>
+        <p:txBody>
+          <a:bodyPr wrap="square" lIns="0" tIns="0" rIns="0" bIns="0" rtlCol="0" anchor="ctr"/>
+          <a:lstStyle/>
+          <a:p>
+            <a:pPr indent="0" marL="0">
+              <a:buNone/>
+            </a:pPr>
+            <a:r>
+              <a:rPr lang="en-US" sz="1800" b="1" dirty="0">
+                <a:solidFill>
+                  <a:srgbClr val="EFE6D8"/>
+                </a:solidFill>
+                <a:latin typeface="Cambria" pitchFamily="34" charset="0"/>
+                <a:ea typeface="Cambria" pitchFamily="34" charset="-122"/>
+                <a:cs typeface="Cambria" pitchFamily="34" charset="-120"/>
+              </a:rPr>
+              <a:t>Material</a:t>
+            </a:r>
+            <a:endParaRPr lang="en-US" sz="1800" dirty="0"/>
+          </a:p>
+        </p:txBody>
+      </p:sp>
+      <p:sp>
+        <p:nvSpPr>
+          <p:cNvPr id="6" name="Text 4"/>
+          <p:cNvSpPr txBox="1"/>
+          <p:nvPr/>
+        </p:nvSpPr>
+        <p:spPr>
+          <a:xfrm>
+            <a:off x="960120" y="2304288"/>
+            <a:ext cx="4800600" cy="365760"/>
+          </a:xfrm>
+          <a:prstGeom prst="rect">
+            <a:avLst/>
+          </a:prstGeom>
+          <a:noFill/>
+          <a:ln/>
+        </p:spPr>
+        <p:txBody>
+          <a:bodyPr wrap="square" lIns="0" tIns="0" rIns="0" bIns="0" rtlCol="0" anchor="ctr"/>
+          <a:lstStyle/>
+          <a:p>
+            <a:pPr indent="0" marL="0">
+              <a:buNone/>
+            </a:pPr>
+            <a:r>
+              <a:rPr lang="en-US" sz="1300" dirty="0">
                 <a:solidFill>
                   <a:srgbClr val="C9BEAC"/>
                 </a:solidFill>
@@ -1927,102 +1924,156 @@
                 <a:ea typeface="Calibri" pitchFamily="34" charset="-122"/>
                 <a:cs typeface="Calibri" pitchFamily="34" charset="-120"/>
               </a:rPr>
-              <a:t>Cinco decisões de design trabalham juntas para transmitir exclusividade, tradição, sofisticação, elegância e qualidade.</a:t>
-            </a:r>
-            <a:endParaRPr lang="en-US" sz="1350" dirty="0"/>
-          </a:p>
-        </p:txBody>
-      </p:sp>
-      <p:sp>
-        <p:nvSpPr>
-          <p:cNvPr id="5" name="Shape 3"/>
+              <a:t>Papel soft touch, toque aveludado</a:t>
+            </a:r>
+            <a:endParaRPr lang="en-US" sz="1300" dirty="0"/>
+          </a:p>
+        </p:txBody>
+      </p:sp>
+      <p:sp>
+        <p:nvSpPr>
+          <p:cNvPr id="7" name="Shape 5"/>
           <p:cNvSpPr/>
           <p:nvPr/>
         </p:nvSpPr>
         <p:spPr>
           <a:xfrm>
-            <a:off x="640080" y="2377440"/>
-            <a:ext cx="566928" cy="566928"/>
-          </a:xfrm>
-          <a:prstGeom prst="ellipse">
+            <a:off x="640080" y="3063240"/>
+            <a:ext cx="118872" cy="118872"/>
+          </a:xfrm>
+          <a:prstGeom prst="rect">
             <a:avLst/>
           </a:prstGeom>
           <a:solidFill>
-            <a:srgbClr val="3C2A1C"/>
+            <a:srgbClr val="C6A15B"/>
           </a:solidFill>
-          <a:ln w="12700">
-            <a:solidFill>
-              <a:srgbClr val="9C7C3F"/>
-            </a:solidFill>
-            <a:prstDash val="solid"/>
-          </a:ln>
-        </p:spPr>
-      </p:sp>
-      <p:sp>
-        <p:nvSpPr>
-          <p:cNvPr id="6" name="Text 4"/>
-          <p:cNvSpPr txBox="1"/>
-          <p:nvPr/>
-        </p:nvSpPr>
-        <p:spPr>
-          <a:xfrm>
-            <a:off x="640080" y="2377440"/>
-            <a:ext cx="566928" cy="566928"/>
-          </a:xfrm>
-          <a:prstGeom prst="rect">
-            <a:avLst/>
-          </a:prstGeom>
-          <a:noFill/>
-          <a:ln/>
-        </p:spPr>
-        <p:txBody>
-          <a:bodyPr wrap="square" lIns="0" tIns="0" rIns="0" bIns="0" rtlCol="0" anchor="ctr"/>
-          <a:lstStyle/>
-          <a:p>
-            <a:pPr algn="ctr" indent="0" marL="0">
-              <a:buNone/>
-            </a:pPr>
-            <a:r>
-              <a:rPr lang="en-US" sz="1600" b="1" dirty="0">
-                <a:solidFill>
-                  <a:srgbClr val="C6A15B"/>
+          <a:ln/>
+        </p:spPr>
+      </p:sp>
+      <p:sp>
+        <p:nvSpPr>
+          <p:cNvPr id="8" name="Text 6"/>
+          <p:cNvSpPr txBox="1"/>
+          <p:nvPr/>
+        </p:nvSpPr>
+        <p:spPr>
+          <a:xfrm>
+            <a:off x="960120" y="2898648"/>
+            <a:ext cx="4800600" cy="365760"/>
+          </a:xfrm>
+          <a:prstGeom prst="rect">
+            <a:avLst/>
+          </a:prstGeom>
+          <a:noFill/>
+          <a:ln/>
+        </p:spPr>
+        <p:txBody>
+          <a:bodyPr wrap="square" lIns="0" tIns="0" rIns="0" bIns="0" rtlCol="0" anchor="ctr"/>
+          <a:lstStyle/>
+          <a:p>
+            <a:pPr indent="0" marL="0">
+              <a:buNone/>
+            </a:pPr>
+            <a:r>
+              <a:rPr lang="en-US" sz="1800" b="1" dirty="0">
+                <a:solidFill>
+                  <a:srgbClr val="EFE6D8"/>
                 </a:solidFill>
                 <a:latin typeface="Cambria" pitchFamily="34" charset="0"/>
                 <a:ea typeface="Cambria" pitchFamily="34" charset="-122"/>
                 <a:cs typeface="Cambria" pitchFamily="34" charset="-120"/>
               </a:rPr>
-              <a:t>01</a:t>
-            </a:r>
-            <a:endParaRPr lang="en-US" sz="1600" dirty="0"/>
-          </a:p>
-        </p:txBody>
-      </p:sp>
-      <p:sp>
-        <p:nvSpPr>
-          <p:cNvPr id="7" name="Text 5"/>
-          <p:cNvSpPr txBox="1"/>
-          <p:nvPr/>
-        </p:nvSpPr>
-        <p:spPr>
-          <a:xfrm>
-            <a:off x="1417320" y="2313432"/>
-            <a:ext cx="6995160" cy="320040"/>
-          </a:xfrm>
-          <a:prstGeom prst="rect">
-            <a:avLst/>
-          </a:prstGeom>
-          <a:noFill/>
-          <a:ln/>
-        </p:spPr>
-        <p:txBody>
-          <a:bodyPr wrap="square" lIns="0" tIns="0" rIns="0" bIns="0" rtlCol="0" anchor="ctr"/>
-          <a:lstStyle/>
-          <a:p>
-            <a:pPr indent="0" marL="0">
-              <a:buNone/>
-            </a:pPr>
-            <a:r>
-              <a:rPr lang="en-US" sz="1600" b="1" dirty="0">
+              <a:t>Formato</a:t>
+            </a:r>
+            <a:endParaRPr lang="en-US" sz="1800" dirty="0"/>
+          </a:p>
+        </p:txBody>
+      </p:sp>
+      <p:sp>
+        <p:nvSpPr>
+          <p:cNvPr id="9" name="Text 7"/>
+          <p:cNvSpPr txBox="1"/>
+          <p:nvPr/>
+        </p:nvSpPr>
+        <p:spPr>
+          <a:xfrm>
+            <a:off x="960120" y="3264408"/>
+            <a:ext cx="4800600" cy="365760"/>
+          </a:xfrm>
+          <a:prstGeom prst="rect">
+            <a:avLst/>
+          </a:prstGeom>
+          <a:noFill/>
+          <a:ln/>
+        </p:spPr>
+        <p:txBody>
+          <a:bodyPr wrap="square" lIns="0" tIns="0" rIns="0" bIns="0" rtlCol="0" anchor="ctr"/>
+          <a:lstStyle/>
+          <a:p>
+            <a:pPr indent="0" marL="0">
+              <a:buNone/>
+            </a:pPr>
+            <a:r>
+              <a:rPr lang="en-US" sz="1300" dirty="0">
+                <a:solidFill>
+                  <a:srgbClr val="C9BEAC"/>
+                </a:solidFill>
+                <a:latin typeface="Calibri" pitchFamily="34" charset="0"/>
+                <a:ea typeface="Calibri" pitchFamily="34" charset="-122"/>
+                <a:cs typeface="Calibri" pitchFamily="34" charset="-120"/>
+              </a:rPr>
+              <a:t>Caixa-livro, abre como um estojo</a:t>
+            </a:r>
+            <a:endParaRPr lang="en-US" sz="1300" dirty="0"/>
+          </a:p>
+        </p:txBody>
+      </p:sp>
+      <p:sp>
+        <p:nvSpPr>
+          <p:cNvPr id="10" name="Shape 8"/>
+          <p:cNvSpPr/>
+          <p:nvPr/>
+        </p:nvSpPr>
+        <p:spPr>
+          <a:xfrm>
+            <a:off x="640080" y="4023360"/>
+            <a:ext cx="118872" cy="118872"/>
+          </a:xfrm>
+          <a:prstGeom prst="rect">
+            <a:avLst/>
+          </a:prstGeom>
+          <a:solidFill>
+            <a:srgbClr val="C6A15B"/>
+          </a:solidFill>
+          <a:ln/>
+        </p:spPr>
+      </p:sp>
+      <p:sp>
+        <p:nvSpPr>
+          <p:cNvPr id="11" name="Text 9"/>
+          <p:cNvSpPr txBox="1"/>
+          <p:nvPr/>
+        </p:nvSpPr>
+        <p:spPr>
+          <a:xfrm>
+            <a:off x="960120" y="3858768"/>
+            <a:ext cx="4800600" cy="365760"/>
+          </a:xfrm>
+          <a:prstGeom prst="rect">
+            <a:avLst/>
+          </a:prstGeom>
+          <a:noFill/>
+          <a:ln/>
+        </p:spPr>
+        <p:txBody>
+          <a:bodyPr wrap="square" lIns="0" tIns="0" rIns="0" bIns="0" rtlCol="0" anchor="ctr"/>
+          <a:lstStyle/>
+          <a:p>
+            <a:pPr indent="0" marL="0">
+              <a:buNone/>
+            </a:pPr>
+            <a:r>
+              <a:rPr lang="en-US" sz="1800" b="1" dirty="0">
                 <a:solidFill>
                   <a:srgbClr val="EFE6D8"/>
                 </a:solidFill>
@@ -2030,41 +2081,38 @@
                 <a:ea typeface="Cambria" pitchFamily="34" charset="-122"/>
                 <a:cs typeface="Cambria" pitchFamily="34" charset="-120"/>
               </a:rPr>
-              <a:t>Material</a:t>
-            </a:r>
-            <a:endParaRPr lang="en-US" sz="1600" dirty="0"/>
-          </a:p>
-        </p:txBody>
-      </p:sp>
-      <p:sp>
-        <p:nvSpPr>
-          <p:cNvPr id="8" name="Text 6"/>
-          <p:cNvSpPr txBox="1"/>
-          <p:nvPr/>
-        </p:nvSpPr>
-        <p:spPr>
-          <a:xfrm>
-            <a:off x="1417320" y="2624328"/>
-            <a:ext cx="6995160" cy="548640"/>
-          </a:xfrm>
-          <a:prstGeom prst="rect">
-            <a:avLst/>
-          </a:prstGeom>
-          <a:noFill/>
-          <a:ln/>
-        </p:spPr>
-        <p:txBody>
-          <a:bodyPr wrap="square" lIns="0" tIns="0" rIns="0" bIns="0" rtlCol="0" anchor="ctr"/>
-          <a:lstStyle/>
-          <a:p>
-            <a:pPr indent="0" marL="0">
-              <a:lnSpc>
-                <a:spcPct val="115000"/>
-              </a:lnSpc>
-              <a:buNone/>
-            </a:pPr>
-            <a:r>
-              <a:rPr lang="en-US" sz="1200" dirty="0">
+              <a:t>Acabamento</a:t>
+            </a:r>
+            <a:endParaRPr lang="en-US" sz="1800" dirty="0"/>
+          </a:p>
+        </p:txBody>
+      </p:sp>
+      <p:sp>
+        <p:nvSpPr>
+          <p:cNvPr id="12" name="Text 10"/>
+          <p:cNvSpPr txBox="1"/>
+          <p:nvPr/>
+        </p:nvSpPr>
+        <p:spPr>
+          <a:xfrm>
+            <a:off x="960120" y="4224528"/>
+            <a:ext cx="4800600" cy="365760"/>
+          </a:xfrm>
+          <a:prstGeom prst="rect">
+            <a:avLst/>
+          </a:prstGeom>
+          <a:noFill/>
+          <a:ln/>
+        </p:spPr>
+        <p:txBody>
+          <a:bodyPr wrap="square" lIns="0" tIns="0" rIns="0" bIns="0" rtlCol="0" anchor="ctr"/>
+          <a:lstStyle/>
+          <a:p>
+            <a:pPr indent="0" marL="0">
+              <a:buNone/>
+            </a:pPr>
+            <a:r>
+              <a:rPr lang="en-US" sz="1300" dirty="0">
                 <a:solidFill>
                   <a:srgbClr val="C9BEAC"/>
                 </a:solidFill>
@@ -2072,144 +2120,97 @@
                 <a:ea typeface="Calibri" pitchFamily="34" charset="-122"/>
                 <a:cs typeface="Calibri" pitchFamily="34" charset="-120"/>
               </a:rPr>
-              <a:t>Caixa rígida revestida com papel texturizado “soft touch”, com sensação aveludada e sofisticada ao toque.</a:t>
-            </a:r>
-            <a:endParaRPr lang="en-US" sz="1200" dirty="0"/>
-          </a:p>
-        </p:txBody>
-      </p:sp>
-      <p:sp>
-        <p:nvSpPr>
-          <p:cNvPr id="9" name="Shape 7"/>
+              <a:t>Hot stamping dourado + minimalismo</a:t>
+            </a:r>
+            <a:endParaRPr lang="en-US" sz="1300" dirty="0"/>
+          </a:p>
+        </p:txBody>
+      </p:sp>
+      <p:sp>
+        <p:nvSpPr>
+          <p:cNvPr id="13" name="Shape 11"/>
           <p:cNvSpPr/>
           <p:nvPr/>
         </p:nvSpPr>
         <p:spPr>
           <a:xfrm>
-            <a:off x="640080" y="3364992"/>
-            <a:ext cx="566928" cy="566928"/>
-          </a:xfrm>
-          <a:prstGeom prst="ellipse">
+            <a:off x="640080" y="4983480"/>
+            <a:ext cx="118872" cy="118872"/>
+          </a:xfrm>
+          <a:prstGeom prst="rect">
             <a:avLst/>
           </a:prstGeom>
           <a:solidFill>
-            <a:srgbClr val="3C2A1C"/>
+            <a:srgbClr val="C6A15B"/>
           </a:solidFill>
-          <a:ln w="12700">
-            <a:solidFill>
-              <a:srgbClr val="9C7C3F"/>
-            </a:solidFill>
-            <a:prstDash val="solid"/>
-          </a:ln>
-        </p:spPr>
-      </p:sp>
-      <p:sp>
-        <p:nvSpPr>
-          <p:cNvPr id="10" name="Text 8"/>
-          <p:cNvSpPr txBox="1"/>
-          <p:nvPr/>
-        </p:nvSpPr>
-        <p:spPr>
-          <a:xfrm>
-            <a:off x="640080" y="3364992"/>
-            <a:ext cx="566928" cy="566928"/>
-          </a:xfrm>
-          <a:prstGeom prst="rect">
-            <a:avLst/>
-          </a:prstGeom>
-          <a:noFill/>
-          <a:ln/>
-        </p:spPr>
-        <p:txBody>
-          <a:bodyPr wrap="square" lIns="0" tIns="0" rIns="0" bIns="0" rtlCol="0" anchor="ctr"/>
-          <a:lstStyle/>
-          <a:p>
-            <a:pPr algn="ctr" indent="0" marL="0">
-              <a:buNone/>
-            </a:pPr>
-            <a:r>
-              <a:rPr lang="en-US" sz="1600" b="1" dirty="0">
-                <a:solidFill>
-                  <a:srgbClr val="C6A15B"/>
+          <a:ln/>
+        </p:spPr>
+      </p:sp>
+      <p:sp>
+        <p:nvSpPr>
+          <p:cNvPr id="14" name="Text 12"/>
+          <p:cNvSpPr txBox="1"/>
+          <p:nvPr/>
+        </p:nvSpPr>
+        <p:spPr>
+          <a:xfrm>
+            <a:off x="960120" y="4818888"/>
+            <a:ext cx="4800600" cy="365760"/>
+          </a:xfrm>
+          <a:prstGeom prst="rect">
+            <a:avLst/>
+          </a:prstGeom>
+          <a:noFill/>
+          <a:ln/>
+        </p:spPr>
+        <p:txBody>
+          <a:bodyPr wrap="square" lIns="0" tIns="0" rIns="0" bIns="0" rtlCol="0" anchor="ctr"/>
+          <a:lstStyle/>
+          <a:p>
+            <a:pPr indent="0" marL="0">
+              <a:buNone/>
+            </a:pPr>
+            <a:r>
+              <a:rPr lang="en-US" sz="1800" b="1" dirty="0">
+                <a:solidFill>
+                  <a:srgbClr val="EFE6D8"/>
                 </a:solidFill>
                 <a:latin typeface="Cambria" pitchFamily="34" charset="0"/>
                 <a:ea typeface="Cambria" pitchFamily="34" charset="-122"/>
                 <a:cs typeface="Cambria" pitchFamily="34" charset="-120"/>
               </a:rPr>
-              <a:t>02</a:t>
-            </a:r>
-            <a:endParaRPr lang="en-US" sz="1600" dirty="0"/>
-          </a:p>
-        </p:txBody>
-      </p:sp>
-      <p:sp>
-        <p:nvSpPr>
-          <p:cNvPr id="11" name="Text 9"/>
-          <p:cNvSpPr txBox="1"/>
-          <p:nvPr/>
-        </p:nvSpPr>
-        <p:spPr>
-          <a:xfrm>
-            <a:off x="1417320" y="3300984"/>
-            <a:ext cx="6995160" cy="320040"/>
-          </a:xfrm>
-          <a:prstGeom prst="rect">
-            <a:avLst/>
-          </a:prstGeom>
-          <a:noFill/>
-          <a:ln/>
-        </p:spPr>
-        <p:txBody>
-          <a:bodyPr wrap="square" lIns="0" tIns="0" rIns="0" bIns="0" rtlCol="0" anchor="ctr"/>
-          <a:lstStyle/>
-          <a:p>
-            <a:pPr indent="0" marL="0">
-              <a:buNone/>
-            </a:pPr>
-            <a:r>
-              <a:rPr lang="en-US" sz="1600" b="1" dirty="0">
-                <a:solidFill>
-                  <a:srgbClr val="EFE6D8"/>
-                </a:solidFill>
-                <a:latin typeface="Cambria" pitchFamily="34" charset="0"/>
-                <a:ea typeface="Cambria" pitchFamily="34" charset="-122"/>
-                <a:cs typeface="Cambria" pitchFamily="34" charset="-120"/>
-              </a:rPr>
-              <a:t>Formato</a:t>
-            </a:r>
-            <a:endParaRPr lang="en-US" sz="1600" dirty="0"/>
-          </a:p>
-        </p:txBody>
-      </p:sp>
-      <p:sp>
-        <p:nvSpPr>
-          <p:cNvPr id="12" name="Text 10"/>
-          <p:cNvSpPr txBox="1"/>
-          <p:nvPr/>
-        </p:nvSpPr>
-        <p:spPr>
-          <a:xfrm>
-            <a:off x="1417320" y="3611880"/>
-            <a:ext cx="6995160" cy="548640"/>
-          </a:xfrm>
-          <a:prstGeom prst="rect">
-            <a:avLst/>
-          </a:prstGeom>
-          <a:noFill/>
-          <a:ln/>
-        </p:spPr>
-        <p:txBody>
-          <a:bodyPr wrap="square" lIns="0" tIns="0" rIns="0" bIns="0" rtlCol="0" anchor="ctr"/>
-          <a:lstStyle/>
-          <a:p>
-            <a:pPr indent="0" marL="0">
-              <a:lnSpc>
-                <a:spcPct val="115000"/>
-              </a:lnSpc>
-              <a:buNone/>
-            </a:pPr>
-            <a:r>
-              <a:rPr lang="en-US" sz="1200" dirty="0">
+              <a:t>Tipografia</a:t>
+            </a:r>
+            <a:endParaRPr lang="en-US" sz="1800" dirty="0"/>
+          </a:p>
+        </p:txBody>
+      </p:sp>
+      <p:sp>
+        <p:nvSpPr>
+          <p:cNvPr id="15" name="Text 13"/>
+          <p:cNvSpPr txBox="1"/>
+          <p:nvPr/>
+        </p:nvSpPr>
+        <p:spPr>
+          <a:xfrm>
+            <a:off x="960120" y="5184648"/>
+            <a:ext cx="4800600" cy="365760"/>
+          </a:xfrm>
+          <a:prstGeom prst="rect">
+            <a:avLst/>
+          </a:prstGeom>
+          <a:noFill/>
+          <a:ln/>
+        </p:spPr>
+        <p:txBody>
+          <a:bodyPr wrap="square" lIns="0" tIns="0" rIns="0" bIns="0" rtlCol="0" anchor="ctr"/>
+          <a:lstStyle/>
+          <a:p>
+            <a:pPr indent="0" marL="0">
+              <a:buNone/>
+            </a:pPr>
+            <a:r>
+              <a:rPr lang="en-US" sz="1300" dirty="0">
                 <a:solidFill>
                   <a:srgbClr val="C9BEAC"/>
                 </a:solidFill>
@@ -2217,305 +2218,15 @@
                 <a:ea typeface="Calibri" pitchFamily="34" charset="-122"/>
                 <a:cs typeface="Calibri" pitchFamily="34" charset="-120"/>
               </a:rPr>
-              <a:t>Caixa retangular alta, inspirada em um livro, que abre como um estojo; chocolates sobre bandeja interna de papel kraft.</a:t>
-            </a:r>
-            <a:endParaRPr lang="en-US" sz="1200" dirty="0"/>
-          </a:p>
-        </p:txBody>
-      </p:sp>
-      <p:sp>
-        <p:nvSpPr>
-          <p:cNvPr id="13" name="Shape 11"/>
-          <p:cNvSpPr/>
-          <p:nvPr/>
-        </p:nvSpPr>
-        <p:spPr>
-          <a:xfrm>
-            <a:off x="640080" y="4352544"/>
-            <a:ext cx="566928" cy="566928"/>
-          </a:xfrm>
-          <a:prstGeom prst="ellipse">
-            <a:avLst/>
-          </a:prstGeom>
-          <a:solidFill>
-            <a:srgbClr val="3C2A1C"/>
-          </a:solidFill>
-          <a:ln w="12700">
-            <a:solidFill>
-              <a:srgbClr val="9C7C3F"/>
-            </a:solidFill>
-            <a:prstDash val="solid"/>
-          </a:ln>
-        </p:spPr>
-      </p:sp>
-      <p:sp>
-        <p:nvSpPr>
-          <p:cNvPr id="14" name="Text 12"/>
-          <p:cNvSpPr txBox="1"/>
-          <p:nvPr/>
-        </p:nvSpPr>
-        <p:spPr>
-          <a:xfrm>
-            <a:off x="640080" y="4352544"/>
-            <a:ext cx="566928" cy="566928"/>
-          </a:xfrm>
-          <a:prstGeom prst="rect">
-            <a:avLst/>
-          </a:prstGeom>
-          <a:noFill/>
-          <a:ln/>
-        </p:spPr>
-        <p:txBody>
-          <a:bodyPr wrap="square" lIns="0" tIns="0" rIns="0" bIns="0" rtlCol="0" anchor="ctr"/>
-          <a:lstStyle/>
-          <a:p>
-            <a:pPr algn="ctr" indent="0" marL="0">
-              <a:buNone/>
-            </a:pPr>
-            <a:r>
-              <a:rPr lang="en-US" sz="1600" b="1" dirty="0">
-                <a:solidFill>
-                  <a:srgbClr val="C6A15B"/>
-                </a:solidFill>
-                <a:latin typeface="Cambria" pitchFamily="34" charset="0"/>
-                <a:ea typeface="Cambria" pitchFamily="34" charset="-122"/>
-                <a:cs typeface="Cambria" pitchFamily="34" charset="-120"/>
-              </a:rPr>
-              <a:t>03</a:t>
-            </a:r>
-            <a:endParaRPr lang="en-US" sz="1600" dirty="0"/>
-          </a:p>
-        </p:txBody>
-      </p:sp>
-      <p:sp>
-        <p:nvSpPr>
-          <p:cNvPr id="15" name="Text 13"/>
-          <p:cNvSpPr txBox="1"/>
-          <p:nvPr/>
-        </p:nvSpPr>
-        <p:spPr>
-          <a:xfrm>
-            <a:off x="1417320" y="4288536"/>
-            <a:ext cx="6995160" cy="320040"/>
-          </a:xfrm>
-          <a:prstGeom prst="rect">
-            <a:avLst/>
-          </a:prstGeom>
-          <a:noFill/>
-          <a:ln/>
-        </p:spPr>
-        <p:txBody>
-          <a:bodyPr wrap="square" lIns="0" tIns="0" rIns="0" bIns="0" rtlCol="0" anchor="ctr"/>
-          <a:lstStyle/>
-          <a:p>
-            <a:pPr indent="0" marL="0">
-              <a:buNone/>
-            </a:pPr>
-            <a:r>
-              <a:rPr lang="en-US" sz="1600" b="1" dirty="0">
-                <a:solidFill>
-                  <a:srgbClr val="EFE6D8"/>
-                </a:solidFill>
-                <a:latin typeface="Cambria" pitchFamily="34" charset="0"/>
-                <a:ea typeface="Cambria" pitchFamily="34" charset="-122"/>
-                <a:cs typeface="Cambria" pitchFamily="34" charset="-120"/>
-              </a:rPr>
-              <a:t>Acabamento</a:t>
-            </a:r>
-            <a:endParaRPr lang="en-US" sz="1600" dirty="0"/>
-          </a:p>
-        </p:txBody>
-      </p:sp>
-      <p:sp>
-        <p:nvSpPr>
-          <p:cNvPr id="16" name="Text 14"/>
-          <p:cNvSpPr txBox="1"/>
-          <p:nvPr/>
-        </p:nvSpPr>
-        <p:spPr>
-          <a:xfrm>
-            <a:off x="1417320" y="4599432"/>
-            <a:ext cx="6995160" cy="548640"/>
-          </a:xfrm>
-          <a:prstGeom prst="rect">
-            <a:avLst/>
-          </a:prstGeom>
-          <a:noFill/>
-          <a:ln/>
-        </p:spPr>
-        <p:txBody>
-          <a:bodyPr wrap="square" lIns="0" tIns="0" rIns="0" bIns="0" rtlCol="0" anchor="ctr"/>
-          <a:lstStyle/>
-          <a:p>
-            <a:pPr indent="0" marL="0">
-              <a:lnSpc>
-                <a:spcPct val="115000"/>
-              </a:lnSpc>
-              <a:buNone/>
-            </a:pPr>
-            <a:r>
-              <a:rPr lang="en-US" sz="1200" dirty="0">
-                <a:solidFill>
-                  <a:srgbClr val="C9BEAC"/>
-                </a:solidFill>
-                <a:latin typeface="Calibri" pitchFamily="34" charset="0"/>
-                <a:ea typeface="Calibri" pitchFamily="34" charset="-122"/>
-                <a:cs typeface="Calibri" pitchFamily="34" charset="-120"/>
-              </a:rPr>
-              <a:t>Hot stamping em dourado envelhecido na logo e no contorno minimalista de uma semente de cacau; frente com poucas informações.</a:t>
-            </a:r>
-            <a:endParaRPr lang="en-US" sz="1200" dirty="0"/>
-          </a:p>
-        </p:txBody>
-      </p:sp>
-      <p:sp>
-        <p:nvSpPr>
-          <p:cNvPr id="17" name="Shape 15"/>
-          <p:cNvSpPr/>
-          <p:nvPr/>
-        </p:nvSpPr>
-        <p:spPr>
-          <a:xfrm>
-            <a:off x="640080" y="5340096"/>
-            <a:ext cx="566928" cy="566928"/>
-          </a:xfrm>
-          <a:prstGeom prst="ellipse">
-            <a:avLst/>
-          </a:prstGeom>
-          <a:solidFill>
-            <a:srgbClr val="3C2A1C"/>
-          </a:solidFill>
-          <a:ln w="12700">
-            <a:solidFill>
-              <a:srgbClr val="9C7C3F"/>
-            </a:solidFill>
-            <a:prstDash val="solid"/>
-          </a:ln>
-        </p:spPr>
-      </p:sp>
-      <p:sp>
-        <p:nvSpPr>
-          <p:cNvPr id="18" name="Text 16"/>
-          <p:cNvSpPr txBox="1"/>
-          <p:nvPr/>
-        </p:nvSpPr>
-        <p:spPr>
-          <a:xfrm>
-            <a:off x="640080" y="5340096"/>
-            <a:ext cx="566928" cy="566928"/>
-          </a:xfrm>
-          <a:prstGeom prst="rect">
-            <a:avLst/>
-          </a:prstGeom>
-          <a:noFill/>
-          <a:ln/>
-        </p:spPr>
-        <p:txBody>
-          <a:bodyPr wrap="square" lIns="0" tIns="0" rIns="0" bIns="0" rtlCol="0" anchor="ctr"/>
-          <a:lstStyle/>
-          <a:p>
-            <a:pPr algn="ctr" indent="0" marL="0">
-              <a:buNone/>
-            </a:pPr>
-            <a:r>
-              <a:rPr lang="en-US" sz="1600" b="1" dirty="0">
-                <a:solidFill>
-                  <a:srgbClr val="C6A15B"/>
-                </a:solidFill>
-                <a:latin typeface="Cambria" pitchFamily="34" charset="0"/>
-                <a:ea typeface="Cambria" pitchFamily="34" charset="-122"/>
-                <a:cs typeface="Cambria" pitchFamily="34" charset="-120"/>
-              </a:rPr>
-              <a:t>04</a:t>
-            </a:r>
-            <a:endParaRPr lang="en-US" sz="1600" dirty="0"/>
-          </a:p>
-        </p:txBody>
-      </p:sp>
-      <p:sp>
-        <p:nvSpPr>
-          <p:cNvPr id="19" name="Text 17"/>
-          <p:cNvSpPr txBox="1"/>
-          <p:nvPr/>
-        </p:nvSpPr>
-        <p:spPr>
-          <a:xfrm>
-            <a:off x="1417320" y="5276088"/>
-            <a:ext cx="6995160" cy="320040"/>
-          </a:xfrm>
-          <a:prstGeom prst="rect">
-            <a:avLst/>
-          </a:prstGeom>
-          <a:noFill/>
-          <a:ln/>
-        </p:spPr>
-        <p:txBody>
-          <a:bodyPr wrap="square" lIns="0" tIns="0" rIns="0" bIns="0" rtlCol="0" anchor="ctr"/>
-          <a:lstStyle/>
-          <a:p>
-            <a:pPr indent="0" marL="0">
-              <a:buNone/>
-            </a:pPr>
-            <a:r>
-              <a:rPr lang="en-US" sz="1600" b="1" dirty="0">
-                <a:solidFill>
-                  <a:srgbClr val="EFE6D8"/>
-                </a:solidFill>
-                <a:latin typeface="Cambria" pitchFamily="34" charset="0"/>
-                <a:ea typeface="Cambria" pitchFamily="34" charset="-122"/>
-                <a:cs typeface="Cambria" pitchFamily="34" charset="-120"/>
-              </a:rPr>
-              <a:t>Tipografia</a:t>
-            </a:r>
-            <a:endParaRPr lang="en-US" sz="1600" dirty="0"/>
-          </a:p>
-        </p:txBody>
-      </p:sp>
-      <p:sp>
-        <p:nvSpPr>
-          <p:cNvPr id="20" name="Text 18"/>
-          <p:cNvSpPr txBox="1"/>
-          <p:nvPr/>
-        </p:nvSpPr>
-        <p:spPr>
-          <a:xfrm>
-            <a:off x="1417320" y="5586984"/>
-            <a:ext cx="6995160" cy="548640"/>
-          </a:xfrm>
-          <a:prstGeom prst="rect">
-            <a:avLst/>
-          </a:prstGeom>
-          <a:noFill/>
-          <a:ln/>
-        </p:spPr>
-        <p:txBody>
-          <a:bodyPr wrap="square" lIns="0" tIns="0" rIns="0" bIns="0" rtlCol="0" anchor="ctr"/>
-          <a:lstStyle/>
-          <a:p>
-            <a:pPr indent="0" marL="0">
-              <a:lnSpc>
-                <a:spcPct val="115000"/>
-              </a:lnSpc>
-              <a:buNone/>
-            </a:pPr>
-            <a:r>
-              <a:rPr lang="en-US" sz="1200" dirty="0">
-                <a:solidFill>
-                  <a:srgbClr val="C9BEAC"/>
-                </a:solidFill>
-                <a:latin typeface="Calibri" pitchFamily="34" charset="0"/>
-                <a:ea typeface="Calibri" pitchFamily="34" charset="-122"/>
-                <a:cs typeface="Calibri" pitchFamily="34" charset="-120"/>
-              </a:rPr>
-              <a:t>Fonte serifada, fina e espaçada, inspirada em identidades de marcas premium de vinhos e destilados.</a:t>
-            </a:r>
-            <a:endParaRPr lang="en-US" sz="1200" dirty="0"/>
+              <a:t>Serifada fina, inspirada em vinhos</a:t>
+            </a:r>
+            <a:endParaRPr lang="en-US" sz="1300" dirty="0"/>
           </a:p>
         </p:txBody>
       </p:sp>
       <p:pic>
         <p:nvPicPr>
-          <p:cNvPr id="21" name="Image 0" descr="/root/.claude/uploads/de37aeae-c07f-5401-92c3-714ed4fdd346/79f8e012-image.jpg">    </p:cNvPr>
+          <p:cNvPr id="16" name="Image 0" descr="/root/.claude/uploads/de37aeae-c07f-5401-92c3-714ed4fdd346/79f8e012-image.jpg">    </p:cNvPr>
           <p:cNvPicPr>
             <a:picLocks noChangeAspect="1"/>
           </p:cNvPicPr>
@@ -2528,8 +2239,8 @@
         </p:blipFill>
         <p:spPr>
           <a:xfrm>
-            <a:off x="8732520" y="1600200"/>
-            <a:ext cx="2880360" cy="4434840"/>
+            <a:off x="6172200" y="1463040"/>
+            <a:ext cx="5394960" cy="4892040"/>
           </a:xfrm>
           <a:prstGeom prst="rect">
             <a:avLst/>
@@ -2538,30 +2249,30 @@
       </p:pic>
       <p:sp>
         <p:nvSpPr>
-          <p:cNvPr id="22" name="Text 19"/>
-          <p:cNvSpPr txBox="1"/>
-          <p:nvPr/>
-        </p:nvSpPr>
-        <p:spPr>
-          <a:xfrm>
-            <a:off x="8732520" y="6108192"/>
-            <a:ext cx="2880360" cy="274320"/>
-          </a:xfrm>
-          <a:prstGeom prst="rect">
-            <a:avLst/>
-          </a:prstGeom>
-          <a:noFill/>
-          <a:ln/>
-        </p:spPr>
-        <p:txBody>
-          <a:bodyPr wrap="square" lIns="0" tIns="0" rIns="0" bIns="0" rtlCol="0" anchor="ctr"/>
-          <a:lstStyle/>
-          <a:p>
-            <a:pPr algn="ctr" indent="0" marL="0">
-              <a:buNone/>
-            </a:pPr>
-            <a:r>
-              <a:rPr lang="en-US" sz="950" i="1" dirty="0">
+          <p:cNvPr id="17" name="Text 14"/>
+          <p:cNvSpPr txBox="1"/>
+          <p:nvPr/>
+        </p:nvSpPr>
+        <p:spPr>
+          <a:xfrm>
+            <a:off x="11274552" y="6400800"/>
+            <a:ext cx="548640" cy="274320"/>
+          </a:xfrm>
+          <a:prstGeom prst="rect">
+            <a:avLst/>
+          </a:prstGeom>
+          <a:noFill/>
+          <a:ln/>
+        </p:spPr>
+        <p:txBody>
+          <a:bodyPr wrap="square" lIns="0" tIns="0" rIns="0" bIns="0" rtlCol="0" anchor="ctr"/>
+          <a:lstStyle/>
+          <a:p>
+            <a:pPr algn="r" indent="0" marL="0">
+              <a:buNone/>
+            </a:pPr>
+            <a:r>
+              <a:rPr lang="en-US" sz="1000" dirty="0">
                 <a:solidFill>
                   <a:srgbClr val="9C7C3F"/>
                 </a:solidFill>
@@ -2569,45 +2280,6 @@
                 <a:ea typeface="Calibri" pitchFamily="34" charset="-122"/>
                 <a:cs typeface="Calibri" pitchFamily="34" charset="-120"/>
               </a:rPr>
-              <a:t>Caixa-livro — Coleção Origem</a:t>
-            </a:r>
-            <a:endParaRPr lang="en-US" sz="950" dirty="0"/>
-          </a:p>
-        </p:txBody>
-      </p:sp>
-      <p:sp>
-        <p:nvSpPr>
-          <p:cNvPr id="23" name="Text 20"/>
-          <p:cNvSpPr txBox="1"/>
-          <p:nvPr/>
-        </p:nvSpPr>
-        <p:spPr>
-          <a:xfrm>
-            <a:off x="11274552" y="6355080"/>
-            <a:ext cx="548640" cy="320040"/>
-          </a:xfrm>
-          <a:prstGeom prst="rect">
-            <a:avLst/>
-          </a:prstGeom>
-          <a:noFill/>
-          <a:ln/>
-        </p:spPr>
-        <p:txBody>
-          <a:bodyPr wrap="square" lIns="0" tIns="0" rIns="0" bIns="0" rtlCol="0" anchor="ctr"/>
-          <a:lstStyle/>
-          <a:p>
-            <a:pPr algn="r" indent="0" marL="0">
-              <a:buNone/>
-            </a:pPr>
-            <a:r>
-              <a:rPr lang="en-US" sz="1000" dirty="0">
-                <a:solidFill>
-                  <a:srgbClr val="9C7C3F"/>
-                </a:solidFill>
-                <a:latin typeface="Calibri" pitchFamily="34" charset="0"/>
-                <a:ea typeface="Calibri" pitchFamily="34" charset="-122"/>
-                <a:cs typeface="Calibri" pitchFamily="34" charset="-120"/>
-              </a:rPr>
               <a:t>02</a:t>
             </a:r>
             <a:endParaRPr lang="en-US" sz="1000" dirty="0"/>
@@ -2616,14 +2288,14 @@
       </p:sp>
       <p:sp>
         <p:nvSpPr>
-          <p:cNvPr id="24" name="Text 21"/>
-          <p:cNvSpPr txBox="1"/>
-          <p:nvPr/>
-        </p:nvSpPr>
-        <p:spPr>
-          <a:xfrm>
-            <a:off x="640080" y="6355080"/>
-            <a:ext cx="2743200" cy="320040"/>
+          <p:cNvPr id="18" name="Text 15"/>
+          <p:cNvSpPr txBox="1"/>
+          <p:nvPr/>
+        </p:nvSpPr>
+        <p:spPr>
+          <a:xfrm>
+            <a:off x="640080" y="6400800"/>
+            <a:ext cx="2743200" cy="274320"/>
           </a:xfrm>
           <a:prstGeom prst="rect">
             <a:avLst/>
@@ -2757,7 +2429,7 @@
                 <a:ea typeface="Cambria" pitchFamily="34" charset="-122"/>
                 <a:cs typeface="Cambria" pitchFamily="34" charset="-120"/>
               </a:rPr>
-              <a:t>Paleta de cores e significado</a:t>
+              <a:t>Paleta de cores</a:t>
             </a:r>
             <a:endParaRPr lang="en-US" sz="3400" dirty="0"/>
           </a:p>
@@ -2765,30 +2437,109 @@
       </p:sp>
       <p:sp>
         <p:nvSpPr>
-          <p:cNvPr id="4" name="Text 2"/>
-          <p:cNvSpPr txBox="1"/>
-          <p:nvPr/>
-        </p:nvSpPr>
-        <p:spPr>
-          <a:xfrm>
-            <a:off x="640080" y="1508760"/>
-            <a:ext cx="8686800" cy="457200"/>
-          </a:xfrm>
-          <a:prstGeom prst="rect">
-            <a:avLst/>
-          </a:prstGeom>
-          <a:noFill/>
-          <a:ln/>
-        </p:spPr>
-        <p:txBody>
-          <a:bodyPr wrap="square" lIns="0" tIns="0" rIns="0" bIns="0" rtlCol="0" anchor="ctr"/>
-          <a:lstStyle/>
-          <a:p>
-            <a:pPr indent="0" marL="0">
-              <a:buNone/>
-            </a:pPr>
-            <a:r>
-              <a:rPr lang="en-US" sz="1350" i="1" dirty="0">
+          <p:cNvPr id="4" name="Shape 2"/>
+          <p:cNvSpPr/>
+          <p:nvPr/>
+        </p:nvSpPr>
+        <p:spPr>
+          <a:xfrm>
+            <a:off x="640080" y="1920240"/>
+            <a:ext cx="2606040" cy="4023360"/>
+          </a:xfrm>
+          <a:prstGeom prst="rect">
+            <a:avLst/>
+          </a:prstGeom>
+          <a:solidFill>
+            <a:srgbClr val="2B1D14"/>
+          </a:solidFill>
+          <a:ln/>
+        </p:spPr>
+      </p:sp>
+      <p:sp>
+        <p:nvSpPr>
+          <p:cNvPr id="5" name="Shape 3"/>
+          <p:cNvSpPr/>
+          <p:nvPr/>
+        </p:nvSpPr>
+        <p:spPr>
+          <a:xfrm>
+            <a:off x="640080" y="1920240"/>
+            <a:ext cx="2606040" cy="2377440"/>
+          </a:xfrm>
+          <a:prstGeom prst="rect">
+            <a:avLst/>
+          </a:prstGeom>
+          <a:solidFill>
+            <a:srgbClr val="3C2A1C"/>
+          </a:solidFill>
+          <a:ln/>
+        </p:spPr>
+      </p:sp>
+      <p:sp>
+        <p:nvSpPr>
+          <p:cNvPr id="6" name="Text 4"/>
+          <p:cNvSpPr txBox="1"/>
+          <p:nvPr/>
+        </p:nvSpPr>
+        <p:spPr>
+          <a:xfrm>
+            <a:off x="841248" y="4480560"/>
+            <a:ext cx="2203704" cy="548640"/>
+          </a:xfrm>
+          <a:prstGeom prst="rect">
+            <a:avLst/>
+          </a:prstGeom>
+          <a:noFill/>
+          <a:ln/>
+        </p:spPr>
+        <p:txBody>
+          <a:bodyPr wrap="square" lIns="0" tIns="0" rIns="0" bIns="0" rtlCol="0" anchor="ctr"/>
+          <a:lstStyle/>
+          <a:p>
+            <a:pPr indent="0" marL="0">
+              <a:buNone/>
+            </a:pPr>
+            <a:r>
+              <a:rPr lang="en-US" sz="1500" b="1" dirty="0">
+                <a:solidFill>
+                  <a:srgbClr val="EFE6D8"/>
+                </a:solidFill>
+                <a:latin typeface="Cambria" pitchFamily="34" charset="0"/>
+                <a:ea typeface="Cambria" pitchFamily="34" charset="-122"/>
+                <a:cs typeface="Cambria" pitchFamily="34" charset="-120"/>
+              </a:rPr>
+              <a:t>Marrom-café</a:t>
+            </a:r>
+            <a:endParaRPr lang="en-US" sz="1500" dirty="0"/>
+          </a:p>
+        </p:txBody>
+      </p:sp>
+      <p:sp>
+        <p:nvSpPr>
+          <p:cNvPr id="7" name="Text 5"/>
+          <p:cNvSpPr txBox="1"/>
+          <p:nvPr/>
+        </p:nvSpPr>
+        <p:spPr>
+          <a:xfrm>
+            <a:off x="841248" y="5074920"/>
+            <a:ext cx="2203704" cy="548640"/>
+          </a:xfrm>
+          <a:prstGeom prst="rect">
+            <a:avLst/>
+          </a:prstGeom>
+          <a:noFill/>
+          <a:ln/>
+        </p:spPr>
+        <p:txBody>
+          <a:bodyPr wrap="square" lIns="0" tIns="0" rIns="0" bIns="0" rtlCol="0" anchor="ctr"/>
+          <a:lstStyle/>
+          <a:p>
+            <a:pPr indent="0" marL="0">
+              <a:buNone/>
+            </a:pPr>
+            <a:r>
+              <a:rPr lang="en-US" sz="1200" dirty="0">
                 <a:solidFill>
                   <a:srgbClr val="C9BEAC"/>
                 </a:solidFill>
@@ -2796,22 +2547,22 @@
                 <a:ea typeface="Calibri" pitchFamily="34" charset="-122"/>
                 <a:cs typeface="Calibri" pitchFamily="34" charset="-120"/>
               </a:rPr>
-              <a:t>Cada cor foi escolhida por uma associação psicológica específica, já consolidada em marcas de alto padrão.</a:t>
-            </a:r>
-            <a:endParaRPr lang="en-US" sz="1350" dirty="0"/>
-          </a:p>
-        </p:txBody>
-      </p:sp>
-      <p:sp>
-        <p:nvSpPr>
-          <p:cNvPr id="5" name="Shape 3"/>
+              <a:t>Tradição e autenticidade</a:t>
+            </a:r>
+            <a:endParaRPr lang="en-US" sz="1200" dirty="0"/>
+          </a:p>
+        </p:txBody>
+      </p:sp>
+      <p:sp>
+        <p:nvSpPr>
+          <p:cNvPr id="8" name="Shape 6"/>
           <p:cNvSpPr/>
           <p:nvPr/>
         </p:nvSpPr>
         <p:spPr>
           <a:xfrm>
-            <a:off x="640080" y="2286000"/>
-            <a:ext cx="2606040" cy="3383280"/>
+            <a:off x="3502152" y="1920240"/>
+            <a:ext cx="2606040" cy="4023360"/>
           </a:xfrm>
           <a:prstGeom prst="rect">
             <a:avLst/>
@@ -2819,189 +2570,19 @@
           <a:solidFill>
             <a:srgbClr val="2B1D14"/>
           </a:solidFill>
-          <a:ln w="12700">
-            <a:solidFill>
-              <a:srgbClr val="000000"/>
-            </a:solidFill>
-            <a:prstDash val="solid"/>
-          </a:ln>
-        </p:spPr>
-      </p:sp>
-      <p:sp>
-        <p:nvSpPr>
-          <p:cNvPr id="6" name="Shape 4"/>
+          <a:ln/>
+        </p:spPr>
+      </p:sp>
+      <p:sp>
+        <p:nvSpPr>
+          <p:cNvPr id="9" name="Shape 7"/>
           <p:cNvSpPr/>
           <p:nvPr/>
         </p:nvSpPr>
         <p:spPr>
           <a:xfrm>
-            <a:off x="640080" y="2286000"/>
-            <a:ext cx="2606040" cy="1737360"/>
-          </a:xfrm>
-          <a:prstGeom prst="rect">
-            <a:avLst/>
-          </a:prstGeom>
-          <a:solidFill>
-            <a:srgbClr val="3C2A1C"/>
-          </a:solidFill>
-          <a:ln/>
-        </p:spPr>
-      </p:sp>
-      <p:sp>
-        <p:nvSpPr>
-          <p:cNvPr id="7" name="Text 5"/>
-          <p:cNvSpPr txBox="1"/>
-          <p:nvPr/>
-        </p:nvSpPr>
-        <p:spPr>
-          <a:xfrm>
-            <a:off x="841248" y="4160520"/>
-            <a:ext cx="2203704" cy="502920"/>
-          </a:xfrm>
-          <a:prstGeom prst="rect">
-            <a:avLst/>
-          </a:prstGeom>
-          <a:noFill/>
-          <a:ln/>
-        </p:spPr>
-        <p:txBody>
-          <a:bodyPr wrap="square" lIns="0" tIns="0" rIns="0" bIns="0" rtlCol="0" anchor="ctr"/>
-          <a:lstStyle/>
-          <a:p>
-            <a:pPr indent="0" marL="0">
-              <a:buNone/>
-            </a:pPr>
-            <a:r>
-              <a:rPr lang="en-US" sz="1500" b="1" dirty="0">
-                <a:solidFill>
-                  <a:srgbClr val="EFE6D8"/>
-                </a:solidFill>
-                <a:latin typeface="Cambria" pitchFamily="34" charset="0"/>
-                <a:ea typeface="Cambria" pitchFamily="34" charset="-122"/>
-                <a:cs typeface="Cambria" pitchFamily="34" charset="-120"/>
-              </a:rPr>
-              <a:t>Marrom-café</a:t>
-            </a:r>
-            <a:endParaRPr lang="en-US" sz="1500" dirty="0"/>
-          </a:p>
-        </p:txBody>
-      </p:sp>
-      <p:sp>
-        <p:nvSpPr>
-          <p:cNvPr id="8" name="Text 6"/>
-          <p:cNvSpPr txBox="1"/>
-          <p:nvPr/>
-        </p:nvSpPr>
-        <p:spPr>
-          <a:xfrm>
-            <a:off x="841248" y="4617720"/>
-            <a:ext cx="2203704" cy="960120"/>
-          </a:xfrm>
-          <a:prstGeom prst="rect">
-            <a:avLst/>
-          </a:prstGeom>
-          <a:noFill/>
-          <a:ln/>
-        </p:spPr>
-        <p:txBody>
-          <a:bodyPr wrap="square" lIns="0" tIns="0" rIns="0" bIns="0" rtlCol="0" anchor="ctr"/>
-          <a:lstStyle/>
-          <a:p>
-            <a:pPr indent="0" marL="0">
-              <a:lnSpc>
-                <a:spcPct val="120000"/>
-              </a:lnSpc>
-              <a:buNone/>
-            </a:pPr>
-            <a:r>
-              <a:rPr lang="en-US" sz="1150" dirty="0">
-                <a:solidFill>
-                  <a:srgbClr val="C9BEAC"/>
-                </a:solidFill>
-                <a:latin typeface="Calibri" pitchFamily="34" charset="0"/>
-                <a:ea typeface="Calibri" pitchFamily="34" charset="-122"/>
-                <a:cs typeface="Calibri" pitchFamily="34" charset="-120"/>
-              </a:rPr>
-              <a:t>Tradição, autenticidade e chocolate de qualidade.</a:t>
-            </a:r>
-            <a:endParaRPr lang="en-US" sz="1150" dirty="0"/>
-          </a:p>
-        </p:txBody>
-      </p:sp>
-      <p:sp>
-        <p:nvSpPr>
-          <p:cNvPr id="9" name="Text 7"/>
-          <p:cNvSpPr txBox="1"/>
-          <p:nvPr/>
-        </p:nvSpPr>
-        <p:spPr>
-          <a:xfrm>
-            <a:off x="841248" y="2377440"/>
-            <a:ext cx="2203704" cy="274320"/>
-          </a:xfrm>
-          <a:prstGeom prst="rect">
-            <a:avLst/>
-          </a:prstGeom>
-          <a:noFill/>
-          <a:ln/>
-        </p:spPr>
-        <p:txBody>
-          <a:bodyPr wrap="square" lIns="0" tIns="0" rIns="0" bIns="0" rtlCol="0" anchor="ctr"/>
-          <a:lstStyle/>
-          <a:p>
-            <a:pPr indent="0" marL="0">
-              <a:buNone/>
-            </a:pPr>
-            <a:r>
-              <a:rPr lang="en-US" sz="1000" b="1" spc="100" kern="0" dirty="0">
-                <a:solidFill>
-                  <a:srgbClr val="C9BEAC"/>
-                </a:solidFill>
-                <a:latin typeface="Calibri" pitchFamily="34" charset="0"/>
-                <a:ea typeface="Calibri" pitchFamily="34" charset="-122"/>
-                <a:cs typeface="Calibri" pitchFamily="34" charset="-120"/>
-              </a:rPr>
-              <a:t>#3C2A1C</a:t>
-            </a:r>
-            <a:endParaRPr lang="en-US" sz="1000" dirty="0"/>
-          </a:p>
-        </p:txBody>
-      </p:sp>
-      <p:sp>
-        <p:nvSpPr>
-          <p:cNvPr id="10" name="Shape 8"/>
-          <p:cNvSpPr/>
-          <p:nvPr/>
-        </p:nvSpPr>
-        <p:spPr>
-          <a:xfrm>
-            <a:off x="3502152" y="2286000"/>
-            <a:ext cx="2606040" cy="3383280"/>
-          </a:xfrm>
-          <a:prstGeom prst="rect">
-            <a:avLst/>
-          </a:prstGeom>
-          <a:solidFill>
-            <a:srgbClr val="2B1D14"/>
-          </a:solidFill>
-          <a:ln w="12700">
-            <a:solidFill>
-              <a:srgbClr val="000000"/>
-            </a:solidFill>
-            <a:prstDash val="solid"/>
-          </a:ln>
-        </p:spPr>
-      </p:sp>
-      <p:sp>
-        <p:nvSpPr>
-          <p:cNvPr id="11" name="Shape 9"/>
-          <p:cNvSpPr/>
-          <p:nvPr/>
-        </p:nvSpPr>
-        <p:spPr>
-          <a:xfrm>
-            <a:off x="3502152" y="2286000"/>
-            <a:ext cx="2606040" cy="1737360"/>
+            <a:off x="3502152" y="1920240"/>
+            <a:ext cx="2606040" cy="2377440"/>
           </a:xfrm>
           <a:prstGeom prst="rect">
             <a:avLst/>
@@ -3019,14 +2600,14 @@
       </p:sp>
       <p:sp>
         <p:nvSpPr>
-          <p:cNvPr id="12" name="Text 10"/>
-          <p:cNvSpPr txBox="1"/>
-          <p:nvPr/>
-        </p:nvSpPr>
-        <p:spPr>
-          <a:xfrm>
-            <a:off x="3703320" y="4160520"/>
-            <a:ext cx="2203704" cy="502920"/>
+          <p:cNvPr id="10" name="Text 8"/>
+          <p:cNvSpPr txBox="1"/>
+          <p:nvPr/>
+        </p:nvSpPr>
+        <p:spPr>
+          <a:xfrm>
+            <a:off x="3703320" y="4480560"/>
+            <a:ext cx="2203704" cy="548640"/>
           </a:xfrm>
           <a:prstGeom prst="rect">
             <a:avLst/>
@@ -3058,33 +2639,30 @@
       </p:sp>
       <p:sp>
         <p:nvSpPr>
-          <p:cNvPr id="13" name="Text 11"/>
-          <p:cNvSpPr txBox="1"/>
-          <p:nvPr/>
-        </p:nvSpPr>
-        <p:spPr>
-          <a:xfrm>
-            <a:off x="3703320" y="4617720"/>
-            <a:ext cx="2203704" cy="960120"/>
-          </a:xfrm>
-          <a:prstGeom prst="rect">
-            <a:avLst/>
-          </a:prstGeom>
-          <a:noFill/>
-          <a:ln/>
-        </p:spPr>
-        <p:txBody>
-          <a:bodyPr wrap="square" lIns="0" tIns="0" rIns="0" bIns="0" rtlCol="0" anchor="ctr"/>
-          <a:lstStyle/>
-          <a:p>
-            <a:pPr indent="0" marL="0">
-              <a:lnSpc>
-                <a:spcPct val="120000"/>
-              </a:lnSpc>
-              <a:buNone/>
-            </a:pPr>
-            <a:r>
-              <a:rPr lang="en-US" sz="1150" dirty="0">
+          <p:cNvPr id="11" name="Text 9"/>
+          <p:cNvSpPr txBox="1"/>
+          <p:nvPr/>
+        </p:nvSpPr>
+        <p:spPr>
+          <a:xfrm>
+            <a:off x="3703320" y="5074920"/>
+            <a:ext cx="2203704" cy="548640"/>
+          </a:xfrm>
+          <a:prstGeom prst="rect">
+            <a:avLst/>
+          </a:prstGeom>
+          <a:noFill/>
+          <a:ln/>
+        </p:spPr>
+        <p:txBody>
+          <a:bodyPr wrap="square" lIns="0" tIns="0" rIns="0" bIns="0" rtlCol="0" anchor="ctr"/>
+          <a:lstStyle/>
+          <a:p>
+            <a:pPr indent="0" marL="0">
+              <a:buNone/>
+            </a:pPr>
+            <a:r>
+              <a:rPr lang="en-US" sz="1200" dirty="0">
                 <a:solidFill>
                   <a:srgbClr val="C9BEAC"/>
                 </a:solidFill>
@@ -3092,11 +2670,51 @@
                 <a:ea typeface="Calibri" pitchFamily="34" charset="-122"/>
                 <a:cs typeface="Calibri" pitchFamily="34" charset="-120"/>
               </a:rPr>
-              <a:t>Exclusividade, sofisticação, elegância e alto padrão.</a:t>
-            </a:r>
-            <a:endParaRPr lang="en-US" sz="1150" dirty="0"/>
-          </a:p>
-        </p:txBody>
+              <a:t>Exclusividade e alto padrão</a:t>
+            </a:r>
+            <a:endParaRPr lang="en-US" sz="1200" dirty="0"/>
+          </a:p>
+        </p:txBody>
+      </p:sp>
+      <p:sp>
+        <p:nvSpPr>
+          <p:cNvPr id="12" name="Shape 10"/>
+          <p:cNvSpPr/>
+          <p:nvPr/>
+        </p:nvSpPr>
+        <p:spPr>
+          <a:xfrm>
+            <a:off x="6364224" y="1920240"/>
+            <a:ext cx="2606040" cy="4023360"/>
+          </a:xfrm>
+          <a:prstGeom prst="rect">
+            <a:avLst/>
+          </a:prstGeom>
+          <a:solidFill>
+            <a:srgbClr val="2B1D14"/>
+          </a:solidFill>
+          <a:ln/>
+        </p:spPr>
+      </p:sp>
+      <p:sp>
+        <p:nvSpPr>
+          <p:cNvPr id="13" name="Shape 11"/>
+          <p:cNvSpPr/>
+          <p:nvPr/>
+        </p:nvSpPr>
+        <p:spPr>
+          <a:xfrm>
+            <a:off x="6364224" y="1920240"/>
+            <a:ext cx="2606040" cy="2377440"/>
+          </a:xfrm>
+          <a:prstGeom prst="rect">
+            <a:avLst/>
+          </a:prstGeom>
+          <a:solidFill>
+            <a:srgbClr val="C6A15B"/>
+          </a:solidFill>
+          <a:ln/>
+        </p:spPr>
       </p:sp>
       <p:sp>
         <p:nvSpPr>
@@ -3106,24 +2724,63 @@
         </p:nvSpPr>
         <p:spPr>
           <a:xfrm>
-            <a:off x="3703320" y="2377440"/>
-            <a:ext cx="2203704" cy="274320"/>
-          </a:xfrm>
-          <a:prstGeom prst="rect">
-            <a:avLst/>
-          </a:prstGeom>
-          <a:noFill/>
-          <a:ln/>
-        </p:spPr>
-        <p:txBody>
-          <a:bodyPr wrap="square" lIns="0" tIns="0" rIns="0" bIns="0" rtlCol="0" anchor="ctr"/>
-          <a:lstStyle/>
-          <a:p>
-            <a:pPr indent="0" marL="0">
-              <a:buNone/>
-            </a:pPr>
-            <a:r>
-              <a:rPr lang="en-US" sz="1000" b="1" spc="100" kern="0" dirty="0">
+            <a:off x="6565392" y="4480560"/>
+            <a:ext cx="2203704" cy="548640"/>
+          </a:xfrm>
+          <a:prstGeom prst="rect">
+            <a:avLst/>
+          </a:prstGeom>
+          <a:noFill/>
+          <a:ln/>
+        </p:spPr>
+        <p:txBody>
+          <a:bodyPr wrap="square" lIns="0" tIns="0" rIns="0" bIns="0" rtlCol="0" anchor="ctr"/>
+          <a:lstStyle/>
+          <a:p>
+            <a:pPr indent="0" marL="0">
+              <a:buNone/>
+            </a:pPr>
+            <a:r>
+              <a:rPr lang="en-US" sz="1500" b="1" dirty="0">
+                <a:solidFill>
+                  <a:srgbClr val="EFE6D8"/>
+                </a:solidFill>
+                <a:latin typeface="Cambria" pitchFamily="34" charset="0"/>
+                <a:ea typeface="Cambria" pitchFamily="34" charset="-122"/>
+                <a:cs typeface="Cambria" pitchFamily="34" charset="-120"/>
+              </a:rPr>
+              <a:t>Dourado envelhecido</a:t>
+            </a:r>
+            <a:endParaRPr lang="en-US" sz="1500" dirty="0"/>
+          </a:p>
+        </p:txBody>
+      </p:sp>
+      <p:sp>
+        <p:nvSpPr>
+          <p:cNvPr id="15" name="Text 13"/>
+          <p:cNvSpPr txBox="1"/>
+          <p:nvPr/>
+        </p:nvSpPr>
+        <p:spPr>
+          <a:xfrm>
+            <a:off x="6565392" y="5074920"/>
+            <a:ext cx="2203704" cy="548640"/>
+          </a:xfrm>
+          <a:prstGeom prst="rect">
+            <a:avLst/>
+          </a:prstGeom>
+          <a:noFill/>
+          <a:ln/>
+        </p:spPr>
+        <p:txBody>
+          <a:bodyPr wrap="square" lIns="0" tIns="0" rIns="0" bIns="0" rtlCol="0" anchor="ctr"/>
+          <a:lstStyle/>
+          <a:p>
+            <a:pPr indent="0" marL="0">
+              <a:buNone/>
+            </a:pPr>
+            <a:r>
+              <a:rPr lang="en-US" sz="1200" dirty="0">
                 <a:solidFill>
                   <a:srgbClr val="C9BEAC"/>
                 </a:solidFill>
@@ -3131,22 +2788,22 @@
                 <a:ea typeface="Calibri" pitchFamily="34" charset="-122"/>
                 <a:cs typeface="Calibri" pitchFamily="34" charset="-120"/>
               </a:rPr>
-              <a:t>#0E0B09</a:t>
-            </a:r>
-            <a:endParaRPr lang="en-US" sz="1000" dirty="0"/>
-          </a:p>
-        </p:txBody>
-      </p:sp>
-      <p:sp>
-        <p:nvSpPr>
-          <p:cNvPr id="15" name="Shape 13"/>
+              <a:t>Prestígio e qualidade</a:t>
+            </a:r>
+            <a:endParaRPr lang="en-US" sz="1200" dirty="0"/>
+          </a:p>
+        </p:txBody>
+      </p:sp>
+      <p:sp>
+        <p:nvSpPr>
+          <p:cNvPr id="16" name="Shape 14"/>
           <p:cNvSpPr/>
           <p:nvPr/>
         </p:nvSpPr>
         <p:spPr>
           <a:xfrm>
-            <a:off x="6364224" y="2286000"/>
-            <a:ext cx="2606040" cy="3383280"/>
+            <a:off x="9226296" y="1920240"/>
+            <a:ext cx="2606040" cy="4023360"/>
           </a:xfrm>
           <a:prstGeom prst="rect">
             <a:avLst/>
@@ -3154,44 +2811,39 @@
           <a:solidFill>
             <a:srgbClr val="2B1D14"/>
           </a:solidFill>
-          <a:ln w="12700">
-            <a:solidFill>
-              <a:srgbClr val="000000"/>
-            </a:solidFill>
-            <a:prstDash val="solid"/>
-          </a:ln>
-        </p:spPr>
-      </p:sp>
-      <p:sp>
-        <p:nvSpPr>
-          <p:cNvPr id="16" name="Shape 14"/>
+          <a:ln/>
+        </p:spPr>
+      </p:sp>
+      <p:sp>
+        <p:nvSpPr>
+          <p:cNvPr id="17" name="Shape 15"/>
           <p:cNvSpPr/>
           <p:nvPr/>
         </p:nvSpPr>
         <p:spPr>
           <a:xfrm>
-            <a:off x="6364224" y="2286000"/>
-            <a:ext cx="2606040" cy="1737360"/>
+            <a:off x="9226296" y="1920240"/>
+            <a:ext cx="2606040" cy="2377440"/>
           </a:xfrm>
           <a:prstGeom prst="rect">
             <a:avLst/>
           </a:prstGeom>
           <a:solidFill>
-            <a:srgbClr val="C6A15B"/>
+            <a:srgbClr val="D8CBB0"/>
           </a:solidFill>
           <a:ln/>
         </p:spPr>
       </p:sp>
       <p:sp>
         <p:nvSpPr>
-          <p:cNvPr id="17" name="Text 15"/>
-          <p:cNvSpPr txBox="1"/>
-          <p:nvPr/>
-        </p:nvSpPr>
-        <p:spPr>
-          <a:xfrm>
-            <a:off x="6565392" y="4160520"/>
-            <a:ext cx="2203704" cy="502920"/>
+          <p:cNvPr id="18" name="Text 16"/>
+          <p:cNvSpPr txBox="1"/>
+          <p:nvPr/>
+        </p:nvSpPr>
+        <p:spPr>
+          <a:xfrm>
+            <a:off x="9427464" y="4480560"/>
+            <a:ext cx="2203704" cy="548640"/>
           </a:xfrm>
           <a:prstGeom prst="rect">
             <a:avLst/>
@@ -3215,7 +2867,7 @@
                 <a:ea typeface="Cambria" pitchFamily="34" charset="-122"/>
                 <a:cs typeface="Cambria" pitchFamily="34" charset="-120"/>
               </a:rPr>
-              <a:t>Dourado envelhecido</a:t>
+              <a:t>Bege / creme</a:t>
             </a:r>
             <a:endParaRPr lang="en-US" sz="1500" dirty="0"/>
           </a:p>
@@ -3223,33 +2875,30 @@
       </p:sp>
       <p:sp>
         <p:nvSpPr>
-          <p:cNvPr id="18" name="Text 16"/>
-          <p:cNvSpPr txBox="1"/>
-          <p:nvPr/>
-        </p:nvSpPr>
-        <p:spPr>
-          <a:xfrm>
-            <a:off x="6565392" y="4617720"/>
-            <a:ext cx="2203704" cy="960120"/>
-          </a:xfrm>
-          <a:prstGeom prst="rect">
-            <a:avLst/>
-          </a:prstGeom>
-          <a:noFill/>
-          <a:ln/>
-        </p:spPr>
-        <p:txBody>
-          <a:bodyPr wrap="square" lIns="0" tIns="0" rIns="0" bIns="0" rtlCol="0" anchor="ctr"/>
-          <a:lstStyle/>
-          <a:p>
-            <a:pPr indent="0" marL="0">
-              <a:lnSpc>
-                <a:spcPct val="120000"/>
-              </a:lnSpc>
-              <a:buNone/>
-            </a:pPr>
-            <a:r>
-              <a:rPr lang="en-US" sz="1150" dirty="0">
+          <p:cNvPr id="19" name="Text 17"/>
+          <p:cNvSpPr txBox="1"/>
+          <p:nvPr/>
+        </p:nvSpPr>
+        <p:spPr>
+          <a:xfrm>
+            <a:off x="9427464" y="5074920"/>
+            <a:ext cx="2203704" cy="548640"/>
+          </a:xfrm>
+          <a:prstGeom prst="rect">
+            <a:avLst/>
+          </a:prstGeom>
+          <a:noFill/>
+          <a:ln/>
+        </p:spPr>
+        <p:txBody>
+          <a:bodyPr wrap="square" lIns="0" tIns="0" rIns="0" bIns="0" rtlCol="0" anchor="ctr"/>
+          <a:lstStyle/>
+          <a:p>
+            <a:pPr indent="0" marL="0">
+              <a:buNone/>
+            </a:pPr>
+            <a:r>
+              <a:rPr lang="en-US" sz="1200" dirty="0">
                 <a:solidFill>
                   <a:srgbClr val="C9BEAC"/>
                 </a:solidFill>
@@ -3257,46 +2906,46 @@
                 <a:ea typeface="Calibri" pitchFamily="34" charset="-122"/>
                 <a:cs typeface="Calibri" pitchFamily="34" charset="-120"/>
               </a:rPr>
-              <a:t>Exclusividade, prestígio e qualidade percebida.</a:t>
-            </a:r>
-            <a:endParaRPr lang="en-US" sz="1150" dirty="0"/>
-          </a:p>
-        </p:txBody>
-      </p:sp>
-      <p:sp>
-        <p:nvSpPr>
-          <p:cNvPr id="19" name="Text 17"/>
-          <p:cNvSpPr txBox="1"/>
-          <p:nvPr/>
-        </p:nvSpPr>
-        <p:spPr>
-          <a:xfrm>
-            <a:off x="6565392" y="2377440"/>
-            <a:ext cx="2203704" cy="274320"/>
-          </a:xfrm>
-          <a:prstGeom prst="rect">
-            <a:avLst/>
-          </a:prstGeom>
-          <a:noFill/>
-          <a:ln/>
-        </p:spPr>
-        <p:txBody>
-          <a:bodyPr wrap="square" lIns="0" tIns="0" rIns="0" bIns="0" rtlCol="0" anchor="ctr"/>
-          <a:lstStyle/>
-          <a:p>
-            <a:pPr indent="0" marL="0">
-              <a:buNone/>
-            </a:pPr>
-            <a:r>
-              <a:rPr lang="en-US" sz="1000" b="1" spc="100" kern="0" dirty="0">
-                <a:solidFill>
-                  <a:srgbClr val="17110D"/>
+              <a:t>Refinamento artesanal</a:t>
+            </a:r>
+            <a:endParaRPr lang="en-US" sz="1200" dirty="0"/>
+          </a:p>
+        </p:txBody>
+      </p:sp>
+      <p:sp>
+        <p:nvSpPr>
+          <p:cNvPr id="20" name="Text 18"/>
+          <p:cNvSpPr txBox="1"/>
+          <p:nvPr/>
+        </p:nvSpPr>
+        <p:spPr>
+          <a:xfrm>
+            <a:off x="11274552" y="6400800"/>
+            <a:ext cx="548640" cy="274320"/>
+          </a:xfrm>
+          <a:prstGeom prst="rect">
+            <a:avLst/>
+          </a:prstGeom>
+          <a:noFill/>
+          <a:ln/>
+        </p:spPr>
+        <p:txBody>
+          <a:bodyPr wrap="square" lIns="0" tIns="0" rIns="0" bIns="0" rtlCol="0" anchor="ctr"/>
+          <a:lstStyle/>
+          <a:p>
+            <a:pPr algn="r" indent="0" marL="0">
+              <a:buNone/>
+            </a:pPr>
+            <a:r>
+              <a:rPr lang="en-US" sz="1000" dirty="0">
+                <a:solidFill>
+                  <a:srgbClr val="9C7C3F"/>
                 </a:solidFill>
                 <a:latin typeface="Calibri" pitchFamily="34" charset="0"/>
                 <a:ea typeface="Calibri" pitchFamily="34" charset="-122"/>
                 <a:cs typeface="Calibri" pitchFamily="34" charset="-120"/>
               </a:rPr>
-              <a:t>#C6A15B</a:t>
+              <a:t>03</a:t>
             </a:r>
             <a:endParaRPr lang="en-US" sz="1000" dirty="0"/>
           </a:p>
@@ -3304,218 +2953,14 @@
       </p:sp>
       <p:sp>
         <p:nvSpPr>
-          <p:cNvPr id="20" name="Shape 18"/>
-          <p:cNvSpPr/>
-          <p:nvPr/>
-        </p:nvSpPr>
-        <p:spPr>
-          <a:xfrm>
-            <a:off x="9226296" y="2286000"/>
-            <a:ext cx="2606040" cy="3383280"/>
-          </a:xfrm>
-          <a:prstGeom prst="rect">
-            <a:avLst/>
-          </a:prstGeom>
-          <a:solidFill>
-            <a:srgbClr val="2B1D14"/>
-          </a:solidFill>
-          <a:ln w="12700">
-            <a:solidFill>
-              <a:srgbClr val="000000"/>
-            </a:solidFill>
-            <a:prstDash val="solid"/>
-          </a:ln>
-        </p:spPr>
-      </p:sp>
-      <p:sp>
-        <p:nvSpPr>
-          <p:cNvPr id="21" name="Shape 19"/>
-          <p:cNvSpPr/>
-          <p:nvPr/>
-        </p:nvSpPr>
-        <p:spPr>
-          <a:xfrm>
-            <a:off x="9226296" y="2286000"/>
-            <a:ext cx="2606040" cy="1737360"/>
-          </a:xfrm>
-          <a:prstGeom prst="rect">
-            <a:avLst/>
-          </a:prstGeom>
-          <a:solidFill>
-            <a:srgbClr val="D8CBB0"/>
-          </a:solidFill>
-          <a:ln/>
-        </p:spPr>
-      </p:sp>
-      <p:sp>
-        <p:nvSpPr>
-          <p:cNvPr id="22" name="Text 20"/>
-          <p:cNvSpPr txBox="1"/>
-          <p:nvPr/>
-        </p:nvSpPr>
-        <p:spPr>
-          <a:xfrm>
-            <a:off x="9427464" y="4160520"/>
-            <a:ext cx="2203704" cy="502920"/>
-          </a:xfrm>
-          <a:prstGeom prst="rect">
-            <a:avLst/>
-          </a:prstGeom>
-          <a:noFill/>
-          <a:ln/>
-        </p:spPr>
-        <p:txBody>
-          <a:bodyPr wrap="square" lIns="0" tIns="0" rIns="0" bIns="0" rtlCol="0" anchor="ctr"/>
-          <a:lstStyle/>
-          <a:p>
-            <a:pPr indent="0" marL="0">
-              <a:buNone/>
-            </a:pPr>
-            <a:r>
-              <a:rPr lang="en-US" sz="1500" b="1" dirty="0">
-                <a:solidFill>
-                  <a:srgbClr val="EFE6D8"/>
-                </a:solidFill>
-                <a:latin typeface="Cambria" pitchFamily="34" charset="0"/>
-                <a:ea typeface="Cambria" pitchFamily="34" charset="-122"/>
-                <a:cs typeface="Cambria" pitchFamily="34" charset="-120"/>
-              </a:rPr>
-              <a:t>Bege / creme</a:t>
-            </a:r>
-            <a:endParaRPr lang="en-US" sz="1500" dirty="0"/>
-          </a:p>
-        </p:txBody>
-      </p:sp>
-      <p:sp>
-        <p:nvSpPr>
-          <p:cNvPr id="23" name="Text 21"/>
-          <p:cNvSpPr txBox="1"/>
-          <p:nvPr/>
-        </p:nvSpPr>
-        <p:spPr>
-          <a:xfrm>
-            <a:off x="9427464" y="4617720"/>
-            <a:ext cx="2203704" cy="960120"/>
-          </a:xfrm>
-          <a:prstGeom prst="rect">
-            <a:avLst/>
-          </a:prstGeom>
-          <a:noFill/>
-          <a:ln/>
-        </p:spPr>
-        <p:txBody>
-          <a:bodyPr wrap="square" lIns="0" tIns="0" rIns="0" bIns="0" rtlCol="0" anchor="ctr"/>
-          <a:lstStyle/>
-          <a:p>
-            <a:pPr indent="0" marL="0">
-              <a:lnSpc>
-                <a:spcPct val="120000"/>
-              </a:lnSpc>
-              <a:buNone/>
-            </a:pPr>
-            <a:r>
-              <a:rPr lang="en-US" sz="1150" dirty="0">
-                <a:solidFill>
-                  <a:srgbClr val="C9BEAC"/>
-                </a:solidFill>
-                <a:latin typeface="Calibri" pitchFamily="34" charset="0"/>
-                <a:ea typeface="Calibri" pitchFamily="34" charset="-122"/>
-                <a:cs typeface="Calibri" pitchFamily="34" charset="-120"/>
-              </a:rPr>
-              <a:t>Tradição, refinamento e aspecto artesanal — cor de contraste.</a:t>
-            </a:r>
-            <a:endParaRPr lang="en-US" sz="1150" dirty="0"/>
-          </a:p>
-        </p:txBody>
-      </p:sp>
-      <p:sp>
-        <p:nvSpPr>
-          <p:cNvPr id="24" name="Text 22"/>
-          <p:cNvSpPr txBox="1"/>
-          <p:nvPr/>
-        </p:nvSpPr>
-        <p:spPr>
-          <a:xfrm>
-            <a:off x="9427464" y="2377440"/>
-            <a:ext cx="2203704" cy="274320"/>
-          </a:xfrm>
-          <a:prstGeom prst="rect">
-            <a:avLst/>
-          </a:prstGeom>
-          <a:noFill/>
-          <a:ln/>
-        </p:spPr>
-        <p:txBody>
-          <a:bodyPr wrap="square" lIns="0" tIns="0" rIns="0" bIns="0" rtlCol="0" anchor="ctr"/>
-          <a:lstStyle/>
-          <a:p>
-            <a:pPr indent="0" marL="0">
-              <a:buNone/>
-            </a:pPr>
-            <a:r>
-              <a:rPr lang="en-US" sz="1000" b="1" spc="100" kern="0" dirty="0">
-                <a:solidFill>
-                  <a:srgbClr val="17110D"/>
-                </a:solidFill>
-                <a:latin typeface="Calibri" pitchFamily="34" charset="0"/>
-                <a:ea typeface="Calibri" pitchFamily="34" charset="-122"/>
-                <a:cs typeface="Calibri" pitchFamily="34" charset="-120"/>
-              </a:rPr>
-              <a:t>#D8CBB0</a:t>
-            </a:r>
-            <a:endParaRPr lang="en-US" sz="1000" dirty="0"/>
-          </a:p>
-        </p:txBody>
-      </p:sp>
-      <p:sp>
-        <p:nvSpPr>
-          <p:cNvPr id="25" name="Text 23"/>
-          <p:cNvSpPr txBox="1"/>
-          <p:nvPr/>
-        </p:nvSpPr>
-        <p:spPr>
-          <a:xfrm>
-            <a:off x="11274552" y="6355080"/>
-            <a:ext cx="548640" cy="320040"/>
-          </a:xfrm>
-          <a:prstGeom prst="rect">
-            <a:avLst/>
-          </a:prstGeom>
-          <a:noFill/>
-          <a:ln/>
-        </p:spPr>
-        <p:txBody>
-          <a:bodyPr wrap="square" lIns="0" tIns="0" rIns="0" bIns="0" rtlCol="0" anchor="ctr"/>
-          <a:lstStyle/>
-          <a:p>
-            <a:pPr algn="r" indent="0" marL="0">
-              <a:buNone/>
-            </a:pPr>
-            <a:r>
-              <a:rPr lang="en-US" sz="1000" dirty="0">
-                <a:solidFill>
-                  <a:srgbClr val="9C7C3F"/>
-                </a:solidFill>
-                <a:latin typeface="Calibri" pitchFamily="34" charset="0"/>
-                <a:ea typeface="Calibri" pitchFamily="34" charset="-122"/>
-                <a:cs typeface="Calibri" pitchFamily="34" charset="-120"/>
-              </a:rPr>
-              <a:t>03</a:t>
-            </a:r>
-            <a:endParaRPr lang="en-US" sz="1000" dirty="0"/>
-          </a:p>
-        </p:txBody>
-      </p:sp>
-      <p:sp>
-        <p:nvSpPr>
-          <p:cNvPr id="26" name="Text 24"/>
-          <p:cNvSpPr txBox="1"/>
-          <p:nvPr/>
-        </p:nvSpPr>
-        <p:spPr>
-          <a:xfrm>
-            <a:off x="640080" y="6355080"/>
-            <a:ext cx="2743200" cy="320040"/>
+          <p:cNvPr id="21" name="Text 19"/>
+          <p:cNvSpPr txBox="1"/>
+          <p:nvPr/>
+        </p:nvSpPr>
+        <p:spPr>
+          <a:xfrm>
+            <a:off x="640080" y="6400800"/>
+            <a:ext cx="2743200" cy="274320"/>
           </a:xfrm>
           <a:prstGeom prst="rect">
             <a:avLst/>
@@ -3657,30 +3102,89 @@
       </p:sp>
       <p:sp>
         <p:nvSpPr>
-          <p:cNvPr id="4" name="Text 2"/>
-          <p:cNvSpPr txBox="1"/>
-          <p:nvPr/>
-        </p:nvSpPr>
-        <p:spPr>
-          <a:xfrm>
-            <a:off x="640080" y="1508760"/>
-            <a:ext cx="8778240" cy="502920"/>
-          </a:xfrm>
-          <a:prstGeom prst="rect">
-            <a:avLst/>
-          </a:prstGeom>
-          <a:noFill/>
-          <a:ln/>
-        </p:spPr>
-        <p:txBody>
-          <a:bodyPr wrap="square" lIns="0" tIns="0" rIns="0" bIns="0" rtlCol="0" anchor="ctr"/>
-          <a:lstStyle/>
-          <a:p>
-            <a:pPr indent="0" marL="0">
-              <a:buNone/>
-            </a:pPr>
-            <a:r>
-              <a:rPr lang="en-US" sz="1350" i="1" dirty="0">
+          <p:cNvPr id="4" name="Shape 2"/>
+          <p:cNvSpPr/>
+          <p:nvPr/>
+        </p:nvSpPr>
+        <p:spPr>
+          <a:xfrm>
+            <a:off x="640080" y="2304288"/>
+            <a:ext cx="118872" cy="118872"/>
+          </a:xfrm>
+          <a:prstGeom prst="rect">
+            <a:avLst/>
+          </a:prstGeom>
+          <a:solidFill>
+            <a:srgbClr val="C6A15B"/>
+          </a:solidFill>
+          <a:ln/>
+        </p:spPr>
+      </p:sp>
+      <p:sp>
+        <p:nvSpPr>
+          <p:cNvPr id="5" name="Text 3"/>
+          <p:cNvSpPr txBox="1"/>
+          <p:nvPr/>
+        </p:nvSpPr>
+        <p:spPr>
+          <a:xfrm>
+            <a:off x="960120" y="2121408"/>
+            <a:ext cx="4800600" cy="411480"/>
+          </a:xfrm>
+          <a:prstGeom prst="rect">
+            <a:avLst/>
+          </a:prstGeom>
+          <a:noFill/>
+          <a:ln/>
+        </p:spPr>
+        <p:txBody>
+          <a:bodyPr wrap="square" lIns="0" tIns="0" rIns="0" bIns="0" rtlCol="0" anchor="ctr"/>
+          <a:lstStyle/>
+          <a:p>
+            <a:pPr indent="0" marL="0">
+              <a:buNone/>
+            </a:pPr>
+            <a:r>
+              <a:rPr lang="en-US" sz="1900" b="1" dirty="0">
+                <a:solidFill>
+                  <a:srgbClr val="EFE6D8"/>
+                </a:solidFill>
+                <a:latin typeface="Cambria" pitchFamily="34" charset="0"/>
+                <a:ea typeface="Cambria" pitchFamily="34" charset="-122"/>
+                <a:cs typeface="Cambria" pitchFamily="34" charset="-120"/>
+              </a:rPr>
+              <a:t>Alto contraste</a:t>
+            </a:r>
+            <a:endParaRPr lang="en-US" sz="1900" dirty="0"/>
+          </a:p>
+        </p:txBody>
+      </p:sp>
+      <p:sp>
+        <p:nvSpPr>
+          <p:cNvPr id="6" name="Text 4"/>
+          <p:cNvSpPr txBox="1"/>
+          <p:nvPr/>
+        </p:nvSpPr>
+        <p:spPr>
+          <a:xfrm>
+            <a:off x="960120" y="2578608"/>
+            <a:ext cx="4800600" cy="365760"/>
+          </a:xfrm>
+          <a:prstGeom prst="rect">
+            <a:avLst/>
+          </a:prstGeom>
+          <a:noFill/>
+          <a:ln/>
+        </p:spPr>
+        <p:txBody>
+          <a:bodyPr wrap="square" lIns="0" tIns="0" rIns="0" bIns="0" rtlCol="0" anchor="ctr"/>
+          <a:lstStyle/>
+          <a:p>
+            <a:pPr indent="0" marL="0">
+              <a:buNone/>
+            </a:pPr>
+            <a:r>
+              <a:rPr lang="en-US" sz="1300" dirty="0">
                 <a:solidFill>
                   <a:srgbClr val="C9BEAC"/>
                 </a:solidFill>
@@ -3688,44 +3192,24 @@
                 <a:ea typeface="Calibri" pitchFamily="34" charset="-122"/>
                 <a:cs typeface="Calibri" pitchFamily="34" charset="-120"/>
               </a:rPr>
-              <a:t>A escolha de uma família serifada, fina e espaçada aproxima a marca dos códigos visuais de vinhos e destilados premium.</a:t>
-            </a:r>
-            <a:endParaRPr lang="en-US" sz="1350" dirty="0"/>
-          </a:p>
-        </p:txBody>
-      </p:sp>
-      <p:sp>
-        <p:nvSpPr>
-          <p:cNvPr id="5" name="Shape 3"/>
+              <a:t>Luxo e sofisticação</a:t>
+            </a:r>
+            <a:endParaRPr lang="en-US" sz="1300" dirty="0"/>
+          </a:p>
+        </p:txBody>
+      </p:sp>
+      <p:sp>
+        <p:nvSpPr>
+          <p:cNvPr id="7" name="Shape 5"/>
           <p:cNvSpPr/>
           <p:nvPr/>
         </p:nvSpPr>
         <p:spPr>
           <a:xfrm>
-            <a:off x="640080" y="2331720"/>
-            <a:ext cx="5074920" cy="1874520"/>
-          </a:xfrm>
-          <a:prstGeom prst="rect">
-            <a:avLst/>
-          </a:prstGeom>
-          <a:solidFill>
-            <a:srgbClr val="2B1D14"/>
-          </a:solidFill>
-          <a:ln/>
-        </p:spPr>
-      </p:sp>
-      <p:sp>
-        <p:nvSpPr>
-          <p:cNvPr id="6" name="Shape 4"/>
-          <p:cNvSpPr/>
-          <p:nvPr/>
-        </p:nvSpPr>
-        <p:spPr>
-          <a:xfrm>
-            <a:off x="896112" y="2587752"/>
-            <a:ext cx="137160" cy="137160"/>
-          </a:xfrm>
-          <a:prstGeom prst="ellipse">
+            <a:off x="6080760" y="2304288"/>
+            <a:ext cx="118872" cy="118872"/>
+          </a:xfrm>
+          <a:prstGeom prst="rect">
             <a:avLst/>
           </a:prstGeom>
           <a:solidFill>
@@ -3736,30 +3220,30 @@
       </p:sp>
       <p:sp>
         <p:nvSpPr>
-          <p:cNvPr id="7" name="Text 5"/>
-          <p:cNvSpPr txBox="1"/>
-          <p:nvPr/>
-        </p:nvSpPr>
-        <p:spPr>
-          <a:xfrm>
-            <a:off x="1143000" y="2496312"/>
-            <a:ext cx="4297680" cy="411480"/>
-          </a:xfrm>
-          <a:prstGeom prst="rect">
-            <a:avLst/>
-          </a:prstGeom>
-          <a:noFill/>
-          <a:ln/>
-        </p:spPr>
-        <p:txBody>
-          <a:bodyPr wrap="square" lIns="0" tIns="0" rIns="0" bIns="0" rtlCol="0" anchor="ctr"/>
-          <a:lstStyle/>
-          <a:p>
-            <a:pPr indent="0" marL="0">
-              <a:buNone/>
-            </a:pPr>
-            <a:r>
-              <a:rPr lang="en-US" sz="1550" b="1" dirty="0">
+          <p:cNvPr id="8" name="Text 6"/>
+          <p:cNvSpPr txBox="1"/>
+          <p:nvPr/>
+        </p:nvSpPr>
+        <p:spPr>
+          <a:xfrm>
+            <a:off x="6400800" y="2121408"/>
+            <a:ext cx="4800600" cy="411480"/>
+          </a:xfrm>
+          <a:prstGeom prst="rect">
+            <a:avLst/>
+          </a:prstGeom>
+          <a:noFill/>
+          <a:ln/>
+        </p:spPr>
+        <p:txBody>
+          <a:bodyPr wrap="square" lIns="0" tIns="0" rIns="0" bIns="0" rtlCol="0" anchor="ctr"/>
+          <a:lstStyle/>
+          <a:p>
+            <a:pPr indent="0" marL="0">
+              <a:buNone/>
+            </a:pPr>
+            <a:r>
+              <a:rPr lang="en-US" sz="1900" b="1" dirty="0">
                 <a:solidFill>
                   <a:srgbClr val="EFE6D8"/>
                 </a:solidFill>
@@ -3767,41 +3251,38 @@
                 <a:ea typeface="Cambria" pitchFamily="34" charset="-122"/>
                 <a:cs typeface="Cambria" pitchFamily="34" charset="-120"/>
               </a:rPr>
-              <a:t>Serifada de alto contraste</a:t>
-            </a:r>
-            <a:endParaRPr lang="en-US" sz="1550" dirty="0"/>
-          </a:p>
-        </p:txBody>
-      </p:sp>
-      <p:sp>
-        <p:nvSpPr>
-          <p:cNvPr id="8" name="Text 6"/>
-          <p:cNvSpPr txBox="1"/>
-          <p:nvPr/>
-        </p:nvSpPr>
-        <p:spPr>
-          <a:xfrm>
-            <a:off x="1143000" y="2953512"/>
-            <a:ext cx="4297680" cy="1051560"/>
-          </a:xfrm>
-          <a:prstGeom prst="rect">
-            <a:avLst/>
-          </a:prstGeom>
-          <a:noFill/>
-          <a:ln/>
-        </p:spPr>
-        <p:txBody>
-          <a:bodyPr wrap="square" lIns="0" tIns="0" rIns="0" bIns="0" rtlCol="0" anchor="ctr"/>
-          <a:lstStyle/>
-          <a:p>
-            <a:pPr indent="0" marL="0">
-              <a:lnSpc>
-                <a:spcPct val="125000"/>
-              </a:lnSpc>
-              <a:buNone/>
-            </a:pPr>
-            <a:r>
-              <a:rPr lang="en-US" sz="1200" dirty="0">
+              <a:t>Clássica</a:t>
+            </a:r>
+            <a:endParaRPr lang="en-US" sz="1900" dirty="0"/>
+          </a:p>
+        </p:txBody>
+      </p:sp>
+      <p:sp>
+        <p:nvSpPr>
+          <p:cNvPr id="9" name="Text 7"/>
+          <p:cNvSpPr txBox="1"/>
+          <p:nvPr/>
+        </p:nvSpPr>
+        <p:spPr>
+          <a:xfrm>
+            <a:off x="6400800" y="2578608"/>
+            <a:ext cx="4800600" cy="365760"/>
+          </a:xfrm>
+          <a:prstGeom prst="rect">
+            <a:avLst/>
+          </a:prstGeom>
+          <a:noFill/>
+          <a:ln/>
+        </p:spPr>
+        <p:txBody>
+          <a:bodyPr wrap="square" lIns="0" tIns="0" rIns="0" bIns="0" rtlCol="0" anchor="ctr"/>
+          <a:lstStyle/>
+          <a:p>
+            <a:pPr indent="0" marL="0">
+              <a:buNone/>
+            </a:pPr>
+            <a:r>
+              <a:rPr lang="en-US" sz="1300" dirty="0">
                 <a:solidFill>
                   <a:srgbClr val="C9BEAC"/>
                 </a:solidFill>
@@ -3809,31 +3290,11 @@
                 <a:ea typeface="Calibri" pitchFamily="34" charset="-122"/>
                 <a:cs typeface="Calibri" pitchFamily="34" charset="-120"/>
               </a:rPr>
-              <a:t>Elegância, tradição e sofisticação — remete a marcas de luxo, vinhos e perfumaria.</a:t>
-            </a:r>
-            <a:endParaRPr lang="en-US" sz="1200" dirty="0"/>
-          </a:p>
-        </p:txBody>
-      </p:sp>
-      <p:sp>
-        <p:nvSpPr>
-          <p:cNvPr id="9" name="Shape 7"/>
-          <p:cNvSpPr/>
-          <p:nvPr/>
-        </p:nvSpPr>
-        <p:spPr>
-          <a:xfrm>
-            <a:off x="6035040" y="2331720"/>
-            <a:ext cx="5074920" cy="1874520"/>
-          </a:xfrm>
-          <a:prstGeom prst="rect">
-            <a:avLst/>
-          </a:prstGeom>
-          <a:solidFill>
-            <a:srgbClr val="2B1D14"/>
-          </a:solidFill>
-          <a:ln/>
-        </p:spPr>
+              <a:t>Tradição e confiança</a:t>
+            </a:r>
+            <a:endParaRPr lang="en-US" sz="1300" dirty="0"/>
+          </a:p>
+        </p:txBody>
       </p:sp>
       <p:sp>
         <p:nvSpPr>
@@ -3843,10 +3304,10 @@
         </p:nvSpPr>
         <p:spPr>
           <a:xfrm>
-            <a:off x="6291072" y="2587752"/>
-            <a:ext cx="137160" cy="137160"/>
-          </a:xfrm>
-          <a:prstGeom prst="ellipse">
+            <a:off x="640080" y="3904488"/>
+            <a:ext cx="118872" cy="118872"/>
+          </a:xfrm>
+          <a:prstGeom prst="rect">
             <a:avLst/>
           </a:prstGeom>
           <a:solidFill>
@@ -3863,24 +3324,24 @@
         </p:nvSpPr>
         <p:spPr>
           <a:xfrm>
-            <a:off x="6537960" y="2496312"/>
-            <a:ext cx="4297680" cy="411480"/>
-          </a:xfrm>
-          <a:prstGeom prst="rect">
-            <a:avLst/>
-          </a:prstGeom>
-          <a:noFill/>
-          <a:ln/>
-        </p:spPr>
-        <p:txBody>
-          <a:bodyPr wrap="square" lIns="0" tIns="0" rIns="0" bIns="0" rtlCol="0" anchor="ctr"/>
-          <a:lstStyle/>
-          <a:p>
-            <a:pPr indent="0" marL="0">
-              <a:buNone/>
-            </a:pPr>
-            <a:r>
-              <a:rPr lang="en-US" sz="1550" b="1" dirty="0">
+            <a:off x="960120" y="3721608"/>
+            <a:ext cx="4800600" cy="411480"/>
+          </a:xfrm>
+          <a:prstGeom prst="rect">
+            <a:avLst/>
+          </a:prstGeom>
+          <a:noFill/>
+          <a:ln/>
+        </p:spPr>
+        <p:txBody>
+          <a:bodyPr wrap="square" lIns="0" tIns="0" rIns="0" bIns="0" rtlCol="0" anchor="ctr"/>
+          <a:lstStyle/>
+          <a:p>
+            <a:pPr indent="0" marL="0">
+              <a:buNone/>
+            </a:pPr>
+            <a:r>
+              <a:rPr lang="en-US" sz="1900" b="1" dirty="0">
                 <a:solidFill>
                   <a:srgbClr val="EFE6D8"/>
                 </a:solidFill>
@@ -3888,9 +3349,9 @@
                 <a:ea typeface="Cambria" pitchFamily="34" charset="-122"/>
                 <a:cs typeface="Cambria" pitchFamily="34" charset="-120"/>
               </a:rPr>
-              <a:t>Serifada clássica</a:t>
-            </a:r>
-            <a:endParaRPr lang="en-US" sz="1550" dirty="0"/>
+              <a:t>Fina e delicada</a:t>
+            </a:r>
+            <a:endParaRPr lang="en-US" sz="1900" dirty="0"/>
           </a:p>
         </p:txBody>
       </p:sp>
@@ -3902,27 +3363,24 @@
         </p:nvSpPr>
         <p:spPr>
           <a:xfrm>
-            <a:off x="6537960" y="2953512"/>
-            <a:ext cx="4297680" cy="1051560"/>
-          </a:xfrm>
-          <a:prstGeom prst="rect">
-            <a:avLst/>
-          </a:prstGeom>
-          <a:noFill/>
-          <a:ln/>
-        </p:spPr>
-        <p:txBody>
-          <a:bodyPr wrap="square" lIns="0" tIns="0" rIns="0" bIns="0" rtlCol="0" anchor="ctr"/>
-          <a:lstStyle/>
-          <a:p>
-            <a:pPr indent="0" marL="0">
-              <a:lnSpc>
-                <a:spcPct val="125000"/>
-              </a:lnSpc>
-              <a:buNone/>
-            </a:pPr>
-            <a:r>
-              <a:rPr lang="en-US" sz="1200" dirty="0">
+            <a:off x="960120" y="4178808"/>
+            <a:ext cx="4800600" cy="365760"/>
+          </a:xfrm>
+          <a:prstGeom prst="rect">
+            <a:avLst/>
+          </a:prstGeom>
+          <a:noFill/>
+          <a:ln/>
+        </p:spPr>
+        <p:txBody>
+          <a:bodyPr wrap="square" lIns="0" tIns="0" rIns="0" bIns="0" rtlCol="0" anchor="ctr"/>
+          <a:lstStyle/>
+          <a:p>
+            <a:pPr indent="0" marL="0">
+              <a:buNone/>
+            </a:pPr>
+            <a:r>
+              <a:rPr lang="en-US" sz="1300" dirty="0">
                 <a:solidFill>
                   <a:srgbClr val="C9BEAC"/>
                 </a:solidFill>
@@ -3930,9 +3388,9 @@
                 <a:ea typeface="Calibri" pitchFamily="34" charset="-122"/>
                 <a:cs typeface="Calibri" pitchFamily="34" charset="-120"/>
               </a:rPr>
-              <a:t>Tradição, confiança e qualidade; sensação de produto artesanal e consolidado.</a:t>
-            </a:r>
-            <a:endParaRPr lang="en-US" sz="1200" dirty="0"/>
+              <a:t>Exclusividade e refinamento</a:t>
+            </a:r>
+            <a:endParaRPr lang="en-US" sz="1300" dirty="0"/>
           </a:p>
         </p:txBody>
       </p:sp>
@@ -3944,30 +3402,10 @@
         </p:nvSpPr>
         <p:spPr>
           <a:xfrm>
-            <a:off x="640080" y="4343400"/>
-            <a:ext cx="5074920" cy="1874520"/>
-          </a:xfrm>
-          <a:prstGeom prst="rect">
-            <a:avLst/>
-          </a:prstGeom>
-          <a:solidFill>
-            <a:srgbClr val="2B1D14"/>
-          </a:solidFill>
-          <a:ln/>
-        </p:spPr>
-      </p:sp>
-      <p:sp>
-        <p:nvSpPr>
-          <p:cNvPr id="14" name="Shape 12"/>
-          <p:cNvSpPr/>
-          <p:nvPr/>
-        </p:nvSpPr>
-        <p:spPr>
-          <a:xfrm>
-            <a:off x="896112" y="4599432"/>
-            <a:ext cx="137160" cy="137160"/>
-          </a:xfrm>
-          <a:prstGeom prst="ellipse">
+            <a:off x="6080760" y="3904488"/>
+            <a:ext cx="118872" cy="118872"/>
+          </a:xfrm>
+          <a:prstGeom prst="rect">
             <a:avLst/>
           </a:prstGeom>
           <a:solidFill>
@@ -3978,30 +3416,30 @@
       </p:sp>
       <p:sp>
         <p:nvSpPr>
-          <p:cNvPr id="15" name="Text 13"/>
-          <p:cNvSpPr txBox="1"/>
-          <p:nvPr/>
-        </p:nvSpPr>
-        <p:spPr>
-          <a:xfrm>
-            <a:off x="1143000" y="4507992"/>
-            <a:ext cx="4297680" cy="411480"/>
-          </a:xfrm>
-          <a:prstGeom prst="rect">
-            <a:avLst/>
-          </a:prstGeom>
-          <a:noFill/>
-          <a:ln/>
-        </p:spPr>
-        <p:txBody>
-          <a:bodyPr wrap="square" lIns="0" tIns="0" rIns="0" bIns="0" rtlCol="0" anchor="ctr"/>
-          <a:lstStyle/>
-          <a:p>
-            <a:pPr indent="0" marL="0">
-              <a:buNone/>
-            </a:pPr>
-            <a:r>
-              <a:rPr lang="en-US" sz="1550" b="1" dirty="0">
+          <p:cNvPr id="14" name="Text 12"/>
+          <p:cNvSpPr txBox="1"/>
+          <p:nvPr/>
+        </p:nvSpPr>
+        <p:spPr>
+          <a:xfrm>
+            <a:off x="6400800" y="3721608"/>
+            <a:ext cx="4800600" cy="411480"/>
+          </a:xfrm>
+          <a:prstGeom prst="rect">
+            <a:avLst/>
+          </a:prstGeom>
+          <a:noFill/>
+          <a:ln/>
+        </p:spPr>
+        <p:txBody>
+          <a:bodyPr wrap="square" lIns="0" tIns="0" rIns="0" bIns="0" rtlCol="0" anchor="ctr"/>
+          <a:lstStyle/>
+          <a:p>
+            <a:pPr indent="0" marL="0">
+              <a:buNone/>
+            </a:pPr>
+            <a:r>
+              <a:rPr lang="en-US" sz="1900" b="1" dirty="0">
                 <a:solidFill>
                   <a:srgbClr val="EFE6D8"/>
                 </a:solidFill>
@@ -4009,41 +3447,38 @@
                 <a:ea typeface="Cambria" pitchFamily="34" charset="-122"/>
                 <a:cs typeface="Cambria" pitchFamily="34" charset="-120"/>
               </a:rPr>
-              <a:t>Serifada fina e delicada</a:t>
-            </a:r>
-            <a:endParaRPr lang="en-US" sz="1550" dirty="0"/>
-          </a:p>
-        </p:txBody>
-      </p:sp>
-      <p:sp>
-        <p:nvSpPr>
-          <p:cNvPr id="16" name="Text 14"/>
-          <p:cNvSpPr txBox="1"/>
-          <p:nvPr/>
-        </p:nvSpPr>
-        <p:spPr>
-          <a:xfrm>
-            <a:off x="1143000" y="4965192"/>
-            <a:ext cx="4297680" cy="1051560"/>
-          </a:xfrm>
-          <a:prstGeom prst="rect">
-            <a:avLst/>
-          </a:prstGeom>
-          <a:noFill/>
-          <a:ln/>
-        </p:spPr>
-        <p:txBody>
-          <a:bodyPr wrap="square" lIns="0" tIns="0" rIns="0" bIns="0" rtlCol="0" anchor="ctr"/>
-          <a:lstStyle/>
-          <a:p>
-            <a:pPr indent="0" marL="0">
-              <a:lnSpc>
-                <a:spcPct val="125000"/>
-              </a:lnSpc>
-              <a:buNone/>
-            </a:pPr>
-            <a:r>
-              <a:rPr lang="en-US" sz="1200" dirty="0">
+              <a:t>Tracking alto</a:t>
+            </a:r>
+            <a:endParaRPr lang="en-US" sz="1900" dirty="0"/>
+          </a:p>
+        </p:txBody>
+      </p:sp>
+      <p:sp>
+        <p:nvSpPr>
+          <p:cNvPr id="15" name="Text 13"/>
+          <p:cNvSpPr txBox="1"/>
+          <p:nvPr/>
+        </p:nvSpPr>
+        <p:spPr>
+          <a:xfrm>
+            <a:off x="6400800" y="4178808"/>
+            <a:ext cx="4800600" cy="365760"/>
+          </a:xfrm>
+          <a:prstGeom prst="rect">
+            <a:avLst/>
+          </a:prstGeom>
+          <a:noFill/>
+          <a:ln/>
+        </p:spPr>
+        <p:txBody>
+          <a:bodyPr wrap="square" lIns="0" tIns="0" rIns="0" bIns="0" rtlCol="0" anchor="ctr"/>
+          <a:lstStyle/>
+          <a:p>
+            <a:pPr indent="0" marL="0">
+              <a:buNone/>
+            </a:pPr>
+            <a:r>
+              <a:rPr lang="en-US" sz="1300" dirty="0">
                 <a:solidFill>
                   <a:srgbClr val="C9BEAC"/>
                 </a:solidFill>
@@ -4051,166 +3486,45 @@
                 <a:ea typeface="Calibri" pitchFamily="34" charset="-122"/>
                 <a:cs typeface="Calibri" pitchFamily="34" charset="-120"/>
               </a:rPr>
-              <a:t>Exclusividade e refinamento, sobretudo com bom espaçamento entre letras.</a:t>
-            </a:r>
-            <a:endParaRPr lang="en-US" sz="1200" dirty="0"/>
-          </a:p>
-        </p:txBody>
-      </p:sp>
-      <p:sp>
-        <p:nvSpPr>
-          <p:cNvPr id="17" name="Shape 15"/>
-          <p:cNvSpPr/>
-          <p:nvPr/>
-        </p:nvSpPr>
-        <p:spPr>
-          <a:xfrm>
-            <a:off x="6035040" y="4343400"/>
-            <a:ext cx="5074920" cy="1874520"/>
-          </a:xfrm>
-          <a:prstGeom prst="rect">
-            <a:avLst/>
-          </a:prstGeom>
-          <a:solidFill>
-            <a:srgbClr val="2B1D14"/>
-          </a:solidFill>
-          <a:ln/>
-        </p:spPr>
-      </p:sp>
-      <p:sp>
-        <p:nvSpPr>
-          <p:cNvPr id="18" name="Shape 16"/>
-          <p:cNvSpPr/>
-          <p:nvPr/>
-        </p:nvSpPr>
-        <p:spPr>
-          <a:xfrm>
-            <a:off x="6291072" y="4599432"/>
-            <a:ext cx="137160" cy="137160"/>
-          </a:xfrm>
-          <a:prstGeom prst="ellipse">
-            <a:avLst/>
-          </a:prstGeom>
-          <a:solidFill>
-            <a:srgbClr val="C6A15B"/>
-          </a:solidFill>
-          <a:ln/>
-        </p:spPr>
-      </p:sp>
-      <p:sp>
-        <p:nvSpPr>
-          <p:cNvPr id="19" name="Text 17"/>
-          <p:cNvSpPr txBox="1"/>
-          <p:nvPr/>
-        </p:nvSpPr>
-        <p:spPr>
-          <a:xfrm>
-            <a:off x="6537960" y="4507992"/>
-            <a:ext cx="4297680" cy="411480"/>
-          </a:xfrm>
-          <a:prstGeom prst="rect">
-            <a:avLst/>
-          </a:prstGeom>
-          <a:noFill/>
-          <a:ln/>
-        </p:spPr>
-        <p:txBody>
-          <a:bodyPr wrap="square" lIns="0" tIns="0" rIns="0" bIns="0" rtlCol="0" anchor="ctr"/>
-          <a:lstStyle/>
-          <a:p>
-            <a:pPr indent="0" marL="0">
-              <a:buNone/>
-            </a:pPr>
-            <a:r>
-              <a:rPr lang="en-US" sz="1550" b="1" dirty="0">
-                <a:solidFill>
-                  <a:srgbClr val="EFE6D8"/>
-                </a:solidFill>
-                <a:latin typeface="Cambria" pitchFamily="34" charset="0"/>
-                <a:ea typeface="Cambria" pitchFamily="34" charset="-122"/>
-                <a:cs typeface="Cambria" pitchFamily="34" charset="-120"/>
-              </a:rPr>
-              <a:t>Serifada com tracking alto</a:t>
-            </a:r>
-            <a:endParaRPr lang="en-US" sz="1550" dirty="0"/>
-          </a:p>
-        </p:txBody>
-      </p:sp>
-      <p:sp>
-        <p:nvSpPr>
-          <p:cNvPr id="20" name="Text 18"/>
-          <p:cNvSpPr txBox="1"/>
-          <p:nvPr/>
-        </p:nvSpPr>
-        <p:spPr>
-          <a:xfrm>
-            <a:off x="6537960" y="4965192"/>
-            <a:ext cx="4297680" cy="1051560"/>
-          </a:xfrm>
-          <a:prstGeom prst="rect">
-            <a:avLst/>
-          </a:prstGeom>
-          <a:noFill/>
-          <a:ln/>
-        </p:spPr>
-        <p:txBody>
-          <a:bodyPr wrap="square" lIns="0" tIns="0" rIns="0" bIns="0" rtlCol="0" anchor="ctr"/>
-          <a:lstStyle/>
-          <a:p>
-            <a:pPr indent="0" marL="0">
-              <a:lnSpc>
-                <a:spcPct val="125000"/>
-              </a:lnSpc>
-              <a:buNone/>
-            </a:pPr>
-            <a:r>
-              <a:rPr lang="en-US" sz="1200" dirty="0">
-                <a:solidFill>
-                  <a:srgbClr val="C9BEAC"/>
+              <a:t>Minimalismo premium</a:t>
+            </a:r>
+            <a:endParaRPr lang="en-US" sz="1300" dirty="0"/>
+          </a:p>
+        </p:txBody>
+      </p:sp>
+      <p:sp>
+        <p:nvSpPr>
+          <p:cNvPr id="16" name="Text 14"/>
+          <p:cNvSpPr txBox="1"/>
+          <p:nvPr/>
+        </p:nvSpPr>
+        <p:spPr>
+          <a:xfrm>
+            <a:off x="11274552" y="6400800"/>
+            <a:ext cx="548640" cy="274320"/>
+          </a:xfrm>
+          <a:prstGeom prst="rect">
+            <a:avLst/>
+          </a:prstGeom>
+          <a:noFill/>
+          <a:ln/>
+        </p:spPr>
+        <p:txBody>
+          <a:bodyPr wrap="square" lIns="0" tIns="0" rIns="0" bIns="0" rtlCol="0" anchor="ctr"/>
+          <a:lstStyle/>
+          <a:p>
+            <a:pPr algn="r" indent="0" marL="0">
+              <a:buNone/>
+            </a:pPr>
+            <a:r>
+              <a:rPr lang="en-US" sz="1000" dirty="0">
+                <a:solidFill>
+                  <a:srgbClr val="9C7C3F"/>
                 </a:solidFill>
                 <a:latin typeface="Calibri" pitchFamily="34" charset="0"/>
                 <a:ea typeface="Calibri" pitchFamily="34" charset="-122"/>
                 <a:cs typeface="Calibri" pitchFamily="34" charset="-120"/>
               </a:rPr>
-              <a:t>Aparência premium e minimalista — a marca parece menos comercial e mais exclusiva.</a:t>
-            </a:r>
-            <a:endParaRPr lang="en-US" sz="1200" dirty="0"/>
-          </a:p>
-        </p:txBody>
-      </p:sp>
-      <p:sp>
-        <p:nvSpPr>
-          <p:cNvPr id="21" name="Text 19"/>
-          <p:cNvSpPr txBox="1"/>
-          <p:nvPr/>
-        </p:nvSpPr>
-        <p:spPr>
-          <a:xfrm>
-            <a:off x="11274552" y="6355080"/>
-            <a:ext cx="548640" cy="320040"/>
-          </a:xfrm>
-          <a:prstGeom prst="rect">
-            <a:avLst/>
-          </a:prstGeom>
-          <a:noFill/>
-          <a:ln/>
-        </p:spPr>
-        <p:txBody>
-          <a:bodyPr wrap="square" lIns="0" tIns="0" rIns="0" bIns="0" rtlCol="0" anchor="ctr"/>
-          <a:lstStyle/>
-          <a:p>
-            <a:pPr algn="r" indent="0" marL="0">
-              <a:buNone/>
-            </a:pPr>
-            <a:r>
-              <a:rPr lang="en-US" sz="1000" dirty="0">
-                <a:solidFill>
-                  <a:srgbClr val="9C7C3F"/>
-                </a:solidFill>
-                <a:latin typeface="Calibri" pitchFamily="34" charset="0"/>
-                <a:ea typeface="Calibri" pitchFamily="34" charset="-122"/>
-                <a:cs typeface="Calibri" pitchFamily="34" charset="-120"/>
-              </a:rPr>
               <a:t>04</a:t>
             </a:r>
             <a:endParaRPr lang="en-US" sz="1000" dirty="0"/>
@@ -4219,14 +3533,14 @@
       </p:sp>
       <p:sp>
         <p:nvSpPr>
-          <p:cNvPr id="22" name="Text 20"/>
-          <p:cNvSpPr txBox="1"/>
-          <p:nvPr/>
-        </p:nvSpPr>
-        <p:spPr>
-          <a:xfrm>
-            <a:off x="640080" y="6355080"/>
-            <a:ext cx="2743200" cy="320040"/>
+          <p:cNvPr id="17" name="Text 15"/>
+          <p:cNvSpPr txBox="1"/>
+          <p:nvPr/>
+        </p:nvSpPr>
+        <p:spPr>
+          <a:xfrm>
+            <a:off x="640080" y="6400800"/>
+            <a:ext cx="2743200" cy="274320"/>
           </a:xfrm>
           <a:prstGeom prst="rect">
             <a:avLst/>
@@ -4360,7 +3674,7 @@
                 <a:ea typeface="Cambria" pitchFamily="34" charset="-122"/>
                 <a:cs typeface="Cambria" pitchFamily="34" charset="-120"/>
               </a:rPr>
-              <a:t>Formato e variações estudadas</a:t>
+              <a:t>Formato e variações</a:t>
             </a:r>
             <a:endParaRPr lang="en-US" sz="3400" dirty="0"/>
           </a:p>
@@ -4381,8 +3695,8 @@
         </p:blipFill>
         <p:spPr>
           <a:xfrm>
-            <a:off x="640080" y="1554480"/>
-            <a:ext cx="5577840" cy="3218688"/>
+            <a:off x="640080" y="1463040"/>
+            <a:ext cx="5577840" cy="4480560"/>
           </a:xfrm>
           <a:prstGeom prst="rect">
             <a:avLst/>
@@ -4397,7 +3711,7 @@
         </p:nvSpPr>
         <p:spPr>
           <a:xfrm>
-            <a:off x="640080" y="4846320"/>
+            <a:off x="640080" y="6053328"/>
             <a:ext cx="5577840" cy="320040"/>
           </a:xfrm>
           <a:prstGeom prst="rect">
@@ -4414,7 +3728,7 @@
               <a:buNone/>
             </a:pPr>
             <a:r>
-              <a:rPr lang="en-US" sz="1400" b="1" dirty="0">
+              <a:rPr lang="en-US" sz="1350" b="1" dirty="0">
                 <a:solidFill>
                   <a:srgbClr val="C6A15B"/>
                 </a:solidFill>
@@ -4422,57 +3736,15 @@
                 <a:ea typeface="Cambria" pitchFamily="34" charset="-122"/>
                 <a:cs typeface="Cambria" pitchFamily="34" charset="-120"/>
               </a:rPr>
-              <a:t>Conceito principal — Caixa-livro</a:t>
-            </a:r>
-            <a:endParaRPr lang="en-US" sz="1400" dirty="0"/>
-          </a:p>
-        </p:txBody>
-      </p:sp>
-      <p:sp>
-        <p:nvSpPr>
-          <p:cNvPr id="6" name="Text 3"/>
-          <p:cNvSpPr txBox="1"/>
-          <p:nvPr/>
-        </p:nvSpPr>
-        <p:spPr>
-          <a:xfrm>
-            <a:off x="640080" y="5193792"/>
-            <a:ext cx="5577840" cy="777240"/>
-          </a:xfrm>
-          <a:prstGeom prst="rect">
-            <a:avLst/>
-          </a:prstGeom>
-          <a:noFill/>
-          <a:ln/>
-        </p:spPr>
-        <p:txBody>
-          <a:bodyPr wrap="square" lIns="0" tIns="0" rIns="0" bIns="0" rtlCol="0" anchor="ctr"/>
-          <a:lstStyle/>
-          <a:p>
-            <a:pPr indent="0" marL="0">
-              <a:lnSpc>
-                <a:spcPct val="120000"/>
-              </a:lnSpc>
-              <a:buNone/>
-            </a:pPr>
-            <a:r>
-              <a:rPr lang="en-US" sz="1150" dirty="0">
-                <a:solidFill>
-                  <a:srgbClr val="C9BEAC"/>
-                </a:solidFill>
-                <a:latin typeface="Calibri" pitchFamily="34" charset="0"/>
-                <a:ea typeface="Calibri" pitchFamily="34" charset="-122"/>
-                <a:cs typeface="Calibri" pitchFamily="34" charset="-120"/>
-              </a:rPr>
-              <a:t>Abre como um estojo; os chocolates repousam sobre bandeja de papel kraft, tornando a apresentação mais cuidadosa e ritualística.</a:t>
-            </a:r>
-            <a:endParaRPr lang="en-US" sz="1150" dirty="0"/>
+              <a:t>Caixa-livro — conceito principal</a:t>
+            </a:r>
+            <a:endParaRPr lang="en-US" sz="1350" dirty="0"/>
           </a:p>
         </p:txBody>
       </p:sp>
       <p:pic>
         <p:nvPicPr>
-          <p:cNvPr id="7" name="Image 1" descr="/root/.claude/uploads/de37aeae-c07f-5401-92c3-714ed4fdd346/86f5b12e-image.jpg">    </p:cNvPr>
+          <p:cNvPr id="6" name="Image 1" descr="/root/.claude/uploads/de37aeae-c07f-5401-92c3-714ed4fdd346/86f5b12e-image.jpg">    </p:cNvPr>
           <p:cNvPicPr>
             <a:picLocks noChangeAspect="1"/>
           </p:cNvPicPr>
@@ -4485,8 +3757,8 @@
         </p:blipFill>
         <p:spPr>
           <a:xfrm>
-            <a:off x="6537960" y="1554480"/>
-            <a:ext cx="5029200" cy="1508760"/>
+            <a:off x="6537960" y="1463040"/>
+            <a:ext cx="5029200" cy="2148840"/>
           </a:xfrm>
           <a:prstGeom prst="rect">
             <a:avLst/>
@@ -4495,30 +3767,30 @@
       </p:pic>
       <p:sp>
         <p:nvSpPr>
-          <p:cNvPr id="8" name="Text 4"/>
-          <p:cNvSpPr txBox="1"/>
-          <p:nvPr/>
-        </p:nvSpPr>
-        <p:spPr>
-          <a:xfrm>
-            <a:off x="6537960" y="3108960"/>
-            <a:ext cx="5029200" cy="292608"/>
-          </a:xfrm>
-          <a:prstGeom prst="rect">
-            <a:avLst/>
-          </a:prstGeom>
-          <a:noFill/>
-          <a:ln/>
-        </p:spPr>
-        <p:txBody>
-          <a:bodyPr wrap="square" lIns="0" tIns="0" rIns="0" bIns="0" rtlCol="0" anchor="ctr"/>
-          <a:lstStyle/>
-          <a:p>
-            <a:pPr indent="0" marL="0">
-              <a:buNone/>
-            </a:pPr>
-            <a:r>
-              <a:rPr lang="en-US" sz="1300" b="1" dirty="0">
+          <p:cNvPr id="7" name="Text 3"/>
+          <p:cNvSpPr txBox="1"/>
+          <p:nvPr/>
+        </p:nvSpPr>
+        <p:spPr>
+          <a:xfrm>
+            <a:off x="6537960" y="3703320"/>
+            <a:ext cx="5029200" cy="320040"/>
+          </a:xfrm>
+          <a:prstGeom prst="rect">
+            <a:avLst/>
+          </a:prstGeom>
+          <a:noFill/>
+          <a:ln/>
+        </p:spPr>
+        <p:txBody>
+          <a:bodyPr wrap="square" lIns="0" tIns="0" rIns="0" bIns="0" rtlCol="0" anchor="ctr"/>
+          <a:lstStyle/>
+          <a:p>
+            <a:pPr indent="0" marL="0">
+              <a:buNone/>
+            </a:pPr>
+            <a:r>
+              <a:rPr lang="en-US" sz="1350" b="1" dirty="0">
                 <a:solidFill>
                   <a:srgbClr val="C6A15B"/>
                 </a:solidFill>
@@ -4526,57 +3798,15 @@
                 <a:ea typeface="Cambria" pitchFamily="34" charset="-122"/>
                 <a:cs typeface="Cambria" pitchFamily="34" charset="-120"/>
               </a:rPr>
-              <a:t>Opção 1 — Caixa Gaveta</a:t>
-            </a:r>
-            <a:endParaRPr lang="en-US" sz="1300" dirty="0"/>
-          </a:p>
-        </p:txBody>
-      </p:sp>
-      <p:sp>
-        <p:nvSpPr>
-          <p:cNvPr id="9" name="Text 5"/>
-          <p:cNvSpPr txBox="1"/>
-          <p:nvPr/>
-        </p:nvSpPr>
-        <p:spPr>
-          <a:xfrm>
-            <a:off x="6537960" y="3401568"/>
-            <a:ext cx="5029200" cy="457200"/>
-          </a:xfrm>
-          <a:prstGeom prst="rect">
-            <a:avLst/>
-          </a:prstGeom>
-          <a:noFill/>
-          <a:ln/>
-        </p:spPr>
-        <p:txBody>
-          <a:bodyPr wrap="square" lIns="0" tIns="0" rIns="0" bIns="0" rtlCol="0" anchor="ctr"/>
-          <a:lstStyle/>
-          <a:p>
-            <a:pPr indent="0" marL="0">
-              <a:lnSpc>
-                <a:spcPct val="115000"/>
-              </a:lnSpc>
-              <a:buNone/>
-            </a:pPr>
-            <a:r>
-              <a:rPr lang="en-US" sz="1050" dirty="0">
-                <a:solidFill>
-                  <a:srgbClr val="C9BEAC"/>
-                </a:solidFill>
-                <a:latin typeface="Calibri" pitchFamily="34" charset="0"/>
-                <a:ea typeface="Calibri" pitchFamily="34" charset="-122"/>
-                <a:cs typeface="Calibri" pitchFamily="34" charset="-120"/>
-              </a:rPr>
-              <a:t>A experiência de abrir a embalagem faz parte do produto, despertando curiosidade e aumentando a percepção de valor.</a:t>
-            </a:r>
-            <a:endParaRPr lang="en-US" sz="1050" dirty="0"/>
+              <a:t>Caixa gaveta — ritual de abertura</a:t>
+            </a:r>
+            <a:endParaRPr lang="en-US" sz="1350" dirty="0"/>
           </a:p>
         </p:txBody>
       </p:sp>
       <p:pic>
         <p:nvPicPr>
-          <p:cNvPr id="10" name="Image 2" descr="/root/.claude/uploads/de37aeae-c07f-5401-92c3-714ed4fdd346/b1c98ad1-image.jpg">    </p:cNvPr>
+          <p:cNvPr id="8" name="Image 2" descr="/root/.claude/uploads/de37aeae-c07f-5401-92c3-714ed4fdd346/b1c98ad1-image.jpg">    </p:cNvPr>
           <p:cNvPicPr>
             <a:picLocks noChangeAspect="1"/>
           </p:cNvPicPr>
@@ -4589,8 +3819,8 @@
         </p:blipFill>
         <p:spPr>
           <a:xfrm>
-            <a:off x="6537960" y="3995928"/>
-            <a:ext cx="5029200" cy="1508760"/>
+            <a:off x="6537960" y="4206240"/>
+            <a:ext cx="5029200" cy="1828800"/>
           </a:xfrm>
           <a:prstGeom prst="rect">
             <a:avLst/>
@@ -4599,30 +3829,30 @@
       </p:pic>
       <p:sp>
         <p:nvSpPr>
-          <p:cNvPr id="11" name="Text 6"/>
-          <p:cNvSpPr txBox="1"/>
-          <p:nvPr/>
-        </p:nvSpPr>
-        <p:spPr>
-          <a:xfrm>
-            <a:off x="6537960" y="5550408"/>
-            <a:ext cx="5029200" cy="292608"/>
-          </a:xfrm>
-          <a:prstGeom prst="rect">
-            <a:avLst/>
-          </a:prstGeom>
-          <a:noFill/>
-          <a:ln/>
-        </p:spPr>
-        <p:txBody>
-          <a:bodyPr wrap="square" lIns="0" tIns="0" rIns="0" bIns="0" rtlCol="0" anchor="ctr"/>
-          <a:lstStyle/>
-          <a:p>
-            <a:pPr indent="0" marL="0">
-              <a:buNone/>
-            </a:pPr>
-            <a:r>
-              <a:rPr lang="en-US" sz="1300" b="1" dirty="0">
+          <p:cNvPr id="9" name="Text 4"/>
+          <p:cNvSpPr txBox="1"/>
+          <p:nvPr/>
+        </p:nvSpPr>
+        <p:spPr>
+          <a:xfrm>
+            <a:off x="6537960" y="6126480"/>
+            <a:ext cx="5029200" cy="320040"/>
+          </a:xfrm>
+          <a:prstGeom prst="rect">
+            <a:avLst/>
+          </a:prstGeom>
+          <a:noFill/>
+          <a:ln/>
+        </p:spPr>
+        <p:txBody>
+          <a:bodyPr wrap="square" lIns="0" tIns="0" rIns="0" bIns="0" rtlCol="0" anchor="ctr"/>
+          <a:lstStyle/>
+          <a:p>
+            <a:pPr indent="0" marL="0">
+              <a:buNone/>
+            </a:pPr>
+            <a:r>
+              <a:rPr lang="en-US" sz="1350" b="1" dirty="0">
                 <a:solidFill>
                   <a:srgbClr val="C6A15B"/>
                 </a:solidFill>
@@ -4630,87 +3860,45 @@
                 <a:ea typeface="Cambria" pitchFamily="34" charset="-122"/>
                 <a:cs typeface="Cambria" pitchFamily="34" charset="-120"/>
               </a:rPr>
-              <a:t>Opção 3 — Caixa com Janela</a:t>
-            </a:r>
-            <a:endParaRPr lang="en-US" sz="1300" dirty="0"/>
-          </a:p>
-        </p:txBody>
-      </p:sp>
-      <p:sp>
-        <p:nvSpPr>
-          <p:cNvPr id="12" name="Text 7"/>
-          <p:cNvSpPr txBox="1"/>
-          <p:nvPr/>
-        </p:nvSpPr>
-        <p:spPr>
-          <a:xfrm>
-            <a:off x="6537960" y="5843016"/>
-            <a:ext cx="5029200" cy="457200"/>
-          </a:xfrm>
-          <a:prstGeom prst="rect">
-            <a:avLst/>
-          </a:prstGeom>
-          <a:noFill/>
-          <a:ln/>
-        </p:spPr>
-        <p:txBody>
-          <a:bodyPr wrap="square" lIns="0" tIns="0" rIns="0" bIns="0" rtlCol="0" anchor="ctr"/>
-          <a:lstStyle/>
-          <a:p>
-            <a:pPr indent="0" marL="0">
-              <a:lnSpc>
-                <a:spcPct val="115000"/>
-              </a:lnSpc>
-              <a:buNone/>
-            </a:pPr>
-            <a:r>
-              <a:rPr lang="en-US" sz="1050" dirty="0">
-                <a:solidFill>
-                  <a:srgbClr val="C9BEAC"/>
+              <a:t>Caixa com janela — revela e desperta curiosidade</a:t>
+            </a:r>
+            <a:endParaRPr lang="en-US" sz="1350" dirty="0"/>
+          </a:p>
+        </p:txBody>
+      </p:sp>
+      <p:sp>
+        <p:nvSpPr>
+          <p:cNvPr id="10" name="Text 5"/>
+          <p:cNvSpPr txBox="1"/>
+          <p:nvPr/>
+        </p:nvSpPr>
+        <p:spPr>
+          <a:xfrm>
+            <a:off x="11274552" y="6400800"/>
+            <a:ext cx="548640" cy="274320"/>
+          </a:xfrm>
+          <a:prstGeom prst="rect">
+            <a:avLst/>
+          </a:prstGeom>
+          <a:noFill/>
+          <a:ln/>
+        </p:spPr>
+        <p:txBody>
+          <a:bodyPr wrap="square" lIns="0" tIns="0" rIns="0" bIns="0" rtlCol="0" anchor="ctr"/>
+          <a:lstStyle/>
+          <a:p>
+            <a:pPr algn="r" indent="0" marL="0">
+              <a:buNone/>
+            </a:pPr>
+            <a:r>
+              <a:rPr lang="en-US" sz="1000" dirty="0">
+                <a:solidFill>
+                  <a:srgbClr val="9C7C3F"/>
                 </a:solidFill>
                 <a:latin typeface="Calibri" pitchFamily="34" charset="0"/>
                 <a:ea typeface="Calibri" pitchFamily="34" charset="-122"/>
                 <a:cs typeface="Calibri" pitchFamily="34" charset="-120"/>
               </a:rPr>
-              <a:t>Uma janela discreta revela parte do chocolate, despertando curiosidade e o desejo de experimentar.</a:t>
-            </a:r>
-            <a:endParaRPr lang="en-US" sz="1050" dirty="0"/>
-          </a:p>
-        </p:txBody>
-      </p:sp>
-      <p:sp>
-        <p:nvSpPr>
-          <p:cNvPr id="13" name="Text 8"/>
-          <p:cNvSpPr txBox="1"/>
-          <p:nvPr/>
-        </p:nvSpPr>
-        <p:spPr>
-          <a:xfrm>
-            <a:off x="11274552" y="6355080"/>
-            <a:ext cx="548640" cy="320040"/>
-          </a:xfrm>
-          <a:prstGeom prst="rect">
-            <a:avLst/>
-          </a:prstGeom>
-          <a:noFill/>
-          <a:ln/>
-        </p:spPr>
-        <p:txBody>
-          <a:bodyPr wrap="square" lIns="0" tIns="0" rIns="0" bIns="0" rtlCol="0" anchor="ctr"/>
-          <a:lstStyle/>
-          <a:p>
-            <a:pPr algn="r" indent="0" marL="0">
-              <a:buNone/>
-            </a:pPr>
-            <a:r>
-              <a:rPr lang="en-US" sz="1000" dirty="0">
-                <a:solidFill>
-                  <a:srgbClr val="9C7C3F"/>
-                </a:solidFill>
-                <a:latin typeface="Calibri" pitchFamily="34" charset="0"/>
-                <a:ea typeface="Calibri" pitchFamily="34" charset="-122"/>
-                <a:cs typeface="Calibri" pitchFamily="34" charset="-120"/>
-              </a:rPr>
               <a:t>05</a:t>
             </a:r>
             <a:endParaRPr lang="en-US" sz="1000" dirty="0"/>
@@ -4719,14 +3907,14 @@
       </p:sp>
       <p:sp>
         <p:nvSpPr>
-          <p:cNvPr id="14" name="Text 9"/>
-          <p:cNvSpPr txBox="1"/>
-          <p:nvPr/>
-        </p:nvSpPr>
-        <p:spPr>
-          <a:xfrm>
-            <a:off x="640080" y="6355080"/>
-            <a:ext cx="2743200" cy="320040"/>
+          <p:cNvPr id="11" name="Text 6"/>
+          <p:cNvSpPr txBox="1"/>
+          <p:nvPr/>
+        </p:nvSpPr>
+        <p:spPr>
+          <a:xfrm>
+            <a:off x="640080" y="6400800"/>
+            <a:ext cx="2743200" cy="274320"/>
           </a:xfrm>
           <a:prstGeom prst="rect">
             <a:avLst/>
@@ -4860,7 +4048,7 @@
                 <a:ea typeface="Cambria" pitchFamily="34" charset="-122"/>
                 <a:cs typeface="Cambria" pitchFamily="34" charset="-120"/>
               </a:rPr>
-              <a:t>Sensações e associações desejadas</a:t>
+              <a:t>Sensações e associações</a:t>
             </a:r>
             <a:endParaRPr lang="en-US" sz="3400" dirty="0"/>
           </a:p>
@@ -4868,708 +4056,509 @@
       </p:sp>
       <p:sp>
         <p:nvSpPr>
-          <p:cNvPr id="4" name="Text 2"/>
-          <p:cNvSpPr txBox="1"/>
-          <p:nvPr/>
-        </p:nvSpPr>
-        <p:spPr>
-          <a:xfrm>
-            <a:off x="640080" y="1508760"/>
-            <a:ext cx="8686800" cy="457200"/>
-          </a:xfrm>
-          <a:prstGeom prst="rect">
-            <a:avLst/>
-          </a:prstGeom>
-          <a:noFill/>
-          <a:ln/>
-        </p:spPr>
-        <p:txBody>
-          <a:bodyPr wrap="square" lIns="0" tIns="0" rIns="0" bIns="0" rtlCol="0" anchor="ctr"/>
-          <a:lstStyle/>
-          <a:p>
-            <a:pPr indent="0" marL="0">
-              <a:buNone/>
-            </a:pPr>
-            <a:r>
-              <a:rPr lang="en-US" sz="1350" i="1" dirty="0">
-                <a:solidFill>
-                  <a:srgbClr val="C9BEAC"/>
+          <p:cNvPr id="4" name="Shape 2"/>
+          <p:cNvSpPr/>
+          <p:nvPr/>
+        </p:nvSpPr>
+        <p:spPr>
+          <a:xfrm>
+            <a:off x="640080" y="2103120"/>
+            <a:ext cx="2542032" cy="1554480"/>
+          </a:xfrm>
+          <a:prstGeom prst="rect">
+            <a:avLst/>
+          </a:prstGeom>
+          <a:solidFill>
+            <a:srgbClr val="17110D"/>
+          </a:solidFill>
+          <a:ln/>
+        </p:spPr>
+      </p:sp>
+      <p:sp>
+        <p:nvSpPr>
+          <p:cNvPr id="5" name="Text 3"/>
+          <p:cNvSpPr txBox="1"/>
+          <p:nvPr/>
+        </p:nvSpPr>
+        <p:spPr>
+          <a:xfrm>
+            <a:off x="804672" y="2103120"/>
+            <a:ext cx="2212848" cy="1554480"/>
+          </a:xfrm>
+          <a:prstGeom prst="rect">
+            <a:avLst/>
+          </a:prstGeom>
+          <a:noFill/>
+          <a:ln/>
+        </p:spPr>
+        <p:txBody>
+          <a:bodyPr wrap="square" lIns="0" tIns="0" rIns="0" bIns="0" rtlCol="0" anchor="ctr"/>
+          <a:lstStyle/>
+          <a:p>
+            <a:pPr algn="ctr" indent="0" marL="0">
+              <a:buNone/>
+            </a:pPr>
+            <a:r>
+              <a:rPr lang="en-US" sz="1500" b="1" dirty="0">
+                <a:solidFill>
+                  <a:srgbClr val="EFE6D8"/>
+                </a:solidFill>
+                <a:latin typeface="Cambria" pitchFamily="34" charset="0"/>
+                <a:ea typeface="Cambria" pitchFamily="34" charset="-122"/>
+                <a:cs typeface="Cambria" pitchFamily="34" charset="-120"/>
+              </a:rPr>
+              <a:t>Exclusividade</a:t>
+            </a:r>
+            <a:endParaRPr lang="en-US" sz="1500" dirty="0"/>
+          </a:p>
+        </p:txBody>
+      </p:sp>
+      <p:sp>
+        <p:nvSpPr>
+          <p:cNvPr id="6" name="Shape 4"/>
+          <p:cNvSpPr/>
+          <p:nvPr/>
+        </p:nvSpPr>
+        <p:spPr>
+          <a:xfrm>
+            <a:off x="3401568" y="2103120"/>
+            <a:ext cx="2542032" cy="1554480"/>
+          </a:xfrm>
+          <a:prstGeom prst="rect">
+            <a:avLst/>
+          </a:prstGeom>
+          <a:solidFill>
+            <a:srgbClr val="17110D"/>
+          </a:solidFill>
+          <a:ln/>
+        </p:spPr>
+      </p:sp>
+      <p:sp>
+        <p:nvSpPr>
+          <p:cNvPr id="7" name="Text 5"/>
+          <p:cNvSpPr txBox="1"/>
+          <p:nvPr/>
+        </p:nvSpPr>
+        <p:spPr>
+          <a:xfrm>
+            <a:off x="3566160" y="2103120"/>
+            <a:ext cx="2212848" cy="1554480"/>
+          </a:xfrm>
+          <a:prstGeom prst="rect">
+            <a:avLst/>
+          </a:prstGeom>
+          <a:noFill/>
+          <a:ln/>
+        </p:spPr>
+        <p:txBody>
+          <a:bodyPr wrap="square" lIns="0" tIns="0" rIns="0" bIns="0" rtlCol="0" anchor="ctr"/>
+          <a:lstStyle/>
+          <a:p>
+            <a:pPr algn="ctr" indent="0" marL="0">
+              <a:buNone/>
+            </a:pPr>
+            <a:r>
+              <a:rPr lang="en-US" sz="1500" b="1" dirty="0">
+                <a:solidFill>
+                  <a:srgbClr val="EFE6D8"/>
+                </a:solidFill>
+                <a:latin typeface="Cambria" pitchFamily="34" charset="0"/>
+                <a:ea typeface="Cambria" pitchFamily="34" charset="-122"/>
+                <a:cs typeface="Cambria" pitchFamily="34" charset="-120"/>
+              </a:rPr>
+              <a:t>Tradição</a:t>
+            </a:r>
+            <a:endParaRPr lang="en-US" sz="1500" dirty="0"/>
+          </a:p>
+        </p:txBody>
+      </p:sp>
+      <p:sp>
+        <p:nvSpPr>
+          <p:cNvPr id="8" name="Shape 6"/>
+          <p:cNvSpPr/>
+          <p:nvPr/>
+        </p:nvSpPr>
+        <p:spPr>
+          <a:xfrm>
+            <a:off x="6163056" y="2103120"/>
+            <a:ext cx="2542032" cy="1554480"/>
+          </a:xfrm>
+          <a:prstGeom prst="rect">
+            <a:avLst/>
+          </a:prstGeom>
+          <a:solidFill>
+            <a:srgbClr val="17110D"/>
+          </a:solidFill>
+          <a:ln/>
+        </p:spPr>
+      </p:sp>
+      <p:sp>
+        <p:nvSpPr>
+          <p:cNvPr id="9" name="Text 7"/>
+          <p:cNvSpPr txBox="1"/>
+          <p:nvPr/>
+        </p:nvSpPr>
+        <p:spPr>
+          <a:xfrm>
+            <a:off x="6327648" y="2103120"/>
+            <a:ext cx="2212848" cy="1554480"/>
+          </a:xfrm>
+          <a:prstGeom prst="rect">
+            <a:avLst/>
+          </a:prstGeom>
+          <a:noFill/>
+          <a:ln/>
+        </p:spPr>
+        <p:txBody>
+          <a:bodyPr wrap="square" lIns="0" tIns="0" rIns="0" bIns="0" rtlCol="0" anchor="ctr"/>
+          <a:lstStyle/>
+          <a:p>
+            <a:pPr algn="ctr" indent="0" marL="0">
+              <a:buNone/>
+            </a:pPr>
+            <a:r>
+              <a:rPr lang="en-US" sz="1500" b="1" dirty="0">
+                <a:solidFill>
+                  <a:srgbClr val="EFE6D8"/>
+                </a:solidFill>
+                <a:latin typeface="Cambria" pitchFamily="34" charset="0"/>
+                <a:ea typeface="Cambria" pitchFamily="34" charset="-122"/>
+                <a:cs typeface="Cambria" pitchFamily="34" charset="-120"/>
+              </a:rPr>
+              <a:t>Sofisticação</a:t>
+            </a:r>
+            <a:endParaRPr lang="en-US" sz="1500" dirty="0"/>
+          </a:p>
+        </p:txBody>
+      </p:sp>
+      <p:sp>
+        <p:nvSpPr>
+          <p:cNvPr id="10" name="Shape 8"/>
+          <p:cNvSpPr/>
+          <p:nvPr/>
+        </p:nvSpPr>
+        <p:spPr>
+          <a:xfrm>
+            <a:off x="8924544" y="2103120"/>
+            <a:ext cx="2542032" cy="1554480"/>
+          </a:xfrm>
+          <a:prstGeom prst="rect">
+            <a:avLst/>
+          </a:prstGeom>
+          <a:solidFill>
+            <a:srgbClr val="17110D"/>
+          </a:solidFill>
+          <a:ln/>
+        </p:spPr>
+      </p:sp>
+      <p:sp>
+        <p:nvSpPr>
+          <p:cNvPr id="11" name="Text 9"/>
+          <p:cNvSpPr txBox="1"/>
+          <p:nvPr/>
+        </p:nvSpPr>
+        <p:spPr>
+          <a:xfrm>
+            <a:off x="9089136" y="2103120"/>
+            <a:ext cx="2212848" cy="1554480"/>
+          </a:xfrm>
+          <a:prstGeom prst="rect">
+            <a:avLst/>
+          </a:prstGeom>
+          <a:noFill/>
+          <a:ln/>
+        </p:spPr>
+        <p:txBody>
+          <a:bodyPr wrap="square" lIns="0" tIns="0" rIns="0" bIns="0" rtlCol="0" anchor="ctr"/>
+          <a:lstStyle/>
+          <a:p>
+            <a:pPr algn="ctr" indent="0" marL="0">
+              <a:buNone/>
+            </a:pPr>
+            <a:r>
+              <a:rPr lang="en-US" sz="1500" b="1" dirty="0">
+                <a:solidFill>
+                  <a:srgbClr val="EFE6D8"/>
+                </a:solidFill>
+                <a:latin typeface="Cambria" pitchFamily="34" charset="0"/>
+                <a:ea typeface="Cambria" pitchFamily="34" charset="-122"/>
+                <a:cs typeface="Cambria" pitchFamily="34" charset="-120"/>
+              </a:rPr>
+              <a:t>Ritual de abertura</a:t>
+            </a:r>
+            <a:endParaRPr lang="en-US" sz="1500" dirty="0"/>
+          </a:p>
+        </p:txBody>
+      </p:sp>
+      <p:sp>
+        <p:nvSpPr>
+          <p:cNvPr id="12" name="Shape 10"/>
+          <p:cNvSpPr/>
+          <p:nvPr/>
+        </p:nvSpPr>
+        <p:spPr>
+          <a:xfrm>
+            <a:off x="640080" y="3913632"/>
+            <a:ext cx="2542032" cy="1554480"/>
+          </a:xfrm>
+          <a:prstGeom prst="rect">
+            <a:avLst/>
+          </a:prstGeom>
+          <a:solidFill>
+            <a:srgbClr val="17110D"/>
+          </a:solidFill>
+          <a:ln/>
+        </p:spPr>
+      </p:sp>
+      <p:sp>
+        <p:nvSpPr>
+          <p:cNvPr id="13" name="Text 11"/>
+          <p:cNvSpPr txBox="1"/>
+          <p:nvPr/>
+        </p:nvSpPr>
+        <p:spPr>
+          <a:xfrm>
+            <a:off x="804672" y="3913632"/>
+            <a:ext cx="2212848" cy="1554480"/>
+          </a:xfrm>
+          <a:prstGeom prst="rect">
+            <a:avLst/>
+          </a:prstGeom>
+          <a:noFill/>
+          <a:ln/>
+        </p:spPr>
+        <p:txBody>
+          <a:bodyPr wrap="square" lIns="0" tIns="0" rIns="0" bIns="0" rtlCol="0" anchor="ctr"/>
+          <a:lstStyle/>
+          <a:p>
+            <a:pPr algn="ctr" indent="0" marL="0">
+              <a:buNone/>
+            </a:pPr>
+            <a:r>
+              <a:rPr lang="en-US" sz="1500" b="1" dirty="0">
+                <a:solidFill>
+                  <a:srgbClr val="EFE6D8"/>
+                </a:solidFill>
+                <a:latin typeface="Cambria" pitchFamily="34" charset="0"/>
+                <a:ea typeface="Cambria" pitchFamily="34" charset="-122"/>
+                <a:cs typeface="Cambria" pitchFamily="34" charset="-120"/>
+              </a:rPr>
+              <a:t>Artesanalidade</a:t>
+            </a:r>
+            <a:endParaRPr lang="en-US" sz="1500" dirty="0"/>
+          </a:p>
+        </p:txBody>
+      </p:sp>
+      <p:sp>
+        <p:nvSpPr>
+          <p:cNvPr id="14" name="Shape 12"/>
+          <p:cNvSpPr/>
+          <p:nvPr/>
+        </p:nvSpPr>
+        <p:spPr>
+          <a:xfrm>
+            <a:off x="3401568" y="3913632"/>
+            <a:ext cx="2542032" cy="1554480"/>
+          </a:xfrm>
+          <a:prstGeom prst="rect">
+            <a:avLst/>
+          </a:prstGeom>
+          <a:solidFill>
+            <a:srgbClr val="17110D"/>
+          </a:solidFill>
+          <a:ln/>
+        </p:spPr>
+      </p:sp>
+      <p:sp>
+        <p:nvSpPr>
+          <p:cNvPr id="15" name="Text 13"/>
+          <p:cNvSpPr txBox="1"/>
+          <p:nvPr/>
+        </p:nvSpPr>
+        <p:spPr>
+          <a:xfrm>
+            <a:off x="3566160" y="3913632"/>
+            <a:ext cx="2212848" cy="1554480"/>
+          </a:xfrm>
+          <a:prstGeom prst="rect">
+            <a:avLst/>
+          </a:prstGeom>
+          <a:noFill/>
+          <a:ln/>
+        </p:spPr>
+        <p:txBody>
+          <a:bodyPr wrap="square" lIns="0" tIns="0" rIns="0" bIns="0" rtlCol="0" anchor="ctr"/>
+          <a:lstStyle/>
+          <a:p>
+            <a:pPr algn="ctr" indent="0" marL="0">
+              <a:buNone/>
+            </a:pPr>
+            <a:r>
+              <a:rPr lang="en-US" sz="1500" b="1" dirty="0">
+                <a:solidFill>
+                  <a:srgbClr val="EFE6D8"/>
+                </a:solidFill>
+                <a:latin typeface="Cambria" pitchFamily="34" charset="0"/>
+                <a:ea typeface="Cambria" pitchFamily="34" charset="-122"/>
+                <a:cs typeface="Cambria" pitchFamily="34" charset="-120"/>
+              </a:rPr>
+              <a:t>Curiosidade</a:t>
+            </a:r>
+            <a:endParaRPr lang="en-US" sz="1500" dirty="0"/>
+          </a:p>
+        </p:txBody>
+      </p:sp>
+      <p:sp>
+        <p:nvSpPr>
+          <p:cNvPr id="16" name="Shape 14"/>
+          <p:cNvSpPr/>
+          <p:nvPr/>
+        </p:nvSpPr>
+        <p:spPr>
+          <a:xfrm>
+            <a:off x="6163056" y="3913632"/>
+            <a:ext cx="2542032" cy="1554480"/>
+          </a:xfrm>
+          <a:prstGeom prst="rect">
+            <a:avLst/>
+          </a:prstGeom>
+          <a:solidFill>
+            <a:srgbClr val="17110D"/>
+          </a:solidFill>
+          <a:ln/>
+        </p:spPr>
+      </p:sp>
+      <p:sp>
+        <p:nvSpPr>
+          <p:cNvPr id="17" name="Text 15"/>
+          <p:cNvSpPr txBox="1"/>
+          <p:nvPr/>
+        </p:nvSpPr>
+        <p:spPr>
+          <a:xfrm>
+            <a:off x="6327648" y="3913632"/>
+            <a:ext cx="2212848" cy="1554480"/>
+          </a:xfrm>
+          <a:prstGeom prst="rect">
+            <a:avLst/>
+          </a:prstGeom>
+          <a:noFill/>
+          <a:ln/>
+        </p:spPr>
+        <p:txBody>
+          <a:bodyPr wrap="square" lIns="0" tIns="0" rIns="0" bIns="0" rtlCol="0" anchor="ctr"/>
+          <a:lstStyle/>
+          <a:p>
+            <a:pPr algn="ctr" indent="0" marL="0">
+              <a:buNone/>
+            </a:pPr>
+            <a:r>
+              <a:rPr lang="en-US" sz="1500" b="1" dirty="0">
+                <a:solidFill>
+                  <a:srgbClr val="EFE6D8"/>
+                </a:solidFill>
+                <a:latin typeface="Cambria" pitchFamily="34" charset="0"/>
+                <a:ea typeface="Cambria" pitchFamily="34" charset="-122"/>
+                <a:cs typeface="Cambria" pitchFamily="34" charset="-120"/>
+              </a:rPr>
+              <a:t>Desejo de descoberta</a:t>
+            </a:r>
+            <a:endParaRPr lang="en-US" sz="1500" dirty="0"/>
+          </a:p>
+        </p:txBody>
+      </p:sp>
+      <p:sp>
+        <p:nvSpPr>
+          <p:cNvPr id="18" name="Shape 16"/>
+          <p:cNvSpPr/>
+          <p:nvPr/>
+        </p:nvSpPr>
+        <p:spPr>
+          <a:xfrm>
+            <a:off x="8924544" y="3913632"/>
+            <a:ext cx="2542032" cy="1554480"/>
+          </a:xfrm>
+          <a:prstGeom prst="rect">
+            <a:avLst/>
+          </a:prstGeom>
+          <a:solidFill>
+            <a:srgbClr val="17110D"/>
+          </a:solidFill>
+          <a:ln/>
+        </p:spPr>
+      </p:sp>
+      <p:sp>
+        <p:nvSpPr>
+          <p:cNvPr id="19" name="Text 17"/>
+          <p:cNvSpPr txBox="1"/>
+          <p:nvPr/>
+        </p:nvSpPr>
+        <p:spPr>
+          <a:xfrm>
+            <a:off x="9089136" y="3913632"/>
+            <a:ext cx="2212848" cy="1554480"/>
+          </a:xfrm>
+          <a:prstGeom prst="rect">
+            <a:avLst/>
+          </a:prstGeom>
+          <a:noFill/>
+          <a:ln/>
+        </p:spPr>
+        <p:txBody>
+          <a:bodyPr wrap="square" lIns="0" tIns="0" rIns="0" bIns="0" rtlCol="0" anchor="ctr"/>
+          <a:lstStyle/>
+          <a:p>
+            <a:pPr algn="ctr" indent="0" marL="0">
+              <a:buNone/>
+            </a:pPr>
+            <a:r>
+              <a:rPr lang="en-US" sz="1500" b="1" dirty="0">
+                <a:solidFill>
+                  <a:srgbClr val="EFE6D8"/>
+                </a:solidFill>
+                <a:latin typeface="Cambria" pitchFamily="34" charset="0"/>
+                <a:ea typeface="Cambria" pitchFamily="34" charset="-122"/>
+                <a:cs typeface="Cambria" pitchFamily="34" charset="-120"/>
+              </a:rPr>
+              <a:t>Confiança na qualidade</a:t>
+            </a:r>
+            <a:endParaRPr lang="en-US" sz="1500" dirty="0"/>
+          </a:p>
+        </p:txBody>
+      </p:sp>
+      <p:sp>
+        <p:nvSpPr>
+          <p:cNvPr id="20" name="Text 18"/>
+          <p:cNvSpPr txBox="1"/>
+          <p:nvPr/>
+        </p:nvSpPr>
+        <p:spPr>
+          <a:xfrm>
+            <a:off x="11274552" y="6400800"/>
+            <a:ext cx="548640" cy="274320"/>
+          </a:xfrm>
+          <a:prstGeom prst="rect">
+            <a:avLst/>
+          </a:prstGeom>
+          <a:noFill/>
+          <a:ln/>
+        </p:spPr>
+        <p:txBody>
+          <a:bodyPr wrap="square" lIns="0" tIns="0" rIns="0" bIns="0" rtlCol="0" anchor="ctr"/>
+          <a:lstStyle/>
+          <a:p>
+            <a:pPr algn="r" indent="0" marL="0">
+              <a:buNone/>
+            </a:pPr>
+            <a:r>
+              <a:rPr lang="en-US" sz="1000" dirty="0">
+                <a:solidFill>
+                  <a:srgbClr val="9C7C3F"/>
                 </a:solidFill>
                 <a:latin typeface="Calibri" pitchFamily="34" charset="0"/>
                 <a:ea typeface="Calibri" pitchFamily="34" charset="-122"/>
                 <a:cs typeface="Calibri" pitchFamily="34" charset="-120"/>
               </a:rPr>
-              <a:t>A embalagem foi desenhada para provocar, em sequência, estas reações no consumidor:</a:t>
-            </a:r>
-            <a:endParaRPr lang="en-US" sz="1350" dirty="0"/>
-          </a:p>
-        </p:txBody>
-      </p:sp>
-      <p:sp>
-        <p:nvSpPr>
-          <p:cNvPr id="5" name="Shape 3"/>
-          <p:cNvSpPr/>
-          <p:nvPr/>
-        </p:nvSpPr>
-        <p:spPr>
-          <a:xfrm>
-            <a:off x="640080" y="2286000"/>
-            <a:ext cx="2542032" cy="1417320"/>
-          </a:xfrm>
-          <a:prstGeom prst="rect">
-            <a:avLst/>
-          </a:prstGeom>
-          <a:solidFill>
-            <a:srgbClr val="17110D"/>
-          </a:solidFill>
-          <a:ln/>
-        </p:spPr>
-      </p:sp>
-      <p:sp>
-        <p:nvSpPr>
-          <p:cNvPr id="6" name="Shape 4"/>
-          <p:cNvSpPr/>
-          <p:nvPr/>
-        </p:nvSpPr>
-        <p:spPr>
-          <a:xfrm>
-            <a:off x="1810512" y="2542032"/>
-            <a:ext cx="201168" cy="201168"/>
-          </a:xfrm>
-          <a:prstGeom prst="ellipse">
-            <a:avLst/>
-          </a:prstGeom>
-          <a:solidFill>
-            <a:srgbClr val="C6A15B"/>
-          </a:solidFill>
-          <a:ln/>
-        </p:spPr>
-      </p:sp>
-      <p:sp>
-        <p:nvSpPr>
-          <p:cNvPr id="7" name="Text 5"/>
-          <p:cNvSpPr txBox="1"/>
-          <p:nvPr/>
-        </p:nvSpPr>
-        <p:spPr>
-          <a:xfrm>
-            <a:off x="777240" y="2907792"/>
-            <a:ext cx="2267712" cy="685800"/>
-          </a:xfrm>
-          <a:prstGeom prst="rect">
-            <a:avLst/>
-          </a:prstGeom>
-          <a:noFill/>
-          <a:ln/>
-        </p:spPr>
-        <p:txBody>
-          <a:bodyPr wrap="square" lIns="0" tIns="0" rIns="0" bIns="0" rtlCol="0" anchor="t"/>
-          <a:lstStyle/>
-          <a:p>
-            <a:pPr algn="ctr" indent="0" marL="0">
-              <a:buNone/>
-            </a:pPr>
-            <a:r>
-              <a:rPr lang="en-US" sz="1400" b="1" dirty="0">
-                <a:solidFill>
-                  <a:srgbClr val="EFE6D8"/>
-                </a:solidFill>
-                <a:latin typeface="Cambria" pitchFamily="34" charset="0"/>
-                <a:ea typeface="Cambria" pitchFamily="34" charset="-122"/>
-                <a:cs typeface="Cambria" pitchFamily="34" charset="-120"/>
-              </a:rPr>
-              <a:t>Exclusividade</a:t>
-            </a:r>
-            <a:endParaRPr lang="en-US" sz="1400" dirty="0"/>
-          </a:p>
-        </p:txBody>
-      </p:sp>
-      <p:sp>
-        <p:nvSpPr>
-          <p:cNvPr id="8" name="Shape 6"/>
-          <p:cNvSpPr/>
-          <p:nvPr/>
-        </p:nvSpPr>
-        <p:spPr>
-          <a:xfrm>
-            <a:off x="3401568" y="2286000"/>
-            <a:ext cx="2542032" cy="1417320"/>
-          </a:xfrm>
-          <a:prstGeom prst="rect">
-            <a:avLst/>
-          </a:prstGeom>
-          <a:solidFill>
-            <a:srgbClr val="17110D"/>
-          </a:solidFill>
-          <a:ln/>
-        </p:spPr>
-      </p:sp>
-      <p:sp>
-        <p:nvSpPr>
-          <p:cNvPr id="9" name="Shape 7"/>
-          <p:cNvSpPr/>
-          <p:nvPr/>
-        </p:nvSpPr>
-        <p:spPr>
-          <a:xfrm>
-            <a:off x="4572000" y="2542032"/>
-            <a:ext cx="201168" cy="201168"/>
-          </a:xfrm>
-          <a:prstGeom prst="ellipse">
-            <a:avLst/>
-          </a:prstGeom>
-          <a:solidFill>
-            <a:srgbClr val="C6A15B"/>
-          </a:solidFill>
-          <a:ln/>
-        </p:spPr>
-      </p:sp>
-      <p:sp>
-        <p:nvSpPr>
-          <p:cNvPr id="10" name="Text 8"/>
-          <p:cNvSpPr txBox="1"/>
-          <p:nvPr/>
-        </p:nvSpPr>
-        <p:spPr>
-          <a:xfrm>
-            <a:off x="3538728" y="2907792"/>
-            <a:ext cx="2267712" cy="685800"/>
-          </a:xfrm>
-          <a:prstGeom prst="rect">
-            <a:avLst/>
-          </a:prstGeom>
-          <a:noFill/>
-          <a:ln/>
-        </p:spPr>
-        <p:txBody>
-          <a:bodyPr wrap="square" lIns="0" tIns="0" rIns="0" bIns="0" rtlCol="0" anchor="t"/>
-          <a:lstStyle/>
-          <a:p>
-            <a:pPr algn="ctr" indent="0" marL="0">
-              <a:buNone/>
-            </a:pPr>
-            <a:r>
-              <a:rPr lang="en-US" sz="1400" b="1" dirty="0">
-                <a:solidFill>
-                  <a:srgbClr val="EFE6D8"/>
-                </a:solidFill>
-                <a:latin typeface="Cambria" pitchFamily="34" charset="0"/>
-                <a:ea typeface="Cambria" pitchFamily="34" charset="-122"/>
-                <a:cs typeface="Cambria" pitchFamily="34" charset="-120"/>
-              </a:rPr>
-              <a:t>Tradição</a:t>
-            </a:r>
-            <a:endParaRPr lang="en-US" sz="1400" dirty="0"/>
-          </a:p>
-        </p:txBody>
-      </p:sp>
-      <p:sp>
-        <p:nvSpPr>
-          <p:cNvPr id="11" name="Shape 9"/>
-          <p:cNvSpPr/>
-          <p:nvPr/>
-        </p:nvSpPr>
-        <p:spPr>
-          <a:xfrm>
-            <a:off x="6163056" y="2286000"/>
-            <a:ext cx="2542032" cy="1417320"/>
-          </a:xfrm>
-          <a:prstGeom prst="rect">
-            <a:avLst/>
-          </a:prstGeom>
-          <a:solidFill>
-            <a:srgbClr val="17110D"/>
-          </a:solidFill>
-          <a:ln/>
-        </p:spPr>
-      </p:sp>
-      <p:sp>
-        <p:nvSpPr>
-          <p:cNvPr id="12" name="Shape 10"/>
-          <p:cNvSpPr/>
-          <p:nvPr/>
-        </p:nvSpPr>
-        <p:spPr>
-          <a:xfrm>
-            <a:off x="7333488" y="2542032"/>
-            <a:ext cx="201168" cy="201168"/>
-          </a:xfrm>
-          <a:prstGeom prst="ellipse">
-            <a:avLst/>
-          </a:prstGeom>
-          <a:solidFill>
-            <a:srgbClr val="C6A15B"/>
-          </a:solidFill>
-          <a:ln/>
-        </p:spPr>
-      </p:sp>
-      <p:sp>
-        <p:nvSpPr>
-          <p:cNvPr id="13" name="Text 11"/>
-          <p:cNvSpPr txBox="1"/>
-          <p:nvPr/>
-        </p:nvSpPr>
-        <p:spPr>
-          <a:xfrm>
-            <a:off x="6300216" y="2907792"/>
-            <a:ext cx="2267712" cy="685800"/>
-          </a:xfrm>
-          <a:prstGeom prst="rect">
-            <a:avLst/>
-          </a:prstGeom>
-          <a:noFill/>
-          <a:ln/>
-        </p:spPr>
-        <p:txBody>
-          <a:bodyPr wrap="square" lIns="0" tIns="0" rIns="0" bIns="0" rtlCol="0" anchor="t"/>
-          <a:lstStyle/>
-          <a:p>
-            <a:pPr algn="ctr" indent="0" marL="0">
-              <a:buNone/>
-            </a:pPr>
-            <a:r>
-              <a:rPr lang="en-US" sz="1400" b="1" dirty="0">
-                <a:solidFill>
-                  <a:srgbClr val="EFE6D8"/>
-                </a:solidFill>
-                <a:latin typeface="Cambria" pitchFamily="34" charset="0"/>
-                <a:ea typeface="Cambria" pitchFamily="34" charset="-122"/>
-                <a:cs typeface="Cambria" pitchFamily="34" charset="-120"/>
-              </a:rPr>
-              <a:t>Sofisticação</a:t>
-            </a:r>
-            <a:endParaRPr lang="en-US" sz="1400" dirty="0"/>
-          </a:p>
-        </p:txBody>
-      </p:sp>
-      <p:sp>
-        <p:nvSpPr>
-          <p:cNvPr id="14" name="Shape 12"/>
-          <p:cNvSpPr/>
-          <p:nvPr/>
-        </p:nvSpPr>
-        <p:spPr>
-          <a:xfrm>
-            <a:off x="8924544" y="2286000"/>
-            <a:ext cx="2542032" cy="1417320"/>
-          </a:xfrm>
-          <a:prstGeom prst="rect">
-            <a:avLst/>
-          </a:prstGeom>
-          <a:solidFill>
-            <a:srgbClr val="17110D"/>
-          </a:solidFill>
-          <a:ln/>
-        </p:spPr>
-      </p:sp>
-      <p:sp>
-        <p:nvSpPr>
-          <p:cNvPr id="15" name="Shape 13"/>
-          <p:cNvSpPr/>
-          <p:nvPr/>
-        </p:nvSpPr>
-        <p:spPr>
-          <a:xfrm>
-            <a:off x="10094976" y="2542032"/>
-            <a:ext cx="201168" cy="201168"/>
-          </a:xfrm>
-          <a:prstGeom prst="ellipse">
-            <a:avLst/>
-          </a:prstGeom>
-          <a:solidFill>
-            <a:srgbClr val="C6A15B"/>
-          </a:solidFill>
-          <a:ln/>
-        </p:spPr>
-      </p:sp>
-      <p:sp>
-        <p:nvSpPr>
-          <p:cNvPr id="16" name="Text 14"/>
-          <p:cNvSpPr txBox="1"/>
-          <p:nvPr/>
-        </p:nvSpPr>
-        <p:spPr>
-          <a:xfrm>
-            <a:off x="9061704" y="2907792"/>
-            <a:ext cx="2267712" cy="685800"/>
-          </a:xfrm>
-          <a:prstGeom prst="rect">
-            <a:avLst/>
-          </a:prstGeom>
-          <a:noFill/>
-          <a:ln/>
-        </p:spPr>
-        <p:txBody>
-          <a:bodyPr wrap="square" lIns="0" tIns="0" rIns="0" bIns="0" rtlCol="0" anchor="t"/>
-          <a:lstStyle/>
-          <a:p>
-            <a:pPr algn="ctr" indent="0" marL="0">
-              <a:buNone/>
-            </a:pPr>
-            <a:r>
-              <a:rPr lang="en-US" sz="1400" b="1" dirty="0">
-                <a:solidFill>
-                  <a:srgbClr val="EFE6D8"/>
-                </a:solidFill>
-                <a:latin typeface="Cambria" pitchFamily="34" charset="0"/>
-                <a:ea typeface="Cambria" pitchFamily="34" charset="-122"/>
-                <a:cs typeface="Cambria" pitchFamily="34" charset="-120"/>
-              </a:rPr>
-              <a:t>Ritual de abertura</a:t>
-            </a:r>
-            <a:endParaRPr lang="en-US" sz="1400" dirty="0"/>
-          </a:p>
-        </p:txBody>
-      </p:sp>
-      <p:sp>
-        <p:nvSpPr>
-          <p:cNvPr id="17" name="Shape 15"/>
-          <p:cNvSpPr/>
-          <p:nvPr/>
-        </p:nvSpPr>
-        <p:spPr>
-          <a:xfrm>
-            <a:off x="640080" y="3959352"/>
-            <a:ext cx="2542032" cy="1417320"/>
-          </a:xfrm>
-          <a:prstGeom prst="rect">
-            <a:avLst/>
-          </a:prstGeom>
-          <a:solidFill>
-            <a:srgbClr val="17110D"/>
-          </a:solidFill>
-          <a:ln/>
-        </p:spPr>
-      </p:sp>
-      <p:sp>
-        <p:nvSpPr>
-          <p:cNvPr id="18" name="Shape 16"/>
-          <p:cNvSpPr/>
-          <p:nvPr/>
-        </p:nvSpPr>
-        <p:spPr>
-          <a:xfrm>
-            <a:off x="1810512" y="4215384"/>
-            <a:ext cx="201168" cy="201168"/>
-          </a:xfrm>
-          <a:prstGeom prst="ellipse">
-            <a:avLst/>
-          </a:prstGeom>
-          <a:solidFill>
-            <a:srgbClr val="C6A15B"/>
-          </a:solidFill>
-          <a:ln/>
-        </p:spPr>
-      </p:sp>
-      <p:sp>
-        <p:nvSpPr>
-          <p:cNvPr id="19" name="Text 17"/>
-          <p:cNvSpPr txBox="1"/>
-          <p:nvPr/>
-        </p:nvSpPr>
-        <p:spPr>
-          <a:xfrm>
-            <a:off x="777240" y="4581144"/>
-            <a:ext cx="2267712" cy="685800"/>
-          </a:xfrm>
-          <a:prstGeom prst="rect">
-            <a:avLst/>
-          </a:prstGeom>
-          <a:noFill/>
-          <a:ln/>
-        </p:spPr>
-        <p:txBody>
-          <a:bodyPr wrap="square" lIns="0" tIns="0" rIns="0" bIns="0" rtlCol="0" anchor="t"/>
-          <a:lstStyle/>
-          <a:p>
-            <a:pPr algn="ctr" indent="0" marL="0">
-              <a:buNone/>
-            </a:pPr>
-            <a:r>
-              <a:rPr lang="en-US" sz="1400" b="1" dirty="0">
-                <a:solidFill>
-                  <a:srgbClr val="EFE6D8"/>
-                </a:solidFill>
-                <a:latin typeface="Cambria" pitchFamily="34" charset="0"/>
-                <a:ea typeface="Cambria" pitchFamily="34" charset="-122"/>
-                <a:cs typeface="Cambria" pitchFamily="34" charset="-120"/>
-              </a:rPr>
-              <a:t>Artesanalidade</a:t>
-            </a:r>
-            <a:endParaRPr lang="en-US" sz="1400" dirty="0"/>
-          </a:p>
-        </p:txBody>
-      </p:sp>
-      <p:sp>
-        <p:nvSpPr>
-          <p:cNvPr id="20" name="Shape 18"/>
-          <p:cNvSpPr/>
-          <p:nvPr/>
-        </p:nvSpPr>
-        <p:spPr>
-          <a:xfrm>
-            <a:off x="3401568" y="3959352"/>
-            <a:ext cx="2542032" cy="1417320"/>
-          </a:xfrm>
-          <a:prstGeom prst="rect">
-            <a:avLst/>
-          </a:prstGeom>
-          <a:solidFill>
-            <a:srgbClr val="17110D"/>
-          </a:solidFill>
-          <a:ln/>
-        </p:spPr>
-      </p:sp>
-      <p:sp>
-        <p:nvSpPr>
-          <p:cNvPr id="21" name="Shape 19"/>
-          <p:cNvSpPr/>
-          <p:nvPr/>
-        </p:nvSpPr>
-        <p:spPr>
-          <a:xfrm>
-            <a:off x="4572000" y="4215384"/>
-            <a:ext cx="201168" cy="201168"/>
-          </a:xfrm>
-          <a:prstGeom prst="ellipse">
-            <a:avLst/>
-          </a:prstGeom>
-          <a:solidFill>
-            <a:srgbClr val="C6A15B"/>
-          </a:solidFill>
-          <a:ln/>
-        </p:spPr>
-      </p:sp>
-      <p:sp>
-        <p:nvSpPr>
-          <p:cNvPr id="22" name="Text 20"/>
-          <p:cNvSpPr txBox="1"/>
-          <p:nvPr/>
-        </p:nvSpPr>
-        <p:spPr>
-          <a:xfrm>
-            <a:off x="3538728" y="4581144"/>
-            <a:ext cx="2267712" cy="685800"/>
-          </a:xfrm>
-          <a:prstGeom prst="rect">
-            <a:avLst/>
-          </a:prstGeom>
-          <a:noFill/>
-          <a:ln/>
-        </p:spPr>
-        <p:txBody>
-          <a:bodyPr wrap="square" lIns="0" tIns="0" rIns="0" bIns="0" rtlCol="0" anchor="t"/>
-          <a:lstStyle/>
-          <a:p>
-            <a:pPr algn="ctr" indent="0" marL="0">
-              <a:buNone/>
-            </a:pPr>
-            <a:r>
-              <a:rPr lang="en-US" sz="1400" b="1" dirty="0">
-                <a:solidFill>
-                  <a:srgbClr val="EFE6D8"/>
-                </a:solidFill>
-                <a:latin typeface="Cambria" pitchFamily="34" charset="0"/>
-                <a:ea typeface="Cambria" pitchFamily="34" charset="-122"/>
-                <a:cs typeface="Cambria" pitchFamily="34" charset="-120"/>
-              </a:rPr>
-              <a:t>Curiosidade</a:t>
-            </a:r>
-            <a:endParaRPr lang="en-US" sz="1400" dirty="0"/>
-          </a:p>
-        </p:txBody>
-      </p:sp>
-      <p:sp>
-        <p:nvSpPr>
-          <p:cNvPr id="23" name="Shape 21"/>
-          <p:cNvSpPr/>
-          <p:nvPr/>
-        </p:nvSpPr>
-        <p:spPr>
-          <a:xfrm>
-            <a:off x="6163056" y="3959352"/>
-            <a:ext cx="2542032" cy="1417320"/>
-          </a:xfrm>
-          <a:prstGeom prst="rect">
-            <a:avLst/>
-          </a:prstGeom>
-          <a:solidFill>
-            <a:srgbClr val="17110D"/>
-          </a:solidFill>
-          <a:ln/>
-        </p:spPr>
-      </p:sp>
-      <p:sp>
-        <p:nvSpPr>
-          <p:cNvPr id="24" name="Shape 22"/>
-          <p:cNvSpPr/>
-          <p:nvPr/>
-        </p:nvSpPr>
-        <p:spPr>
-          <a:xfrm>
-            <a:off x="7333488" y="4215384"/>
-            <a:ext cx="201168" cy="201168"/>
-          </a:xfrm>
-          <a:prstGeom prst="ellipse">
-            <a:avLst/>
-          </a:prstGeom>
-          <a:solidFill>
-            <a:srgbClr val="C6A15B"/>
-          </a:solidFill>
-          <a:ln/>
-        </p:spPr>
-      </p:sp>
-      <p:sp>
-        <p:nvSpPr>
-          <p:cNvPr id="25" name="Text 23"/>
-          <p:cNvSpPr txBox="1"/>
-          <p:nvPr/>
-        </p:nvSpPr>
-        <p:spPr>
-          <a:xfrm>
-            <a:off x="6300216" y="4581144"/>
-            <a:ext cx="2267712" cy="685800"/>
-          </a:xfrm>
-          <a:prstGeom prst="rect">
-            <a:avLst/>
-          </a:prstGeom>
-          <a:noFill/>
-          <a:ln/>
-        </p:spPr>
-        <p:txBody>
-          <a:bodyPr wrap="square" lIns="0" tIns="0" rIns="0" bIns="0" rtlCol="0" anchor="t"/>
-          <a:lstStyle/>
-          <a:p>
-            <a:pPr algn="ctr" indent="0" marL="0">
-              <a:buNone/>
-            </a:pPr>
-            <a:r>
-              <a:rPr lang="en-US" sz="1400" b="1" dirty="0">
-                <a:solidFill>
-                  <a:srgbClr val="EFE6D8"/>
-                </a:solidFill>
-                <a:latin typeface="Cambria" pitchFamily="34" charset="0"/>
-                <a:ea typeface="Cambria" pitchFamily="34" charset="-122"/>
-                <a:cs typeface="Cambria" pitchFamily="34" charset="-120"/>
-              </a:rPr>
-              <a:t>Desejo de descoberta</a:t>
-            </a:r>
-            <a:endParaRPr lang="en-US" sz="1400" dirty="0"/>
-          </a:p>
-        </p:txBody>
-      </p:sp>
-      <p:sp>
-        <p:nvSpPr>
-          <p:cNvPr id="26" name="Shape 24"/>
-          <p:cNvSpPr/>
-          <p:nvPr/>
-        </p:nvSpPr>
-        <p:spPr>
-          <a:xfrm>
-            <a:off x="8924544" y="3959352"/>
-            <a:ext cx="2542032" cy="1417320"/>
-          </a:xfrm>
-          <a:prstGeom prst="rect">
-            <a:avLst/>
-          </a:prstGeom>
-          <a:solidFill>
-            <a:srgbClr val="17110D"/>
-          </a:solidFill>
-          <a:ln/>
-        </p:spPr>
-      </p:sp>
-      <p:sp>
-        <p:nvSpPr>
-          <p:cNvPr id="27" name="Shape 25"/>
-          <p:cNvSpPr/>
-          <p:nvPr/>
-        </p:nvSpPr>
-        <p:spPr>
-          <a:xfrm>
-            <a:off x="10094976" y="4215384"/>
-            <a:ext cx="201168" cy="201168"/>
-          </a:xfrm>
-          <a:prstGeom prst="ellipse">
-            <a:avLst/>
-          </a:prstGeom>
-          <a:solidFill>
-            <a:srgbClr val="C6A15B"/>
-          </a:solidFill>
-          <a:ln/>
-        </p:spPr>
-      </p:sp>
-      <p:sp>
-        <p:nvSpPr>
-          <p:cNvPr id="28" name="Text 26"/>
-          <p:cNvSpPr txBox="1"/>
-          <p:nvPr/>
-        </p:nvSpPr>
-        <p:spPr>
-          <a:xfrm>
-            <a:off x="9061704" y="4581144"/>
-            <a:ext cx="2267712" cy="685800"/>
-          </a:xfrm>
-          <a:prstGeom prst="rect">
-            <a:avLst/>
-          </a:prstGeom>
-          <a:noFill/>
-          <a:ln/>
-        </p:spPr>
-        <p:txBody>
-          <a:bodyPr wrap="square" lIns="0" tIns="0" rIns="0" bIns="0" rtlCol="0" anchor="t"/>
-          <a:lstStyle/>
-          <a:p>
-            <a:pPr algn="ctr" indent="0" marL="0">
-              <a:buNone/>
-            </a:pPr>
-            <a:r>
-              <a:rPr lang="en-US" sz="1400" b="1" dirty="0">
-                <a:solidFill>
-                  <a:srgbClr val="EFE6D8"/>
-                </a:solidFill>
-                <a:latin typeface="Cambria" pitchFamily="34" charset="0"/>
-                <a:ea typeface="Cambria" pitchFamily="34" charset="-122"/>
-                <a:cs typeface="Cambria" pitchFamily="34" charset="-120"/>
-              </a:rPr>
-              <a:t>Confiança na qualidade</a:t>
-            </a:r>
-            <a:endParaRPr lang="en-US" sz="1400" dirty="0"/>
-          </a:p>
-        </p:txBody>
-      </p:sp>
-      <p:sp>
-        <p:nvSpPr>
-          <p:cNvPr id="29" name="Text 27"/>
-          <p:cNvSpPr txBox="1"/>
-          <p:nvPr/>
-        </p:nvSpPr>
-        <p:spPr>
-          <a:xfrm>
-            <a:off x="11274552" y="6355080"/>
-            <a:ext cx="548640" cy="320040"/>
-          </a:xfrm>
-          <a:prstGeom prst="rect">
-            <a:avLst/>
-          </a:prstGeom>
-          <a:noFill/>
-          <a:ln/>
-        </p:spPr>
-        <p:txBody>
-          <a:bodyPr wrap="square" lIns="0" tIns="0" rIns="0" bIns="0" rtlCol="0" anchor="ctr"/>
-          <a:lstStyle/>
-          <a:p>
-            <a:pPr algn="r" indent="0" marL="0">
-              <a:buNone/>
-            </a:pPr>
-            <a:r>
-              <a:rPr lang="en-US" sz="1000" dirty="0">
-                <a:solidFill>
-                  <a:srgbClr val="9C7C3F"/>
-                </a:solidFill>
-                <a:latin typeface="Calibri" pitchFamily="34" charset="0"/>
-                <a:ea typeface="Calibri" pitchFamily="34" charset="-122"/>
-                <a:cs typeface="Calibri" pitchFamily="34" charset="-120"/>
-              </a:rPr>
               <a:t>06</a:t>
             </a:r>
             <a:endParaRPr lang="en-US" sz="1000" dirty="0"/>
@@ -5578,14 +4567,14 @@
       </p:sp>
       <p:sp>
         <p:nvSpPr>
-          <p:cNvPr id="30" name="Text 28"/>
-          <p:cNvSpPr txBox="1"/>
-          <p:nvPr/>
-        </p:nvSpPr>
-        <p:spPr>
-          <a:xfrm>
-            <a:off x="640080" y="6355080"/>
-            <a:ext cx="2743200" cy="320040"/>
+          <p:cNvPr id="21" name="Text 19"/>
+          <p:cNvSpPr txBox="1"/>
+          <p:nvPr/>
+        </p:nvSpPr>
+        <p:spPr>
+          <a:xfrm>
+            <a:off x="640080" y="6400800"/>
+            <a:ext cx="2743200" cy="274320"/>
           </a:xfrm>
           <a:prstGeom prst="rect">
             <a:avLst/>
@@ -5719,7 +4708,7 @@
                 <a:ea typeface="Cambria" pitchFamily="34" charset="-122"/>
                 <a:cs typeface="Cambria" pitchFamily="34" charset="-120"/>
               </a:rPr>
-              <a:t>Como a embalagem influencia o consumidor</a:t>
+              <a:t>Como isso influencia o consumidor</a:t>
             </a:r>
             <a:endParaRPr lang="en-US" sz="3000" dirty="0"/>
           </a:p>
@@ -5733,8 +4722,8 @@
         </p:nvSpPr>
         <p:spPr>
           <a:xfrm>
-            <a:off x="640080" y="1874520"/>
-            <a:ext cx="5257800" cy="1965960"/>
+            <a:off x="640080" y="1920240"/>
+            <a:ext cx="5257800" cy="2103120"/>
           </a:xfrm>
           <a:prstGeom prst="rect">
             <a:avLst/>
@@ -5753,24 +4742,24 @@
         </p:nvSpPr>
         <p:spPr>
           <a:xfrm>
-            <a:off x="896112" y="2039112"/>
-            <a:ext cx="1005840" cy="548640"/>
-          </a:xfrm>
-          <a:prstGeom prst="rect">
-            <a:avLst/>
-          </a:prstGeom>
-          <a:noFill/>
-          <a:ln/>
-        </p:spPr>
-        <p:txBody>
-          <a:bodyPr wrap="square" lIns="0" tIns="0" rIns="0" bIns="0" rtlCol="0" anchor="ctr"/>
-          <a:lstStyle/>
-          <a:p>
-            <a:pPr indent="0" marL="0">
-              <a:buNone/>
-            </a:pPr>
-            <a:r>
-              <a:rPr lang="en-US" sz="2600" b="1" dirty="0">
+            <a:off x="914400" y="2121408"/>
+            <a:ext cx="1005840" cy="457200"/>
+          </a:xfrm>
+          <a:prstGeom prst="rect">
+            <a:avLst/>
+          </a:prstGeom>
+          <a:noFill/>
+          <a:ln/>
+        </p:spPr>
+        <p:txBody>
+          <a:bodyPr wrap="square" lIns="0" tIns="0" rIns="0" bIns="0" rtlCol="0" anchor="ctr"/>
+          <a:lstStyle/>
+          <a:p>
+            <a:pPr indent="0" marL="0">
+              <a:buNone/>
+            </a:pPr>
+            <a:r>
+              <a:rPr lang="en-US" sz="2200" b="1" dirty="0">
                 <a:solidFill>
                   <a:srgbClr val="9C7C3F"/>
                 </a:solidFill>
@@ -5780,7 +4769,7 @@
               </a:rPr>
               <a:t>01</a:t>
             </a:r>
-            <a:endParaRPr lang="en-US" sz="2600" dirty="0"/>
+            <a:endParaRPr lang="en-US" sz="2200" dirty="0"/>
           </a:p>
         </p:txBody>
       </p:sp>
@@ -5792,8 +4781,8 @@
         </p:nvSpPr>
         <p:spPr>
           <a:xfrm>
-            <a:off x="896112" y="2532888"/>
-            <a:ext cx="4745736" cy="365760"/>
+            <a:off x="914400" y="2578608"/>
+            <a:ext cx="4709160" cy="365760"/>
           </a:xfrm>
           <a:prstGeom prst="rect">
             <a:avLst/>
@@ -5825,33 +4814,50 @@
       </p:sp>
       <p:sp>
         <p:nvSpPr>
-          <p:cNvPr id="7" name="Text 5"/>
-          <p:cNvSpPr txBox="1"/>
-          <p:nvPr/>
-        </p:nvSpPr>
-        <p:spPr>
-          <a:xfrm>
-            <a:off x="896112" y="2898648"/>
-            <a:ext cx="4745736" cy="868680"/>
-          </a:xfrm>
-          <a:prstGeom prst="rect">
-            <a:avLst/>
-          </a:prstGeom>
-          <a:noFill/>
-          <a:ln/>
-        </p:spPr>
-        <p:txBody>
-          <a:bodyPr wrap="square" lIns="0" tIns="0" rIns="0" bIns="0" rtlCol="0" anchor="ctr"/>
-          <a:lstStyle/>
-          <a:p>
-            <a:pPr indent="0" marL="0">
-              <a:lnSpc>
-                <a:spcPct val="118000"/>
-              </a:lnSpc>
-              <a:buNone/>
-            </a:pPr>
-            <a:r>
-              <a:rPr lang="en-US" sz="1080" dirty="0">
+          <p:cNvPr id="7" name="Shape 5"/>
+          <p:cNvSpPr/>
+          <p:nvPr/>
+        </p:nvSpPr>
+        <p:spPr>
+          <a:xfrm>
+            <a:off x="914400" y="3072384"/>
+            <a:ext cx="118872" cy="118872"/>
+          </a:xfrm>
+          <a:prstGeom prst="rect">
+            <a:avLst/>
+          </a:prstGeom>
+          <a:solidFill>
+            <a:srgbClr val="C6A15B"/>
+          </a:solidFill>
+          <a:ln/>
+        </p:spPr>
+      </p:sp>
+      <p:sp>
+        <p:nvSpPr>
+          <p:cNvPr id="8" name="Text 6"/>
+          <p:cNvSpPr txBox="1"/>
+          <p:nvPr/>
+        </p:nvSpPr>
+        <p:spPr>
+          <a:xfrm>
+            <a:off x="1143000" y="2944368"/>
+            <a:ext cx="4480560" cy="320040"/>
+          </a:xfrm>
+          <a:prstGeom prst="rect">
+            <a:avLst/>
+          </a:prstGeom>
+          <a:noFill/>
+          <a:ln/>
+        </p:spPr>
+        <p:txBody>
+          <a:bodyPr wrap="square" lIns="0" tIns="0" rIns="0" bIns="0" rtlCol="0" anchor="ctr"/>
+          <a:lstStyle/>
+          <a:p>
+            <a:pPr indent="0" marL="0">
+              <a:buNone/>
+            </a:pPr>
+            <a:r>
+              <a:rPr lang="en-US" sz="1200" dirty="0">
                 <a:solidFill>
                   <a:srgbClr val="C9BEAC"/>
                 </a:solidFill>
@@ -5859,22 +4865,81 @@
                 <a:ea typeface="Calibri" pitchFamily="34" charset="-122"/>
                 <a:cs typeface="Calibri" pitchFamily="34" charset="-120"/>
               </a:rPr>
-              <a:t>A paleta escura, o acabamento soft touch e o hot stamping dourado posicionam o chocolate como item de luxo antes mesmo de ser aberto — peso e textura comunicam qualidade tátil.</a:t>
-            </a:r>
-            <a:endParaRPr lang="en-US" sz="1080" dirty="0"/>
-          </a:p>
-        </p:txBody>
-      </p:sp>
-      <p:sp>
-        <p:nvSpPr>
-          <p:cNvPr id="8" name="Shape 6"/>
+              <a:t>Paleta escura + soft touch</a:t>
+            </a:r>
+            <a:endParaRPr lang="en-US" sz="1200" dirty="0"/>
+          </a:p>
+        </p:txBody>
+      </p:sp>
+      <p:sp>
+        <p:nvSpPr>
+          <p:cNvPr id="9" name="Shape 7"/>
           <p:cNvSpPr/>
           <p:nvPr/>
         </p:nvSpPr>
         <p:spPr>
           <a:xfrm>
-            <a:off x="6172200" y="1874520"/>
-            <a:ext cx="5257800" cy="1965960"/>
+            <a:off x="914400" y="3438144"/>
+            <a:ext cx="118872" cy="118872"/>
+          </a:xfrm>
+          <a:prstGeom prst="rect">
+            <a:avLst/>
+          </a:prstGeom>
+          <a:solidFill>
+            <a:srgbClr val="C6A15B"/>
+          </a:solidFill>
+          <a:ln/>
+        </p:spPr>
+      </p:sp>
+      <p:sp>
+        <p:nvSpPr>
+          <p:cNvPr id="10" name="Text 8"/>
+          <p:cNvSpPr txBox="1"/>
+          <p:nvPr/>
+        </p:nvSpPr>
+        <p:spPr>
+          <a:xfrm>
+            <a:off x="1143000" y="3310128"/>
+            <a:ext cx="4480560" cy="320040"/>
+          </a:xfrm>
+          <a:prstGeom prst="rect">
+            <a:avLst/>
+          </a:prstGeom>
+          <a:noFill/>
+          <a:ln/>
+        </p:spPr>
+        <p:txBody>
+          <a:bodyPr wrap="square" lIns="0" tIns="0" rIns="0" bIns="0" rtlCol="0" anchor="ctr"/>
+          <a:lstStyle/>
+          <a:p>
+            <a:pPr indent="0" marL="0">
+              <a:buNone/>
+            </a:pPr>
+            <a:r>
+              <a:rPr lang="en-US" sz="1200" dirty="0">
+                <a:solidFill>
+                  <a:srgbClr val="C9BEAC"/>
+                </a:solidFill>
+                <a:latin typeface="Calibri" pitchFamily="34" charset="0"/>
+                <a:ea typeface="Calibri" pitchFamily="34" charset="-122"/>
+                <a:cs typeface="Calibri" pitchFamily="34" charset="-120"/>
+              </a:rPr>
+              <a:t>Hot stamping dourado</a:t>
+            </a:r>
+            <a:endParaRPr lang="en-US" sz="1200" dirty="0"/>
+          </a:p>
+        </p:txBody>
+      </p:sp>
+      <p:sp>
+        <p:nvSpPr>
+          <p:cNvPr id="11" name="Shape 9"/>
+          <p:cNvSpPr/>
+          <p:nvPr/>
+        </p:nvSpPr>
+        <p:spPr>
+          <a:xfrm>
+            <a:off x="6172200" y="1920240"/>
+            <a:ext cx="5257800" cy="2103120"/>
           </a:xfrm>
           <a:prstGeom prst="rect">
             <a:avLst/>
@@ -5887,30 +4952,30 @@
       </p:sp>
       <p:sp>
         <p:nvSpPr>
-          <p:cNvPr id="9" name="Text 7"/>
-          <p:cNvSpPr txBox="1"/>
-          <p:nvPr/>
-        </p:nvSpPr>
-        <p:spPr>
-          <a:xfrm>
-            <a:off x="6428232" y="2039112"/>
-            <a:ext cx="1005840" cy="548640"/>
-          </a:xfrm>
-          <a:prstGeom prst="rect">
-            <a:avLst/>
-          </a:prstGeom>
-          <a:noFill/>
-          <a:ln/>
-        </p:spPr>
-        <p:txBody>
-          <a:bodyPr wrap="square" lIns="0" tIns="0" rIns="0" bIns="0" rtlCol="0" anchor="ctr"/>
-          <a:lstStyle/>
-          <a:p>
-            <a:pPr indent="0" marL="0">
-              <a:buNone/>
-            </a:pPr>
-            <a:r>
-              <a:rPr lang="en-US" sz="2600" b="1" dirty="0">
+          <p:cNvPr id="12" name="Text 10"/>
+          <p:cNvSpPr txBox="1"/>
+          <p:nvPr/>
+        </p:nvSpPr>
+        <p:spPr>
+          <a:xfrm>
+            <a:off x="6446520" y="2121408"/>
+            <a:ext cx="1005840" cy="457200"/>
+          </a:xfrm>
+          <a:prstGeom prst="rect">
+            <a:avLst/>
+          </a:prstGeom>
+          <a:noFill/>
+          <a:ln/>
+        </p:spPr>
+        <p:txBody>
+          <a:bodyPr wrap="square" lIns="0" tIns="0" rIns="0" bIns="0" rtlCol="0" anchor="ctr"/>
+          <a:lstStyle/>
+          <a:p>
+            <a:pPr indent="0" marL="0">
+              <a:buNone/>
+            </a:pPr>
+            <a:r>
+              <a:rPr lang="en-US" sz="2200" b="1" dirty="0">
                 <a:solidFill>
                   <a:srgbClr val="9C7C3F"/>
                 </a:solidFill>
@@ -5920,20 +4985,20 @@
               </a:rPr>
               <a:t>02</a:t>
             </a:r>
-            <a:endParaRPr lang="en-US" sz="2600" dirty="0"/>
-          </a:p>
-        </p:txBody>
-      </p:sp>
-      <p:sp>
-        <p:nvSpPr>
-          <p:cNvPr id="10" name="Text 8"/>
-          <p:cNvSpPr txBox="1"/>
-          <p:nvPr/>
-        </p:nvSpPr>
-        <p:spPr>
-          <a:xfrm>
-            <a:off x="6428232" y="2532888"/>
-            <a:ext cx="4745736" cy="365760"/>
+            <a:endParaRPr lang="en-US" sz="2200" dirty="0"/>
+          </a:p>
+        </p:txBody>
+      </p:sp>
+      <p:sp>
+        <p:nvSpPr>
+          <p:cNvPr id="13" name="Text 11"/>
+          <p:cNvSpPr txBox="1"/>
+          <p:nvPr/>
+        </p:nvSpPr>
+        <p:spPr>
+          <a:xfrm>
+            <a:off x="6446520" y="2578608"/>
+            <a:ext cx="4709160" cy="365760"/>
           </a:xfrm>
           <a:prstGeom prst="rect">
             <a:avLst/>
@@ -5965,33 +5030,50 @@
       </p:sp>
       <p:sp>
         <p:nvSpPr>
-          <p:cNvPr id="11" name="Text 9"/>
-          <p:cNvSpPr txBox="1"/>
-          <p:nvPr/>
-        </p:nvSpPr>
-        <p:spPr>
-          <a:xfrm>
-            <a:off x="6428232" y="2898648"/>
-            <a:ext cx="4745736" cy="868680"/>
-          </a:xfrm>
-          <a:prstGeom prst="rect">
-            <a:avLst/>
-          </a:prstGeom>
-          <a:noFill/>
-          <a:ln/>
-        </p:spPr>
-        <p:txBody>
-          <a:bodyPr wrap="square" lIns="0" tIns="0" rIns="0" bIns="0" rtlCol="0" anchor="ctr"/>
-          <a:lstStyle/>
-          <a:p>
-            <a:pPr indent="0" marL="0">
-              <a:lnSpc>
-                <a:spcPct val="118000"/>
-              </a:lnSpc>
-              <a:buNone/>
-            </a:pPr>
-            <a:r>
-              <a:rPr lang="en-US" sz="1080" dirty="0">
+          <p:cNvPr id="14" name="Shape 12"/>
+          <p:cNvSpPr/>
+          <p:nvPr/>
+        </p:nvSpPr>
+        <p:spPr>
+          <a:xfrm>
+            <a:off x="6446520" y="3072384"/>
+            <a:ext cx="118872" cy="118872"/>
+          </a:xfrm>
+          <a:prstGeom prst="rect">
+            <a:avLst/>
+          </a:prstGeom>
+          <a:solidFill>
+            <a:srgbClr val="C6A15B"/>
+          </a:solidFill>
+          <a:ln/>
+        </p:spPr>
+      </p:sp>
+      <p:sp>
+        <p:nvSpPr>
+          <p:cNvPr id="15" name="Text 13"/>
+          <p:cNvSpPr txBox="1"/>
+          <p:nvPr/>
+        </p:nvSpPr>
+        <p:spPr>
+          <a:xfrm>
+            <a:off x="6675120" y="2944368"/>
+            <a:ext cx="4480560" cy="320040"/>
+          </a:xfrm>
+          <a:prstGeom prst="rect">
+            <a:avLst/>
+          </a:prstGeom>
+          <a:noFill/>
+          <a:ln/>
+        </p:spPr>
+        <p:txBody>
+          <a:bodyPr wrap="square" lIns="0" tIns="0" rIns="0" bIns="0" rtlCol="0" anchor="ctr"/>
+          <a:lstStyle/>
+          <a:p>
+            <a:pPr indent="0" marL="0">
+              <a:buNone/>
+            </a:pPr>
+            <a:r>
+              <a:rPr lang="en-US" sz="1200" dirty="0">
                 <a:solidFill>
                   <a:srgbClr val="C9BEAC"/>
                 </a:solidFill>
@@ -5999,22 +5081,81 @@
                 <a:ea typeface="Calibri" pitchFamily="34" charset="-122"/>
                 <a:cs typeface="Calibri" pitchFamily="34" charset="-120"/>
               </a:rPr>
-              <a:t>O minimalismo na frente da caixa e a tipografia serifada fina remetem a códigos visuais de vinhos e destilados premium, transferindo essa percepção de qualidade por associação.</a:t>
-            </a:r>
-            <a:endParaRPr lang="en-US" sz="1080" dirty="0"/>
-          </a:p>
-        </p:txBody>
-      </p:sp>
-      <p:sp>
-        <p:nvSpPr>
-          <p:cNvPr id="12" name="Shape 10"/>
+              <a:t>Minimalismo na frente</a:t>
+            </a:r>
+            <a:endParaRPr lang="en-US" sz="1200" dirty="0"/>
+          </a:p>
+        </p:txBody>
+      </p:sp>
+      <p:sp>
+        <p:nvSpPr>
+          <p:cNvPr id="16" name="Shape 14"/>
           <p:cNvSpPr/>
           <p:nvPr/>
         </p:nvSpPr>
         <p:spPr>
           <a:xfrm>
-            <a:off x="640080" y="4069080"/>
-            <a:ext cx="5257800" cy="1965960"/>
+            <a:off x="6446520" y="3438144"/>
+            <a:ext cx="118872" cy="118872"/>
+          </a:xfrm>
+          <a:prstGeom prst="rect">
+            <a:avLst/>
+          </a:prstGeom>
+          <a:solidFill>
+            <a:srgbClr val="C6A15B"/>
+          </a:solidFill>
+          <a:ln/>
+        </p:spPr>
+      </p:sp>
+      <p:sp>
+        <p:nvSpPr>
+          <p:cNvPr id="17" name="Text 15"/>
+          <p:cNvSpPr txBox="1"/>
+          <p:nvPr/>
+        </p:nvSpPr>
+        <p:spPr>
+          <a:xfrm>
+            <a:off x="6675120" y="3310128"/>
+            <a:ext cx="4480560" cy="320040"/>
+          </a:xfrm>
+          <a:prstGeom prst="rect">
+            <a:avLst/>
+          </a:prstGeom>
+          <a:noFill/>
+          <a:ln/>
+        </p:spPr>
+        <p:txBody>
+          <a:bodyPr wrap="square" lIns="0" tIns="0" rIns="0" bIns="0" rtlCol="0" anchor="ctr"/>
+          <a:lstStyle/>
+          <a:p>
+            <a:pPr indent="0" marL="0">
+              <a:buNone/>
+            </a:pPr>
+            <a:r>
+              <a:rPr lang="en-US" sz="1200" dirty="0">
+                <a:solidFill>
+                  <a:srgbClr val="C9BEAC"/>
+                </a:solidFill>
+                <a:latin typeface="Calibri" pitchFamily="34" charset="0"/>
+                <a:ea typeface="Calibri" pitchFamily="34" charset="-122"/>
+                <a:cs typeface="Calibri" pitchFamily="34" charset="-120"/>
+              </a:rPr>
+              <a:t>Tipografia de vinhos premium</a:t>
+            </a:r>
+            <a:endParaRPr lang="en-US" sz="1200" dirty="0"/>
+          </a:p>
+        </p:txBody>
+      </p:sp>
+      <p:sp>
+        <p:nvSpPr>
+          <p:cNvPr id="18" name="Shape 16"/>
+          <p:cNvSpPr/>
+          <p:nvPr/>
+        </p:nvSpPr>
+        <p:spPr>
+          <a:xfrm>
+            <a:off x="640080" y="4251960"/>
+            <a:ext cx="5257800" cy="2103120"/>
           </a:xfrm>
           <a:prstGeom prst="rect">
             <a:avLst/>
@@ -6027,30 +5168,30 @@
       </p:sp>
       <p:sp>
         <p:nvSpPr>
-          <p:cNvPr id="13" name="Text 11"/>
-          <p:cNvSpPr txBox="1"/>
-          <p:nvPr/>
-        </p:nvSpPr>
-        <p:spPr>
-          <a:xfrm>
-            <a:off x="896112" y="4233672"/>
-            <a:ext cx="1005840" cy="548640"/>
-          </a:xfrm>
-          <a:prstGeom prst="rect">
-            <a:avLst/>
-          </a:prstGeom>
-          <a:noFill/>
-          <a:ln/>
-        </p:spPr>
-        <p:txBody>
-          <a:bodyPr wrap="square" lIns="0" tIns="0" rIns="0" bIns="0" rtlCol="0" anchor="ctr"/>
-          <a:lstStyle/>
-          <a:p>
-            <a:pPr indent="0" marL="0">
-              <a:buNone/>
-            </a:pPr>
-            <a:r>
-              <a:rPr lang="en-US" sz="2600" b="1" dirty="0">
+          <p:cNvPr id="19" name="Text 17"/>
+          <p:cNvSpPr txBox="1"/>
+          <p:nvPr/>
+        </p:nvSpPr>
+        <p:spPr>
+          <a:xfrm>
+            <a:off x="914400" y="4453128"/>
+            <a:ext cx="1005840" cy="457200"/>
+          </a:xfrm>
+          <a:prstGeom prst="rect">
+            <a:avLst/>
+          </a:prstGeom>
+          <a:noFill/>
+          <a:ln/>
+        </p:spPr>
+        <p:txBody>
+          <a:bodyPr wrap="square" lIns="0" tIns="0" rIns="0" bIns="0" rtlCol="0" anchor="ctr"/>
+          <a:lstStyle/>
+          <a:p>
+            <a:pPr indent="0" marL="0">
+              <a:buNone/>
+            </a:pPr>
+            <a:r>
+              <a:rPr lang="en-US" sz="2200" b="1" dirty="0">
                 <a:solidFill>
                   <a:srgbClr val="9C7C3F"/>
                 </a:solidFill>
@@ -6060,20 +5201,20 @@
               </a:rPr>
               <a:t>03</a:t>
             </a:r>
-            <a:endParaRPr lang="en-US" sz="2600" dirty="0"/>
-          </a:p>
-        </p:txBody>
-      </p:sp>
-      <p:sp>
-        <p:nvSpPr>
-          <p:cNvPr id="14" name="Text 12"/>
-          <p:cNvSpPr txBox="1"/>
-          <p:nvPr/>
-        </p:nvSpPr>
-        <p:spPr>
-          <a:xfrm>
-            <a:off x="896112" y="4727448"/>
-            <a:ext cx="4745736" cy="365760"/>
+            <a:endParaRPr lang="en-US" sz="2200" dirty="0"/>
+          </a:p>
+        </p:txBody>
+      </p:sp>
+      <p:sp>
+        <p:nvSpPr>
+          <p:cNvPr id="20" name="Text 18"/>
+          <p:cNvSpPr txBox="1"/>
+          <p:nvPr/>
+        </p:nvSpPr>
+        <p:spPr>
+          <a:xfrm>
+            <a:off x="914400" y="4910328"/>
+            <a:ext cx="4709160" cy="365760"/>
           </a:xfrm>
           <a:prstGeom prst="rect">
             <a:avLst/>
@@ -6105,33 +5246,50 @@
       </p:sp>
       <p:sp>
         <p:nvSpPr>
-          <p:cNvPr id="15" name="Text 13"/>
-          <p:cNvSpPr txBox="1"/>
-          <p:nvPr/>
-        </p:nvSpPr>
-        <p:spPr>
-          <a:xfrm>
-            <a:off x="896112" y="5093208"/>
-            <a:ext cx="4745736" cy="868680"/>
-          </a:xfrm>
-          <a:prstGeom prst="rect">
-            <a:avLst/>
-          </a:prstGeom>
-          <a:noFill/>
-          <a:ln/>
-        </p:spPr>
-        <p:txBody>
-          <a:bodyPr wrap="square" lIns="0" tIns="0" rIns="0" bIns="0" rtlCol="0" anchor="ctr"/>
-          <a:lstStyle/>
-          <a:p>
-            <a:pPr indent="0" marL="0">
-              <a:lnSpc>
-                <a:spcPct val="118000"/>
-              </a:lnSpc>
-              <a:buNone/>
-            </a:pPr>
-            <a:r>
-              <a:rPr lang="en-US" sz="1080" dirty="0">
+          <p:cNvPr id="21" name="Shape 19"/>
+          <p:cNvSpPr/>
+          <p:nvPr/>
+        </p:nvSpPr>
+        <p:spPr>
+          <a:xfrm>
+            <a:off x="914400" y="5404104"/>
+            <a:ext cx="118872" cy="118872"/>
+          </a:xfrm>
+          <a:prstGeom prst="rect">
+            <a:avLst/>
+          </a:prstGeom>
+          <a:solidFill>
+            <a:srgbClr val="C6A15B"/>
+          </a:solidFill>
+          <a:ln/>
+        </p:spPr>
+      </p:sp>
+      <p:sp>
+        <p:nvSpPr>
+          <p:cNvPr id="22" name="Text 20"/>
+          <p:cNvSpPr txBox="1"/>
+          <p:nvPr/>
+        </p:nvSpPr>
+        <p:spPr>
+          <a:xfrm>
+            <a:off x="1143000" y="5276088"/>
+            <a:ext cx="4480560" cy="320040"/>
+          </a:xfrm>
+          <a:prstGeom prst="rect">
+            <a:avLst/>
+          </a:prstGeom>
+          <a:noFill/>
+          <a:ln/>
+        </p:spPr>
+        <p:txBody>
+          <a:bodyPr wrap="square" lIns="0" tIns="0" rIns="0" bIns="0" rtlCol="0" anchor="ctr"/>
+          <a:lstStyle/>
+          <a:p>
+            <a:pPr indent="0" marL="0">
+              <a:buNone/>
+            </a:pPr>
+            <a:r>
+              <a:rPr lang="en-US" sz="1200" dirty="0">
                 <a:solidFill>
                   <a:srgbClr val="C9BEAC"/>
                 </a:solidFill>
@@ -6139,22 +5297,81 @@
                 <a:ea typeface="Calibri" pitchFamily="34" charset="-122"/>
                 <a:cs typeface="Calibri" pitchFamily="34" charset="-120"/>
               </a:rPr>
-              <a:t>O formato “livro” é incomum na categoria de chocolates e cria distintividade visual; a semente de cacau dourada funciona como âncora mnemônica simples e repetível.</a:t>
-            </a:r>
-            <a:endParaRPr lang="en-US" sz="1080" dirty="0"/>
-          </a:p>
-        </p:txBody>
-      </p:sp>
-      <p:sp>
-        <p:nvSpPr>
-          <p:cNvPr id="16" name="Shape 14"/>
+              <a:t>Formato “livro” incomum</a:t>
+            </a:r>
+            <a:endParaRPr lang="en-US" sz="1200" dirty="0"/>
+          </a:p>
+        </p:txBody>
+      </p:sp>
+      <p:sp>
+        <p:nvSpPr>
+          <p:cNvPr id="23" name="Shape 21"/>
           <p:cNvSpPr/>
           <p:nvPr/>
         </p:nvSpPr>
         <p:spPr>
           <a:xfrm>
-            <a:off x="6172200" y="4069080"/>
-            <a:ext cx="5257800" cy="1965960"/>
+            <a:off x="914400" y="5769864"/>
+            <a:ext cx="118872" cy="118872"/>
+          </a:xfrm>
+          <a:prstGeom prst="rect">
+            <a:avLst/>
+          </a:prstGeom>
+          <a:solidFill>
+            <a:srgbClr val="C6A15B"/>
+          </a:solidFill>
+          <a:ln/>
+        </p:spPr>
+      </p:sp>
+      <p:sp>
+        <p:nvSpPr>
+          <p:cNvPr id="24" name="Text 22"/>
+          <p:cNvSpPr txBox="1"/>
+          <p:nvPr/>
+        </p:nvSpPr>
+        <p:spPr>
+          <a:xfrm>
+            <a:off x="1143000" y="5641848"/>
+            <a:ext cx="4480560" cy="320040"/>
+          </a:xfrm>
+          <a:prstGeom prst="rect">
+            <a:avLst/>
+          </a:prstGeom>
+          <a:noFill/>
+          <a:ln/>
+        </p:spPr>
+        <p:txBody>
+          <a:bodyPr wrap="square" lIns="0" tIns="0" rIns="0" bIns="0" rtlCol="0" anchor="ctr"/>
+          <a:lstStyle/>
+          <a:p>
+            <a:pPr indent="0" marL="0">
+              <a:buNone/>
+            </a:pPr>
+            <a:r>
+              <a:rPr lang="en-US" sz="1200" dirty="0">
+                <a:solidFill>
+                  <a:srgbClr val="C9BEAC"/>
+                </a:solidFill>
+                <a:latin typeface="Calibri" pitchFamily="34" charset="0"/>
+                <a:ea typeface="Calibri" pitchFamily="34" charset="-122"/>
+                <a:cs typeface="Calibri" pitchFamily="34" charset="-120"/>
+              </a:rPr>
+              <a:t>Semente de cacau dourada</a:t>
+            </a:r>
+            <a:endParaRPr lang="en-US" sz="1200" dirty="0"/>
+          </a:p>
+        </p:txBody>
+      </p:sp>
+      <p:sp>
+        <p:nvSpPr>
+          <p:cNvPr id="25" name="Shape 23"/>
+          <p:cNvSpPr/>
+          <p:nvPr/>
+        </p:nvSpPr>
+        <p:spPr>
+          <a:xfrm>
+            <a:off x="6172200" y="4251960"/>
+            <a:ext cx="5257800" cy="2103120"/>
           </a:xfrm>
           <a:prstGeom prst="rect">
             <a:avLst/>
@@ -6167,30 +5384,30 @@
       </p:sp>
       <p:sp>
         <p:nvSpPr>
-          <p:cNvPr id="17" name="Text 15"/>
-          <p:cNvSpPr txBox="1"/>
-          <p:nvPr/>
-        </p:nvSpPr>
-        <p:spPr>
-          <a:xfrm>
-            <a:off x="6428232" y="4233672"/>
-            <a:ext cx="1005840" cy="548640"/>
-          </a:xfrm>
-          <a:prstGeom prst="rect">
-            <a:avLst/>
-          </a:prstGeom>
-          <a:noFill/>
-          <a:ln/>
-        </p:spPr>
-        <p:txBody>
-          <a:bodyPr wrap="square" lIns="0" tIns="0" rIns="0" bIns="0" rtlCol="0" anchor="ctr"/>
-          <a:lstStyle/>
-          <a:p>
-            <a:pPr indent="0" marL="0">
-              <a:buNone/>
-            </a:pPr>
-            <a:r>
-              <a:rPr lang="en-US" sz="2600" b="1" dirty="0">
+          <p:cNvPr id="26" name="Text 24"/>
+          <p:cNvSpPr txBox="1"/>
+          <p:nvPr/>
+        </p:nvSpPr>
+        <p:spPr>
+          <a:xfrm>
+            <a:off x="6446520" y="4453128"/>
+            <a:ext cx="1005840" cy="457200"/>
+          </a:xfrm>
+          <a:prstGeom prst="rect">
+            <a:avLst/>
+          </a:prstGeom>
+          <a:noFill/>
+          <a:ln/>
+        </p:spPr>
+        <p:txBody>
+          <a:bodyPr wrap="square" lIns="0" tIns="0" rIns="0" bIns="0" rtlCol="0" anchor="ctr"/>
+          <a:lstStyle/>
+          <a:p>
+            <a:pPr indent="0" marL="0">
+              <a:buNone/>
+            </a:pPr>
+            <a:r>
+              <a:rPr lang="en-US" sz="2200" b="1" dirty="0">
                 <a:solidFill>
                   <a:srgbClr val="9C7C3F"/>
                 </a:solidFill>
@@ -6200,20 +5417,20 @@
               </a:rPr>
               <a:t>04</a:t>
             </a:r>
-            <a:endParaRPr lang="en-US" sz="2600" dirty="0"/>
-          </a:p>
-        </p:txBody>
-      </p:sp>
-      <p:sp>
-        <p:nvSpPr>
-          <p:cNvPr id="18" name="Text 16"/>
-          <p:cNvSpPr txBox="1"/>
-          <p:nvPr/>
-        </p:nvSpPr>
-        <p:spPr>
-          <a:xfrm>
-            <a:off x="6428232" y="4727448"/>
-            <a:ext cx="4745736" cy="365760"/>
+            <a:endParaRPr lang="en-US" sz="2200" dirty="0"/>
+          </a:p>
+        </p:txBody>
+      </p:sp>
+      <p:sp>
+        <p:nvSpPr>
+          <p:cNvPr id="27" name="Text 25"/>
+          <p:cNvSpPr txBox="1"/>
+          <p:nvPr/>
+        </p:nvSpPr>
+        <p:spPr>
+          <a:xfrm>
+            <a:off x="6446520" y="4910328"/>
+            <a:ext cx="4709160" cy="365760"/>
           </a:xfrm>
           <a:prstGeom prst="rect">
             <a:avLst/>
@@ -6245,33 +5462,50 @@
       </p:sp>
       <p:sp>
         <p:nvSpPr>
-          <p:cNvPr id="19" name="Text 17"/>
-          <p:cNvSpPr txBox="1"/>
-          <p:nvPr/>
-        </p:nvSpPr>
-        <p:spPr>
-          <a:xfrm>
-            <a:off x="6428232" y="5093208"/>
-            <a:ext cx="4745736" cy="868680"/>
-          </a:xfrm>
-          <a:prstGeom prst="rect">
-            <a:avLst/>
-          </a:prstGeom>
-          <a:noFill/>
-          <a:ln/>
-        </p:spPr>
-        <p:txBody>
-          <a:bodyPr wrap="square" lIns="0" tIns="0" rIns="0" bIns="0" rtlCol="0" anchor="ctr"/>
-          <a:lstStyle/>
-          <a:p>
-            <a:pPr indent="0" marL="0">
-              <a:lnSpc>
-                <a:spcPct val="118000"/>
-              </a:lnSpc>
-              <a:buNone/>
-            </a:pPr>
-            <a:r>
-              <a:rPr lang="en-US" sz="1080" dirty="0">
+          <p:cNvPr id="28" name="Shape 26"/>
+          <p:cNvSpPr/>
+          <p:nvPr/>
+        </p:nvSpPr>
+        <p:spPr>
+          <a:xfrm>
+            <a:off x="6446520" y="5404104"/>
+            <a:ext cx="118872" cy="118872"/>
+          </a:xfrm>
+          <a:prstGeom prst="rect">
+            <a:avLst/>
+          </a:prstGeom>
+          <a:solidFill>
+            <a:srgbClr val="C6A15B"/>
+          </a:solidFill>
+          <a:ln/>
+        </p:spPr>
+      </p:sp>
+      <p:sp>
+        <p:nvSpPr>
+          <p:cNvPr id="29" name="Text 27"/>
+          <p:cNvSpPr txBox="1"/>
+          <p:nvPr/>
+        </p:nvSpPr>
+        <p:spPr>
+          <a:xfrm>
+            <a:off x="6675120" y="5276088"/>
+            <a:ext cx="4480560" cy="320040"/>
+          </a:xfrm>
+          <a:prstGeom prst="rect">
+            <a:avLst/>
+          </a:prstGeom>
+          <a:noFill/>
+          <a:ln/>
+        </p:spPr>
+        <p:txBody>
+          <a:bodyPr wrap="square" lIns="0" tIns="0" rIns="0" bIns="0" rtlCol="0" anchor="ctr"/>
+          <a:lstStyle/>
+          <a:p>
+            <a:pPr indent="0" marL="0">
+              <a:buNone/>
+            </a:pPr>
+            <a:r>
+              <a:rPr lang="en-US" sz="1200" dirty="0">
                 <a:solidFill>
                   <a:srgbClr val="C9BEAC"/>
                 </a:solidFill>
@@ -6279,45 +5513,104 @@
                 <a:ea typeface="Calibri" pitchFamily="34" charset="-122"/>
                 <a:cs typeface="Calibri" pitchFamily="34" charset="-120"/>
               </a:rPr>
-              <a:t>As caixas gaveta e com janela transformam a compra em experiência de descoberta, e o cartão interno (“O verdadeiro chocolate nasce da terra, do tempo e do cuidado”) cria conexão emocional que justifica o preço premium.</a:t>
-            </a:r>
-            <a:endParaRPr lang="en-US" sz="1080" dirty="0"/>
-          </a:p>
-        </p:txBody>
-      </p:sp>
-      <p:sp>
-        <p:nvSpPr>
-          <p:cNvPr id="20" name="Text 18"/>
-          <p:cNvSpPr txBox="1"/>
-          <p:nvPr/>
-        </p:nvSpPr>
-        <p:spPr>
-          <a:xfrm>
-            <a:off x="11274552" y="6355080"/>
-            <a:ext cx="548640" cy="320040"/>
-          </a:xfrm>
-          <a:prstGeom prst="rect">
-            <a:avLst/>
-          </a:prstGeom>
-          <a:noFill/>
-          <a:ln/>
-        </p:spPr>
-        <p:txBody>
-          <a:bodyPr wrap="square" lIns="0" tIns="0" rIns="0" bIns="0" rtlCol="0" anchor="ctr"/>
-          <a:lstStyle/>
-          <a:p>
-            <a:pPr algn="r" indent="0" marL="0">
-              <a:buNone/>
-            </a:pPr>
-            <a:r>
-              <a:rPr lang="en-US" sz="1000" dirty="0">
-                <a:solidFill>
-                  <a:srgbClr val="9C7C3F"/>
+              <a:t>Caixa gaveta/janela = descoberta</a:t>
+            </a:r>
+            <a:endParaRPr lang="en-US" sz="1200" dirty="0"/>
+          </a:p>
+        </p:txBody>
+      </p:sp>
+      <p:sp>
+        <p:nvSpPr>
+          <p:cNvPr id="30" name="Shape 28"/>
+          <p:cNvSpPr/>
+          <p:nvPr/>
+        </p:nvSpPr>
+        <p:spPr>
+          <a:xfrm>
+            <a:off x="6446520" y="5769864"/>
+            <a:ext cx="118872" cy="118872"/>
+          </a:xfrm>
+          <a:prstGeom prst="rect">
+            <a:avLst/>
+          </a:prstGeom>
+          <a:solidFill>
+            <a:srgbClr val="C6A15B"/>
+          </a:solidFill>
+          <a:ln/>
+        </p:spPr>
+      </p:sp>
+      <p:sp>
+        <p:nvSpPr>
+          <p:cNvPr id="31" name="Text 29"/>
+          <p:cNvSpPr txBox="1"/>
+          <p:nvPr/>
+        </p:nvSpPr>
+        <p:spPr>
+          <a:xfrm>
+            <a:off x="6675120" y="5641848"/>
+            <a:ext cx="4480560" cy="320040"/>
+          </a:xfrm>
+          <a:prstGeom prst="rect">
+            <a:avLst/>
+          </a:prstGeom>
+          <a:noFill/>
+          <a:ln/>
+        </p:spPr>
+        <p:txBody>
+          <a:bodyPr wrap="square" lIns="0" tIns="0" rIns="0" bIns="0" rtlCol="0" anchor="ctr"/>
+          <a:lstStyle/>
+          <a:p>
+            <a:pPr indent="0" marL="0">
+              <a:buNone/>
+            </a:pPr>
+            <a:r>
+              <a:rPr lang="en-US" sz="1200" dirty="0">
+                <a:solidFill>
+                  <a:srgbClr val="C9BEAC"/>
                 </a:solidFill>
                 <a:latin typeface="Calibri" pitchFamily="34" charset="0"/>
                 <a:ea typeface="Calibri" pitchFamily="34" charset="-122"/>
                 <a:cs typeface="Calibri" pitchFamily="34" charset="-120"/>
               </a:rPr>
+              <a:t>Cartão com frase de propósito</a:t>
+            </a:r>
+            <a:endParaRPr lang="en-US" sz="1200" dirty="0"/>
+          </a:p>
+        </p:txBody>
+      </p:sp>
+      <p:sp>
+        <p:nvSpPr>
+          <p:cNvPr id="32" name="Text 30"/>
+          <p:cNvSpPr txBox="1"/>
+          <p:nvPr/>
+        </p:nvSpPr>
+        <p:spPr>
+          <a:xfrm>
+            <a:off x="11274552" y="6400800"/>
+            <a:ext cx="548640" cy="274320"/>
+          </a:xfrm>
+          <a:prstGeom prst="rect">
+            <a:avLst/>
+          </a:prstGeom>
+          <a:noFill/>
+          <a:ln/>
+        </p:spPr>
+        <p:txBody>
+          <a:bodyPr wrap="square" lIns="0" tIns="0" rIns="0" bIns="0" rtlCol="0" anchor="ctr"/>
+          <a:lstStyle/>
+          <a:p>
+            <a:pPr algn="r" indent="0" marL="0">
+              <a:buNone/>
+            </a:pPr>
+            <a:r>
+              <a:rPr lang="en-US" sz="1000" dirty="0">
+                <a:solidFill>
+                  <a:srgbClr val="9C7C3F"/>
+                </a:solidFill>
+                <a:latin typeface="Calibri" pitchFamily="34" charset="0"/>
+                <a:ea typeface="Calibri" pitchFamily="34" charset="-122"/>
+                <a:cs typeface="Calibri" pitchFamily="34" charset="-120"/>
+              </a:rPr>
               <a:t>07</a:t>
             </a:r>
             <a:endParaRPr lang="en-US" sz="1000" dirty="0"/>
@@ -6326,14 +5619,14 @@
       </p:sp>
       <p:sp>
         <p:nvSpPr>
-          <p:cNvPr id="21" name="Text 19"/>
-          <p:cNvSpPr txBox="1"/>
-          <p:nvPr/>
-        </p:nvSpPr>
-        <p:spPr>
-          <a:xfrm>
-            <a:off x="640080" y="6355080"/>
-            <a:ext cx="2743200" cy="320040"/>
+          <p:cNvPr id="33" name="Text 31"/>
+          <p:cNvSpPr txBox="1"/>
+          <p:nvPr/>
+        </p:nvSpPr>
+        <p:spPr>
+          <a:xfrm>
+            <a:off x="640080" y="6400800"/>
+            <a:ext cx="2743200" cy="274320"/>
           </a:xfrm>
           <a:prstGeom prst="rect">
             <a:avLst/>
@@ -6448,7 +5741,7 @@
         </p:nvSpPr>
         <p:spPr>
           <a:xfrm>
-            <a:off x="5577840" y="1965960"/>
+            <a:off x="5577840" y="2286000"/>
             <a:ext cx="5852160" cy="365760"/>
           </a:xfrm>
           <a:prstGeom prst="rect">
@@ -6487,7 +5780,7 @@
         </p:nvSpPr>
         <p:spPr>
           <a:xfrm>
-            <a:off x="5532120" y="2377440"/>
+            <a:off x="5532120" y="2697480"/>
             <a:ext cx="5943600" cy="1920240"/>
           </a:xfrm>
           <a:prstGeom prst="rect">
@@ -6569,8 +5862,8 @@
         </p:nvSpPr>
         <p:spPr>
           <a:xfrm>
-            <a:off x="5577840" y="4434840"/>
-            <a:ext cx="5806440" cy="1463040"/>
+            <a:off x="5577840" y="4709160"/>
+            <a:ext cx="5806440" cy="822960"/>
           </a:xfrm>
           <a:prstGeom prst="rect">
             <a:avLst/>
@@ -6589,7 +5882,7 @@
               <a:buNone/>
             </a:pPr>
             <a:r>
-              <a:rPr lang="en-US" sz="1350" dirty="0">
+              <a:rPr lang="en-US" sz="1400" i="1" dirty="0">
                 <a:solidFill>
                   <a:srgbClr val="C9BEAC"/>
                 </a:solidFill>
@@ -6597,9 +5890,29 @@
                 <a:ea typeface="Calibri" pitchFamily="34" charset="-122"/>
                 <a:cs typeface="Calibri" pitchFamily="34" charset="-120"/>
               </a:rPr>
-              <a:t>Ao unir material, cor, formato, acabamento e tipografia em torno de um único conceito — exclusividade com tradição — a proposta transforma a caixa Cacau Raro em argumento de venda: o consumidor decide que o chocolate é premium antes de provar o primeiro pedaço.</a:t>
-            </a:r>
-            <a:endParaRPr lang="en-US" sz="1350" dirty="0"/>
+              <a:t>O consumidor decide que o chocolate é premium</a:t>
+            </a:r>
+            <a:endParaRPr lang="en-US" sz="1400" dirty="0"/>
+          </a:p>
+          <a:p>
+            <a:pPr indent="0" marL="0">
+              <a:lnSpc>
+                <a:spcPct val="135000"/>
+              </a:lnSpc>
+              <a:buNone/>
+            </a:pPr>
+            <a:r>
+              <a:rPr lang="en-US" sz="1400" i="1" dirty="0">
+                <a:solidFill>
+                  <a:srgbClr val="C9BEAC"/>
+                </a:solidFill>
+                <a:latin typeface="Calibri" pitchFamily="34" charset="0"/>
+                <a:ea typeface="Calibri" pitchFamily="34" charset="-122"/>
+                <a:cs typeface="Calibri" pitchFamily="34" charset="-120"/>
+              </a:rPr>
+              <a:t>antes de provar o primeiro pedaço.</a:t>
+            </a:r>
+            <a:endParaRPr lang="en-US" sz="1400" dirty="0"/>
           </a:p>
         </p:txBody>
       </p:sp>

--- a/Cacau_Raro_Percepcao_Consumidor.pptx
+++ b/Cacau_Raro_Percepcao_Consumidor.pptx
@@ -1523,29 +1523,7 @@
       </p:pic>
       <p:sp>
         <p:nvSpPr>
-          <p:cNvPr id="3" name="Shape 0"/>
-          <p:cNvSpPr/>
-          <p:nvPr/>
-        </p:nvSpPr>
-        <p:spPr>
-          <a:xfrm>
-            <a:off x="6903720" y="0"/>
-            <a:ext cx="457200" cy="6858000"/>
-          </a:xfrm>
-          <a:prstGeom prst="rect">
-            <a:avLst/>
-          </a:prstGeom>
-          <a:solidFill>
-            <a:srgbClr val="17110D">
-              <a:alpha val="85000"/>
-            </a:srgbClr>
-          </a:solidFill>
-          <a:ln/>
-        </p:spPr>
-      </p:sp>
-      <p:sp>
-        <p:nvSpPr>
-          <p:cNvPr id="4" name="Text 1"/>
+          <p:cNvPr id="3" name="Text 0"/>
           <p:cNvSpPr txBox="1"/>
           <p:nvPr/>
         </p:nvSpPr>
@@ -1584,7 +1562,7 @@
       </p:sp>
       <p:sp>
         <p:nvSpPr>
-          <p:cNvPr id="5" name="Text 2"/>
+          <p:cNvPr id="4" name="Text 1"/>
           <p:cNvSpPr txBox="1"/>
           <p:nvPr/>
         </p:nvSpPr>
@@ -1623,7 +1601,7 @@
       </p:sp>
       <p:sp>
         <p:nvSpPr>
-          <p:cNvPr id="6" name="Text 3"/>
+          <p:cNvPr id="5" name="Text 2"/>
           <p:cNvSpPr txBox="1"/>
           <p:nvPr/>
         </p:nvSpPr>
@@ -1662,7 +1640,7 @@
       </p:sp>
       <p:sp>
         <p:nvSpPr>
-          <p:cNvPr id="7" name="Text 4"/>
+          <p:cNvPr id="6" name="Text 3"/>
           <p:cNvSpPr txBox="1"/>
           <p:nvPr/>
         </p:nvSpPr>
@@ -1834,57 +1812,140 @@
       </p:sp>
       <p:sp>
         <p:nvSpPr>
-          <p:cNvPr id="4" name="Shape 2"/>
-          <p:cNvSpPr/>
-          <p:nvPr/>
-        </p:nvSpPr>
-        <p:spPr>
-          <a:xfrm>
-            <a:off x="640080" y="2103120"/>
-            <a:ext cx="118872" cy="118872"/>
-          </a:xfrm>
-          <a:prstGeom prst="rect">
-            <a:avLst/>
-          </a:prstGeom>
-          <a:solidFill>
-            <a:srgbClr val="C6A15B"/>
-          </a:solidFill>
-          <a:ln/>
-        </p:spPr>
-      </p:sp>
-      <p:sp>
-        <p:nvSpPr>
-          <p:cNvPr id="5" name="Text 3"/>
-          <p:cNvSpPr txBox="1"/>
-          <p:nvPr/>
-        </p:nvSpPr>
-        <p:spPr>
-          <a:xfrm>
-            <a:off x="960120" y="1938528"/>
-            <a:ext cx="4800600" cy="365760"/>
-          </a:xfrm>
-          <a:prstGeom prst="rect">
-            <a:avLst/>
-          </a:prstGeom>
-          <a:noFill/>
-          <a:ln/>
-        </p:spPr>
-        <p:txBody>
-          <a:bodyPr wrap="square" lIns="0" tIns="0" rIns="0" bIns="0" rtlCol="0" anchor="ctr"/>
-          <a:lstStyle/>
-          <a:p>
-            <a:pPr indent="0" marL="0">
-              <a:buNone/>
-            </a:pPr>
-            <a:r>
-              <a:rPr lang="en-US" sz="1800" b="1" dirty="0">
-                <a:solidFill>
-                  <a:srgbClr val="EFE6D8"/>
+          <p:cNvPr id="4" name="Text 2"/>
+          <p:cNvSpPr txBox="1"/>
+          <p:nvPr/>
+        </p:nvSpPr>
+        <p:spPr>
+          <a:xfrm>
+            <a:off x="640080" y="1508760"/>
+            <a:ext cx="5120640" cy="365760"/>
+          </a:xfrm>
+          <a:prstGeom prst="rect">
+            <a:avLst/>
+          </a:prstGeom>
+          <a:noFill/>
+          <a:ln/>
+        </p:spPr>
+        <p:txBody>
+          <a:bodyPr wrap="square" lIns="0" tIns="0" rIns="0" bIns="0" rtlCol="0" anchor="ctr"/>
+          <a:lstStyle/>
+          <a:p>
+            <a:pPr indent="0" marL="0">
+              <a:buNone/>
+            </a:pPr>
+            <a:r>
+              <a:rPr lang="en-US" sz="1400" i="1" dirty="0">
+                <a:solidFill>
+                  <a:srgbClr val="C6A15B"/>
                 </a:solidFill>
                 <a:latin typeface="Cambria" pitchFamily="34" charset="0"/>
                 <a:ea typeface="Cambria" pitchFamily="34" charset="-122"/>
                 <a:cs typeface="Cambria" pitchFamily="34" charset="-120"/>
               </a:rPr>
+              <a:t>Cinco decisões, um único conceito.</a:t>
+            </a:r>
+            <a:endParaRPr lang="en-US" sz="1400" dirty="0"/>
+          </a:p>
+        </p:txBody>
+      </p:sp>
+      <p:sp>
+        <p:nvSpPr>
+          <p:cNvPr id="5" name="Shape 3"/>
+          <p:cNvSpPr/>
+          <p:nvPr/>
+        </p:nvSpPr>
+        <p:spPr>
+          <a:xfrm>
+            <a:off x="640080" y="2148840"/>
+            <a:ext cx="548640" cy="548640"/>
+          </a:xfrm>
+          <a:prstGeom prst="rect">
+            <a:avLst/>
+          </a:prstGeom>
+          <a:solidFill>
+            <a:srgbClr val="3C2A1C"/>
+          </a:solidFill>
+          <a:ln w="12700">
+            <a:solidFill>
+              <a:srgbClr val="9C7C3F"/>
+            </a:solidFill>
+            <a:prstDash val="solid"/>
+          </a:ln>
+        </p:spPr>
+      </p:sp>
+      <p:sp>
+        <p:nvSpPr>
+          <p:cNvPr id="6" name="Text 4"/>
+          <p:cNvSpPr txBox="1"/>
+          <p:nvPr/>
+        </p:nvSpPr>
+        <p:spPr>
+          <a:xfrm>
+            <a:off x="640080" y="2148840"/>
+            <a:ext cx="548640" cy="548640"/>
+          </a:xfrm>
+          <a:prstGeom prst="rect">
+            <a:avLst/>
+          </a:prstGeom>
+          <a:noFill/>
+          <a:ln/>
+        </p:spPr>
+        <p:txBody>
+          <a:bodyPr wrap="square" lIns="0" tIns="0" rIns="0" bIns="0" rtlCol="0" anchor="ctr"/>
+          <a:lstStyle/>
+          <a:p>
+            <a:pPr algn="ctr" indent="0" marL="0">
+              <a:buNone/>
+            </a:pPr>
+            <a:r>
+              <a:rPr lang="en-US" sz="1500" b="1" dirty="0">
+                <a:solidFill>
+                  <a:srgbClr val="C6A15B"/>
+                </a:solidFill>
+                <a:latin typeface="Cambria" pitchFamily="34" charset="0"/>
+                <a:ea typeface="Cambria" pitchFamily="34" charset="-122"/>
+                <a:cs typeface="Cambria" pitchFamily="34" charset="-120"/>
+              </a:rPr>
+              <a:t>01</a:t>
+            </a:r>
+            <a:endParaRPr lang="en-US" sz="1500" dirty="0"/>
+          </a:p>
+        </p:txBody>
+      </p:sp>
+      <p:sp>
+        <p:nvSpPr>
+          <p:cNvPr id="7" name="Text 5"/>
+          <p:cNvSpPr txBox="1"/>
+          <p:nvPr/>
+        </p:nvSpPr>
+        <p:spPr>
+          <a:xfrm>
+            <a:off x="1417320" y="2093976"/>
+            <a:ext cx="4343400" cy="365760"/>
+          </a:xfrm>
+          <a:prstGeom prst="rect">
+            <a:avLst/>
+          </a:prstGeom>
+          <a:noFill/>
+          <a:ln/>
+        </p:spPr>
+        <p:txBody>
+          <a:bodyPr wrap="square" lIns="0" tIns="0" rIns="0" bIns="0" rtlCol="0" anchor="ctr"/>
+          <a:lstStyle/>
+          <a:p>
+            <a:pPr indent="0" marL="0">
+              <a:buNone/>
+            </a:pPr>
+            <a:r>
+              <a:rPr lang="en-US" sz="1800" b="1" dirty="0">
+                <a:solidFill>
+                  <a:srgbClr val="EFE6D8"/>
+                </a:solidFill>
+                <a:latin typeface="Cambria" pitchFamily="34" charset="0"/>
+                <a:ea typeface="Cambria" pitchFamily="34" charset="-122"/>
+                <a:cs typeface="Cambria" pitchFamily="34" charset="-120"/>
+              </a:rPr>
               <a:t>Material</a:t>
             </a:r>
             <a:endParaRPr lang="en-US" sz="1800" dirty="0"/>
@@ -1893,14 +1954,14 @@
       </p:sp>
       <p:sp>
         <p:nvSpPr>
-          <p:cNvPr id="6" name="Text 4"/>
-          <p:cNvSpPr txBox="1"/>
-          <p:nvPr/>
-        </p:nvSpPr>
-        <p:spPr>
-          <a:xfrm>
-            <a:off x="960120" y="2304288"/>
-            <a:ext cx="4800600" cy="365760"/>
+          <p:cNvPr id="8" name="Text 6"/>
+          <p:cNvSpPr txBox="1"/>
+          <p:nvPr/>
+        </p:nvSpPr>
+        <p:spPr>
+          <a:xfrm>
+            <a:off x="1417320" y="2459736"/>
+            <a:ext cx="4343400" cy="365760"/>
           </a:xfrm>
           <a:prstGeom prst="rect">
             <a:avLst/>
@@ -1932,57 +1993,101 @@
       </p:sp>
       <p:sp>
         <p:nvSpPr>
-          <p:cNvPr id="7" name="Shape 5"/>
+          <p:cNvPr id="9" name="Shape 7"/>
           <p:cNvSpPr/>
           <p:nvPr/>
         </p:nvSpPr>
         <p:spPr>
           <a:xfrm>
-            <a:off x="640080" y="3063240"/>
-            <a:ext cx="118872" cy="118872"/>
+            <a:off x="640080" y="3172968"/>
+            <a:ext cx="548640" cy="548640"/>
           </a:xfrm>
           <a:prstGeom prst="rect">
             <a:avLst/>
           </a:prstGeom>
           <a:solidFill>
-            <a:srgbClr val="C6A15B"/>
+            <a:srgbClr val="3C2A1C"/>
           </a:solidFill>
-          <a:ln/>
-        </p:spPr>
-      </p:sp>
-      <p:sp>
-        <p:nvSpPr>
-          <p:cNvPr id="8" name="Text 6"/>
-          <p:cNvSpPr txBox="1"/>
-          <p:nvPr/>
-        </p:nvSpPr>
-        <p:spPr>
-          <a:xfrm>
-            <a:off x="960120" y="2898648"/>
-            <a:ext cx="4800600" cy="365760"/>
-          </a:xfrm>
-          <a:prstGeom prst="rect">
-            <a:avLst/>
-          </a:prstGeom>
-          <a:noFill/>
-          <a:ln/>
-        </p:spPr>
-        <p:txBody>
-          <a:bodyPr wrap="square" lIns="0" tIns="0" rIns="0" bIns="0" rtlCol="0" anchor="ctr"/>
-          <a:lstStyle/>
-          <a:p>
-            <a:pPr indent="0" marL="0">
-              <a:buNone/>
-            </a:pPr>
-            <a:r>
-              <a:rPr lang="en-US" sz="1800" b="1" dirty="0">
-                <a:solidFill>
-                  <a:srgbClr val="EFE6D8"/>
+          <a:ln w="12700">
+            <a:solidFill>
+              <a:srgbClr val="9C7C3F"/>
+            </a:solidFill>
+            <a:prstDash val="solid"/>
+          </a:ln>
+        </p:spPr>
+      </p:sp>
+      <p:sp>
+        <p:nvSpPr>
+          <p:cNvPr id="10" name="Text 8"/>
+          <p:cNvSpPr txBox="1"/>
+          <p:nvPr/>
+        </p:nvSpPr>
+        <p:spPr>
+          <a:xfrm>
+            <a:off x="640080" y="3172968"/>
+            <a:ext cx="548640" cy="548640"/>
+          </a:xfrm>
+          <a:prstGeom prst="rect">
+            <a:avLst/>
+          </a:prstGeom>
+          <a:noFill/>
+          <a:ln/>
+        </p:spPr>
+        <p:txBody>
+          <a:bodyPr wrap="square" lIns="0" tIns="0" rIns="0" bIns="0" rtlCol="0" anchor="ctr"/>
+          <a:lstStyle/>
+          <a:p>
+            <a:pPr algn="ctr" indent="0" marL="0">
+              <a:buNone/>
+            </a:pPr>
+            <a:r>
+              <a:rPr lang="en-US" sz="1500" b="1" dirty="0">
+                <a:solidFill>
+                  <a:srgbClr val="C6A15B"/>
                 </a:solidFill>
                 <a:latin typeface="Cambria" pitchFamily="34" charset="0"/>
                 <a:ea typeface="Cambria" pitchFamily="34" charset="-122"/>
                 <a:cs typeface="Cambria" pitchFamily="34" charset="-120"/>
               </a:rPr>
+              <a:t>02</a:t>
+            </a:r>
+            <a:endParaRPr lang="en-US" sz="1500" dirty="0"/>
+          </a:p>
+        </p:txBody>
+      </p:sp>
+      <p:sp>
+        <p:nvSpPr>
+          <p:cNvPr id="11" name="Text 9"/>
+          <p:cNvSpPr txBox="1"/>
+          <p:nvPr/>
+        </p:nvSpPr>
+        <p:spPr>
+          <a:xfrm>
+            <a:off x="1417320" y="3118104"/>
+            <a:ext cx="4343400" cy="365760"/>
+          </a:xfrm>
+          <a:prstGeom prst="rect">
+            <a:avLst/>
+          </a:prstGeom>
+          <a:noFill/>
+          <a:ln/>
+        </p:spPr>
+        <p:txBody>
+          <a:bodyPr wrap="square" lIns="0" tIns="0" rIns="0" bIns="0" rtlCol="0" anchor="ctr"/>
+          <a:lstStyle/>
+          <a:p>
+            <a:pPr indent="0" marL="0">
+              <a:buNone/>
+            </a:pPr>
+            <a:r>
+              <a:rPr lang="en-US" sz="1800" b="1" dirty="0">
+                <a:solidFill>
+                  <a:srgbClr val="EFE6D8"/>
+                </a:solidFill>
+                <a:latin typeface="Cambria" pitchFamily="34" charset="0"/>
+                <a:ea typeface="Cambria" pitchFamily="34" charset="-122"/>
+                <a:cs typeface="Cambria" pitchFamily="34" charset="-120"/>
+              </a:rPr>
               <a:t>Formato</a:t>
             </a:r>
             <a:endParaRPr lang="en-US" sz="1800" dirty="0"/>
@@ -1991,14 +2096,14 @@
       </p:sp>
       <p:sp>
         <p:nvSpPr>
-          <p:cNvPr id="9" name="Text 7"/>
-          <p:cNvSpPr txBox="1"/>
-          <p:nvPr/>
-        </p:nvSpPr>
-        <p:spPr>
-          <a:xfrm>
-            <a:off x="960120" y="3264408"/>
-            <a:ext cx="4800600" cy="365760"/>
+          <p:cNvPr id="12" name="Text 10"/>
+          <p:cNvSpPr txBox="1"/>
+          <p:nvPr/>
+        </p:nvSpPr>
+        <p:spPr>
+          <a:xfrm>
+            <a:off x="1417320" y="3483864"/>
+            <a:ext cx="4343400" cy="365760"/>
           </a:xfrm>
           <a:prstGeom prst="rect">
             <a:avLst/>
@@ -2030,57 +2135,101 @@
       </p:sp>
       <p:sp>
         <p:nvSpPr>
-          <p:cNvPr id="10" name="Shape 8"/>
+          <p:cNvPr id="13" name="Shape 11"/>
           <p:cNvSpPr/>
           <p:nvPr/>
         </p:nvSpPr>
         <p:spPr>
           <a:xfrm>
-            <a:off x="640080" y="4023360"/>
-            <a:ext cx="118872" cy="118872"/>
+            <a:off x="640080" y="4197096"/>
+            <a:ext cx="548640" cy="548640"/>
           </a:xfrm>
           <a:prstGeom prst="rect">
             <a:avLst/>
           </a:prstGeom>
           <a:solidFill>
-            <a:srgbClr val="C6A15B"/>
+            <a:srgbClr val="3C2A1C"/>
           </a:solidFill>
-          <a:ln/>
-        </p:spPr>
-      </p:sp>
-      <p:sp>
-        <p:nvSpPr>
-          <p:cNvPr id="11" name="Text 9"/>
-          <p:cNvSpPr txBox="1"/>
-          <p:nvPr/>
-        </p:nvSpPr>
-        <p:spPr>
-          <a:xfrm>
-            <a:off x="960120" y="3858768"/>
-            <a:ext cx="4800600" cy="365760"/>
-          </a:xfrm>
-          <a:prstGeom prst="rect">
-            <a:avLst/>
-          </a:prstGeom>
-          <a:noFill/>
-          <a:ln/>
-        </p:spPr>
-        <p:txBody>
-          <a:bodyPr wrap="square" lIns="0" tIns="0" rIns="0" bIns="0" rtlCol="0" anchor="ctr"/>
-          <a:lstStyle/>
-          <a:p>
-            <a:pPr indent="0" marL="0">
-              <a:buNone/>
-            </a:pPr>
-            <a:r>
-              <a:rPr lang="en-US" sz="1800" b="1" dirty="0">
-                <a:solidFill>
-                  <a:srgbClr val="EFE6D8"/>
+          <a:ln w="12700">
+            <a:solidFill>
+              <a:srgbClr val="9C7C3F"/>
+            </a:solidFill>
+            <a:prstDash val="solid"/>
+          </a:ln>
+        </p:spPr>
+      </p:sp>
+      <p:sp>
+        <p:nvSpPr>
+          <p:cNvPr id="14" name="Text 12"/>
+          <p:cNvSpPr txBox="1"/>
+          <p:nvPr/>
+        </p:nvSpPr>
+        <p:spPr>
+          <a:xfrm>
+            <a:off x="640080" y="4197096"/>
+            <a:ext cx="548640" cy="548640"/>
+          </a:xfrm>
+          <a:prstGeom prst="rect">
+            <a:avLst/>
+          </a:prstGeom>
+          <a:noFill/>
+          <a:ln/>
+        </p:spPr>
+        <p:txBody>
+          <a:bodyPr wrap="square" lIns="0" tIns="0" rIns="0" bIns="0" rtlCol="0" anchor="ctr"/>
+          <a:lstStyle/>
+          <a:p>
+            <a:pPr algn="ctr" indent="0" marL="0">
+              <a:buNone/>
+            </a:pPr>
+            <a:r>
+              <a:rPr lang="en-US" sz="1500" b="1" dirty="0">
+                <a:solidFill>
+                  <a:srgbClr val="C6A15B"/>
                 </a:solidFill>
                 <a:latin typeface="Cambria" pitchFamily="34" charset="0"/>
                 <a:ea typeface="Cambria" pitchFamily="34" charset="-122"/>
                 <a:cs typeface="Cambria" pitchFamily="34" charset="-120"/>
               </a:rPr>
+              <a:t>03</a:t>
+            </a:r>
+            <a:endParaRPr lang="en-US" sz="1500" dirty="0"/>
+          </a:p>
+        </p:txBody>
+      </p:sp>
+      <p:sp>
+        <p:nvSpPr>
+          <p:cNvPr id="15" name="Text 13"/>
+          <p:cNvSpPr txBox="1"/>
+          <p:nvPr/>
+        </p:nvSpPr>
+        <p:spPr>
+          <a:xfrm>
+            <a:off x="1417320" y="4142232"/>
+            <a:ext cx="4343400" cy="365760"/>
+          </a:xfrm>
+          <a:prstGeom prst="rect">
+            <a:avLst/>
+          </a:prstGeom>
+          <a:noFill/>
+          <a:ln/>
+        </p:spPr>
+        <p:txBody>
+          <a:bodyPr wrap="square" lIns="0" tIns="0" rIns="0" bIns="0" rtlCol="0" anchor="ctr"/>
+          <a:lstStyle/>
+          <a:p>
+            <a:pPr indent="0" marL="0">
+              <a:buNone/>
+            </a:pPr>
+            <a:r>
+              <a:rPr lang="en-US" sz="1800" b="1" dirty="0">
+                <a:solidFill>
+                  <a:srgbClr val="EFE6D8"/>
+                </a:solidFill>
+                <a:latin typeface="Cambria" pitchFamily="34" charset="0"/>
+                <a:ea typeface="Cambria" pitchFamily="34" charset="-122"/>
+                <a:cs typeface="Cambria" pitchFamily="34" charset="-120"/>
+              </a:rPr>
               <a:t>Acabamento</a:t>
             </a:r>
             <a:endParaRPr lang="en-US" sz="1800" dirty="0"/>
@@ -2089,14 +2238,14 @@
       </p:sp>
       <p:sp>
         <p:nvSpPr>
-          <p:cNvPr id="12" name="Text 10"/>
-          <p:cNvSpPr txBox="1"/>
-          <p:nvPr/>
-        </p:nvSpPr>
-        <p:spPr>
-          <a:xfrm>
-            <a:off x="960120" y="4224528"/>
-            <a:ext cx="4800600" cy="365760"/>
+          <p:cNvPr id="16" name="Text 14"/>
+          <p:cNvSpPr txBox="1"/>
+          <p:nvPr/>
+        </p:nvSpPr>
+        <p:spPr>
+          <a:xfrm>
+            <a:off x="1417320" y="4507992"/>
+            <a:ext cx="4343400" cy="365760"/>
           </a:xfrm>
           <a:prstGeom prst="rect">
             <a:avLst/>
@@ -2128,57 +2277,101 @@
       </p:sp>
       <p:sp>
         <p:nvSpPr>
-          <p:cNvPr id="13" name="Shape 11"/>
+          <p:cNvPr id="17" name="Shape 15"/>
           <p:cNvSpPr/>
           <p:nvPr/>
         </p:nvSpPr>
         <p:spPr>
           <a:xfrm>
-            <a:off x="640080" y="4983480"/>
-            <a:ext cx="118872" cy="118872"/>
+            <a:off x="640080" y="5221224"/>
+            <a:ext cx="548640" cy="548640"/>
           </a:xfrm>
           <a:prstGeom prst="rect">
             <a:avLst/>
           </a:prstGeom>
           <a:solidFill>
-            <a:srgbClr val="C6A15B"/>
+            <a:srgbClr val="3C2A1C"/>
           </a:solidFill>
-          <a:ln/>
-        </p:spPr>
-      </p:sp>
-      <p:sp>
-        <p:nvSpPr>
-          <p:cNvPr id="14" name="Text 12"/>
-          <p:cNvSpPr txBox="1"/>
-          <p:nvPr/>
-        </p:nvSpPr>
-        <p:spPr>
-          <a:xfrm>
-            <a:off x="960120" y="4818888"/>
-            <a:ext cx="4800600" cy="365760"/>
-          </a:xfrm>
-          <a:prstGeom prst="rect">
-            <a:avLst/>
-          </a:prstGeom>
-          <a:noFill/>
-          <a:ln/>
-        </p:spPr>
-        <p:txBody>
-          <a:bodyPr wrap="square" lIns="0" tIns="0" rIns="0" bIns="0" rtlCol="0" anchor="ctr"/>
-          <a:lstStyle/>
-          <a:p>
-            <a:pPr indent="0" marL="0">
-              <a:buNone/>
-            </a:pPr>
-            <a:r>
-              <a:rPr lang="en-US" sz="1800" b="1" dirty="0">
-                <a:solidFill>
-                  <a:srgbClr val="EFE6D8"/>
+          <a:ln w="12700">
+            <a:solidFill>
+              <a:srgbClr val="9C7C3F"/>
+            </a:solidFill>
+            <a:prstDash val="solid"/>
+          </a:ln>
+        </p:spPr>
+      </p:sp>
+      <p:sp>
+        <p:nvSpPr>
+          <p:cNvPr id="18" name="Text 16"/>
+          <p:cNvSpPr txBox="1"/>
+          <p:nvPr/>
+        </p:nvSpPr>
+        <p:spPr>
+          <a:xfrm>
+            <a:off x="640080" y="5221224"/>
+            <a:ext cx="548640" cy="548640"/>
+          </a:xfrm>
+          <a:prstGeom prst="rect">
+            <a:avLst/>
+          </a:prstGeom>
+          <a:noFill/>
+          <a:ln/>
+        </p:spPr>
+        <p:txBody>
+          <a:bodyPr wrap="square" lIns="0" tIns="0" rIns="0" bIns="0" rtlCol="0" anchor="ctr"/>
+          <a:lstStyle/>
+          <a:p>
+            <a:pPr algn="ctr" indent="0" marL="0">
+              <a:buNone/>
+            </a:pPr>
+            <a:r>
+              <a:rPr lang="en-US" sz="1500" b="1" dirty="0">
+                <a:solidFill>
+                  <a:srgbClr val="C6A15B"/>
                 </a:solidFill>
                 <a:latin typeface="Cambria" pitchFamily="34" charset="0"/>
                 <a:ea typeface="Cambria" pitchFamily="34" charset="-122"/>
                 <a:cs typeface="Cambria" pitchFamily="34" charset="-120"/>
               </a:rPr>
+              <a:t>04</a:t>
+            </a:r>
+            <a:endParaRPr lang="en-US" sz="1500" dirty="0"/>
+          </a:p>
+        </p:txBody>
+      </p:sp>
+      <p:sp>
+        <p:nvSpPr>
+          <p:cNvPr id="19" name="Text 17"/>
+          <p:cNvSpPr txBox="1"/>
+          <p:nvPr/>
+        </p:nvSpPr>
+        <p:spPr>
+          <a:xfrm>
+            <a:off x="1417320" y="5166360"/>
+            <a:ext cx="4343400" cy="365760"/>
+          </a:xfrm>
+          <a:prstGeom prst="rect">
+            <a:avLst/>
+          </a:prstGeom>
+          <a:noFill/>
+          <a:ln/>
+        </p:spPr>
+        <p:txBody>
+          <a:bodyPr wrap="square" lIns="0" tIns="0" rIns="0" bIns="0" rtlCol="0" anchor="ctr"/>
+          <a:lstStyle/>
+          <a:p>
+            <a:pPr indent="0" marL="0">
+              <a:buNone/>
+            </a:pPr>
+            <a:r>
+              <a:rPr lang="en-US" sz="1800" b="1" dirty="0">
+                <a:solidFill>
+                  <a:srgbClr val="EFE6D8"/>
+                </a:solidFill>
+                <a:latin typeface="Cambria" pitchFamily="34" charset="0"/>
+                <a:ea typeface="Cambria" pitchFamily="34" charset="-122"/>
+                <a:cs typeface="Cambria" pitchFamily="34" charset="-120"/>
+              </a:rPr>
               <a:t>Tipografia</a:t>
             </a:r>
             <a:endParaRPr lang="en-US" sz="1800" dirty="0"/>
@@ -2187,14 +2380,14 @@
       </p:sp>
       <p:sp>
         <p:nvSpPr>
-          <p:cNvPr id="15" name="Text 13"/>
-          <p:cNvSpPr txBox="1"/>
-          <p:nvPr/>
-        </p:nvSpPr>
-        <p:spPr>
-          <a:xfrm>
-            <a:off x="960120" y="5184648"/>
-            <a:ext cx="4800600" cy="365760"/>
+          <p:cNvPr id="20" name="Text 18"/>
+          <p:cNvSpPr txBox="1"/>
+          <p:nvPr/>
+        </p:nvSpPr>
+        <p:spPr>
+          <a:xfrm>
+            <a:off x="1417320" y="5532120"/>
+            <a:ext cx="4343400" cy="365760"/>
           </a:xfrm>
           <a:prstGeom prst="rect">
             <a:avLst/>
@@ -2226,7 +2419,7 @@
       </p:sp>
       <p:pic>
         <p:nvPicPr>
-          <p:cNvPr id="16" name="Image 0" descr="/root/.claude/uploads/de37aeae-c07f-5401-92c3-714ed4fdd346/79f8e012-image.jpg">    </p:cNvPr>
+          <p:cNvPr id="21" name="Image 0" descr="/root/.claude/uploads/de37aeae-c07f-5401-92c3-714ed4fdd346/79f8e012-image.jpg">    </p:cNvPr>
           <p:cNvPicPr>
             <a:picLocks noChangeAspect="1"/>
           </p:cNvPicPr>
@@ -2249,30 +2442,30 @@
       </p:pic>
       <p:sp>
         <p:nvSpPr>
-          <p:cNvPr id="17" name="Text 14"/>
-          <p:cNvSpPr txBox="1"/>
-          <p:nvPr/>
-        </p:nvSpPr>
-        <p:spPr>
-          <a:xfrm>
-            <a:off x="11274552" y="6400800"/>
-            <a:ext cx="548640" cy="274320"/>
-          </a:xfrm>
-          <a:prstGeom prst="rect">
-            <a:avLst/>
-          </a:prstGeom>
-          <a:noFill/>
-          <a:ln/>
-        </p:spPr>
-        <p:txBody>
-          <a:bodyPr wrap="square" lIns="0" tIns="0" rIns="0" bIns="0" rtlCol="0" anchor="ctr"/>
-          <a:lstStyle/>
-          <a:p>
-            <a:pPr algn="r" indent="0" marL="0">
-              <a:buNone/>
-            </a:pPr>
-            <a:r>
-              <a:rPr lang="en-US" sz="1000" dirty="0">
+          <p:cNvPr id="22" name="Text 19"/>
+          <p:cNvSpPr txBox="1"/>
+          <p:nvPr/>
+        </p:nvSpPr>
+        <p:spPr>
+          <a:xfrm>
+            <a:off x="6172200" y="6419088"/>
+            <a:ext cx="5394960" cy="274320"/>
+          </a:xfrm>
+          <a:prstGeom prst="rect">
+            <a:avLst/>
+          </a:prstGeom>
+          <a:noFill/>
+          <a:ln/>
+        </p:spPr>
+        <p:txBody>
+          <a:bodyPr wrap="square" lIns="0" tIns="0" rIns="0" bIns="0" rtlCol="0" anchor="ctr"/>
+          <a:lstStyle/>
+          <a:p>
+            <a:pPr algn="ctr" indent="0" marL="0">
+              <a:buNone/>
+            </a:pPr>
+            <a:r>
+              <a:rPr lang="en-US" sz="1000" i="1" dirty="0">
                 <a:solidFill>
                   <a:srgbClr val="9C7C3F"/>
                 </a:solidFill>
@@ -2280,6 +2473,45 @@
                 <a:ea typeface="Calibri" pitchFamily="34" charset="-122"/>
                 <a:cs typeface="Calibri" pitchFamily="34" charset="-120"/>
               </a:rPr>
+              <a:t>Caixa-livro · Coleção Origem</a:t>
+            </a:r>
+            <a:endParaRPr lang="en-US" sz="1000" dirty="0"/>
+          </a:p>
+        </p:txBody>
+      </p:sp>
+      <p:sp>
+        <p:nvSpPr>
+          <p:cNvPr id="23" name="Text 20"/>
+          <p:cNvSpPr txBox="1"/>
+          <p:nvPr/>
+        </p:nvSpPr>
+        <p:spPr>
+          <a:xfrm>
+            <a:off x="11274552" y="6400800"/>
+            <a:ext cx="548640" cy="274320"/>
+          </a:xfrm>
+          <a:prstGeom prst="rect">
+            <a:avLst/>
+          </a:prstGeom>
+          <a:noFill/>
+          <a:ln/>
+        </p:spPr>
+        <p:txBody>
+          <a:bodyPr wrap="square" lIns="0" tIns="0" rIns="0" bIns="0" rtlCol="0" anchor="ctr"/>
+          <a:lstStyle/>
+          <a:p>
+            <a:pPr algn="r" indent="0" marL="0">
+              <a:buNone/>
+            </a:pPr>
+            <a:r>
+              <a:rPr lang="en-US" sz="1000" dirty="0">
+                <a:solidFill>
+                  <a:srgbClr val="9C7C3F"/>
+                </a:solidFill>
+                <a:latin typeface="Calibri" pitchFamily="34" charset="0"/>
+                <a:ea typeface="Calibri" pitchFamily="34" charset="-122"/>
+                <a:cs typeface="Calibri" pitchFamily="34" charset="-120"/>
+              </a:rPr>
               <a:t>02</a:t>
             </a:r>
             <a:endParaRPr lang="en-US" sz="1000" dirty="0"/>
@@ -2288,7 +2520,7 @@
       </p:sp>
       <p:sp>
         <p:nvSpPr>
-          <p:cNvPr id="18" name="Text 15"/>
+          <p:cNvPr id="24" name="Text 21"/>
           <p:cNvSpPr txBox="1"/>
           <p:nvPr/>
         </p:nvSpPr>
@@ -5713,29 +5945,7 @@
       </p:pic>
       <p:sp>
         <p:nvSpPr>
-          <p:cNvPr id="3" name="Shape 0"/>
-          <p:cNvSpPr/>
-          <p:nvPr/>
-        </p:nvSpPr>
-        <p:spPr>
-          <a:xfrm>
-            <a:off x="4892040" y="0"/>
-            <a:ext cx="411480" cy="6858000"/>
-          </a:xfrm>
-          <a:prstGeom prst="rect">
-            <a:avLst/>
-          </a:prstGeom>
-          <a:solidFill>
-            <a:srgbClr val="17110D">
-              <a:alpha val="85000"/>
-            </a:srgbClr>
-          </a:solidFill>
-          <a:ln/>
-        </p:spPr>
-      </p:sp>
-      <p:sp>
-        <p:nvSpPr>
-          <p:cNvPr id="4" name="Text 1"/>
+          <p:cNvPr id="3" name="Text 0"/>
           <p:cNvSpPr txBox="1"/>
           <p:nvPr/>
         </p:nvSpPr>
@@ -5774,7 +5984,7 @@
       </p:sp>
       <p:sp>
         <p:nvSpPr>
-          <p:cNvPr id="5" name="Text 2"/>
+          <p:cNvPr id="4" name="Text 1"/>
           <p:cNvSpPr txBox="1"/>
           <p:nvPr/>
         </p:nvSpPr>
@@ -5856,7 +6066,7 @@
       </p:sp>
       <p:sp>
         <p:nvSpPr>
-          <p:cNvPr id="6" name="Text 3"/>
+          <p:cNvPr id="5" name="Text 2"/>
           <p:cNvSpPr txBox="1"/>
           <p:nvPr/>
         </p:nvSpPr>
@@ -5918,7 +6128,7 @@
       </p:sp>
       <p:sp>
         <p:nvSpPr>
-          <p:cNvPr id="7" name="Text 4"/>
+          <p:cNvPr id="6" name="Text 3"/>
           <p:cNvSpPr txBox="1"/>
           <p:nvPr/>
         </p:nvSpPr>
